--- a/市場規模と制作費の構造.pptx
+++ b/市場規模と制作費の構造.pptx
@@ -2682,7 +2682,7 @@
                 <a:ea typeface="Yu Gothic" pitchFamily="34" charset="-122"/>
                 <a:cs typeface="Yu Gothic" pitchFamily="34" charset="-120"/>
               </a:rPr>
-              <a:t>制作費の相場と内訳、そしてAIによる削減効果</a:t>
+              <a:t>AI導入で、制作費はいくらになり、いくら浮くのか</a:t>
             </a:r>
             <a:endParaRPr lang="en-US" sz="2500" dirty="0"/>
           </a:p>
@@ -2721,7 +2721,7 @@
                 <a:ea typeface="Yu Gothic" pitchFamily="34" charset="-122"/>
                 <a:cs typeface="Yu Gothic" pitchFamily="34" charset="-120"/>
               </a:rPr>
-              <a:t>削減が効くのは「人が動く工程」です。撮影と出演が消えると、単価の桁が変わります</a:t>
+              <a:t>削減が効くのは「人が動く工程」です。撮影・機材・出演で費用の55%。ここが消えると単価の桁が変わります</a:t>
             </a:r>
             <a:endParaRPr lang="en-US" sz="1200" dirty="0"/>
           </a:p>
@@ -2735,8 +2735,8 @@
         </p:nvSpPr>
         <p:spPr>
           <a:xfrm>
-            <a:off x="594360" y="1371600"/>
-            <a:ext cx="5669280" cy="274320"/>
+            <a:off x="594360" y="1353312"/>
+            <a:ext cx="11000232" cy="274320"/>
           </a:xfrm>
           <a:prstGeom prst="rect">
             <a:avLst/>
@@ -2760,332 +2760,2902 @@
                 <a:ea typeface="Yu Gothic" pitchFamily="34" charset="-122"/>
                 <a:cs typeface="Yu Gothic" pitchFamily="34" charset="-120"/>
               </a:rPr>
-              <a:t>用途別の制作費レンジ（対数目盛）</a:t>
+              <a:t>用途別｜現状の制作費 → AI導入後の制作費 → コストメリット</a:t>
             </a:r>
             <a:endParaRPr lang="en-US" sz="1150" dirty="0"/>
           </a:p>
         </p:txBody>
       </p:sp>
+      <p:graphicFrame>
+        <p:nvGraphicFramePr>
+          <p:cNvPr id="3" name="Table 0"/>
+          <p:cNvGraphicFramePr>
+            <a:graphicFrameLocks noGrp="1"/>
+          </p:cNvGraphicFramePr>
+          <p:nvPr>
+            <p:extLst>
+              <p:ext uri="{D42A27DB-BD31-4B8C-83A1-F6EECF244321}">
+                <p14:modId xmlns:p14="http://schemas.microsoft.com/office/powerpoint/2010/main" val="1579011935"/>
+              </p:ext>
+            </p:extLst>
+          </p:nvPr>
+        </p:nvGraphicFramePr>
+        <p:xfrm>
+          <a:off x="594360" y="1627632"/>
+          <a:ext cx="11000232" cy="914400"/>
+        </p:xfrm>
+        <a:graphic>
+          <a:graphicData uri="http://schemas.openxmlformats.org/drawingml/2006/table">
+            <a:tbl>
+              <a:tblPr/>
+              <a:tblGrid>
+                <a:gridCol w="2103120"/>
+                <a:gridCol w="1783080"/>
+                <a:gridCol w="1783080"/>
+                <a:gridCol w="2057400"/>
+                <a:gridCol w="868680"/>
+                <a:gridCol w="2404872"/>
+              </a:tblGrid>
+              <a:tr h="365760">
+                <a:tc>
+                  <a:txBody>
+                    <a:bodyPr/>
+                    <a:lstStyle/>
+                    <a:p>
+                      <a:pPr indent="0" marL="0">
+                        <a:buNone/>
+                      </a:pPr>
+                      <a:r>
+                        <a:rPr lang="en-US" sz="950" b="1" dirty="0">
+                          <a:solidFill>
+                            <a:srgbClr val="FFFFFF"/>
+                          </a:solidFill>
+                          <a:latin typeface="Yu Gothic" pitchFamily="34" charset="0"/>
+                          <a:ea typeface="Yu Gothic" pitchFamily="34" charset="-122"/>
+                          <a:cs typeface="Yu Gothic" pitchFamily="34" charset="-120"/>
+                        </a:rPr>
+                        <a:t>用途</a:t>
+                      </a:r>
+                      <a:endParaRPr lang="en-US" sz="950" dirty="0">
+                        <a:latin typeface="Yu Gothic" charset="0"/>
+                        <a:ea typeface="Yu Gothic"/>
+                        <a:cs typeface="Yu Gothic"/>
+                        <a:ea typeface="Yu Gothic" charset="0"/>
+                        <a:cs typeface="Yu Gothic" charset="0"/>
+                      </a:endParaRPr>
+                    </a:p>
+                  </a:txBody>
+                  <a:tcPr marL="88900" marR="88900" marT="50800" marB="50800" anchor="ctr">
+                    <a:lnL w="7620" cap="flat" cmpd="sng" algn="ctr">
+                      <a:solidFill>
+                        <a:srgbClr val="DCD9D4"/>
+                      </a:solidFill>
+                      <a:prstDash val="solid"/>
+                      <a:round/>
+                      <a:headEnd type="none" w="med" len="med"/>
+                      <a:tailEnd type="none" w="med" len="med"/>
+                    </a:lnL>
+                    <a:lnR w="7620" cap="flat" cmpd="sng" algn="ctr">
+                      <a:solidFill>
+                        <a:srgbClr val="DCD9D4"/>
+                      </a:solidFill>
+                      <a:prstDash val="solid"/>
+                      <a:round/>
+                      <a:headEnd type="none" w="med" len="med"/>
+                      <a:tailEnd type="none" w="med" len="med"/>
+                    </a:lnR>
+                    <a:lnT w="7620" cap="flat" cmpd="sng" algn="ctr">
+                      <a:solidFill>
+                        <a:srgbClr val="DCD9D4"/>
+                      </a:solidFill>
+                      <a:prstDash val="solid"/>
+                      <a:round/>
+                      <a:headEnd type="none" w="med" len="med"/>
+                      <a:tailEnd type="none" w="med" len="med"/>
+                    </a:lnT>
+                    <a:lnB w="7620" cap="flat" cmpd="sng" algn="ctr">
+                      <a:solidFill>
+                        <a:srgbClr val="DCD9D4"/>
+                      </a:solidFill>
+                      <a:prstDash val="solid"/>
+                      <a:round/>
+                      <a:headEnd type="none" w="med" len="med"/>
+                      <a:tailEnd type="none" w="med" len="med"/>
+                    </a:lnB>
+                    <a:solidFill>
+                      <a:srgbClr val="D9601A"/>
+                    </a:solidFill>
+                  </a:tcPr>
+                </a:tc>
+                <a:tc>
+                  <a:txBody>
+                    <a:bodyPr/>
+                    <a:lstStyle/>
+                    <a:p>
+                      <a:pPr indent="0" marL="0">
+                        <a:buNone/>
+                      </a:pPr>
+                      <a:r>
+                        <a:rPr lang="en-US" sz="950" b="1" dirty="0">
+                          <a:solidFill>
+                            <a:srgbClr val="FFFFFF"/>
+                          </a:solidFill>
+                          <a:latin typeface="Yu Gothic" pitchFamily="34" charset="0"/>
+                          <a:ea typeface="Yu Gothic" pitchFamily="34" charset="-122"/>
+                          <a:cs typeface="Yu Gothic" pitchFamily="34" charset="-120"/>
+                        </a:rPr>
+                        <a:t>現状の制作費</a:t>
+                      </a:r>
+                      <a:endParaRPr lang="en-US" sz="950" dirty="0">
+                        <a:latin typeface="Yu Gothic" charset="0"/>
+                        <a:ea typeface="Yu Gothic"/>
+                        <a:cs typeface="Yu Gothic"/>
+                        <a:ea typeface="Yu Gothic" charset="0"/>
+                        <a:cs typeface="Yu Gothic" charset="0"/>
+                      </a:endParaRPr>
+                    </a:p>
+                  </a:txBody>
+                  <a:tcPr marL="88900" marR="88900" marT="50800" marB="50800" anchor="ctr">
+                    <a:lnL w="7620" cap="flat" cmpd="sng" algn="ctr">
+                      <a:solidFill>
+                        <a:srgbClr val="DCD9D4"/>
+                      </a:solidFill>
+                      <a:prstDash val="solid"/>
+                      <a:round/>
+                      <a:headEnd type="none" w="med" len="med"/>
+                      <a:tailEnd type="none" w="med" len="med"/>
+                    </a:lnL>
+                    <a:lnR w="7620" cap="flat" cmpd="sng" algn="ctr">
+                      <a:solidFill>
+                        <a:srgbClr val="DCD9D4"/>
+                      </a:solidFill>
+                      <a:prstDash val="solid"/>
+                      <a:round/>
+                      <a:headEnd type="none" w="med" len="med"/>
+                      <a:tailEnd type="none" w="med" len="med"/>
+                    </a:lnR>
+                    <a:lnT w="7620" cap="flat" cmpd="sng" algn="ctr">
+                      <a:solidFill>
+                        <a:srgbClr val="DCD9D4"/>
+                      </a:solidFill>
+                      <a:prstDash val="solid"/>
+                      <a:round/>
+                      <a:headEnd type="none" w="med" len="med"/>
+                      <a:tailEnd type="none" w="med" len="med"/>
+                    </a:lnT>
+                    <a:lnB w="7620" cap="flat" cmpd="sng" algn="ctr">
+                      <a:solidFill>
+                        <a:srgbClr val="DCD9D4"/>
+                      </a:solidFill>
+                      <a:prstDash val="solid"/>
+                      <a:round/>
+                      <a:headEnd type="none" w="med" len="med"/>
+                      <a:tailEnd type="none" w="med" len="med"/>
+                    </a:lnB>
+                    <a:solidFill>
+                      <a:srgbClr val="D9601A"/>
+                    </a:solidFill>
+                  </a:tcPr>
+                </a:tc>
+                <a:tc>
+                  <a:txBody>
+                    <a:bodyPr/>
+                    <a:lstStyle/>
+                    <a:p>
+                      <a:pPr indent="0" marL="0">
+                        <a:buNone/>
+                      </a:pPr>
+                      <a:r>
+                        <a:rPr lang="en-US" sz="950" b="1" dirty="0">
+                          <a:solidFill>
+                            <a:srgbClr val="FFFFFF"/>
+                          </a:solidFill>
+                          <a:latin typeface="Yu Gothic" pitchFamily="34" charset="0"/>
+                          <a:ea typeface="Yu Gothic" pitchFamily="34" charset="-122"/>
+                          <a:cs typeface="Yu Gothic" pitchFamily="34" charset="-120"/>
+                        </a:rPr>
+                        <a:t>AI導入後</a:t>
+                      </a:r>
+                      <a:endParaRPr lang="en-US" sz="950" dirty="0">
+                        <a:latin typeface="Yu Gothic" charset="0"/>
+                        <a:ea typeface="Yu Gothic"/>
+                        <a:cs typeface="Yu Gothic"/>
+                        <a:ea typeface="Yu Gothic" charset="0"/>
+                        <a:cs typeface="Yu Gothic" charset="0"/>
+                      </a:endParaRPr>
+                    </a:p>
+                  </a:txBody>
+                  <a:tcPr marL="88900" marR="88900" marT="50800" marB="50800" anchor="ctr">
+                    <a:lnL w="7620" cap="flat" cmpd="sng" algn="ctr">
+                      <a:solidFill>
+                        <a:srgbClr val="DCD9D4"/>
+                      </a:solidFill>
+                      <a:prstDash val="solid"/>
+                      <a:round/>
+                      <a:headEnd type="none" w="med" len="med"/>
+                      <a:tailEnd type="none" w="med" len="med"/>
+                    </a:lnL>
+                    <a:lnR w="7620" cap="flat" cmpd="sng" algn="ctr">
+                      <a:solidFill>
+                        <a:srgbClr val="DCD9D4"/>
+                      </a:solidFill>
+                      <a:prstDash val="solid"/>
+                      <a:round/>
+                      <a:headEnd type="none" w="med" len="med"/>
+                      <a:tailEnd type="none" w="med" len="med"/>
+                    </a:lnR>
+                    <a:lnT w="7620" cap="flat" cmpd="sng" algn="ctr">
+                      <a:solidFill>
+                        <a:srgbClr val="DCD9D4"/>
+                      </a:solidFill>
+                      <a:prstDash val="solid"/>
+                      <a:round/>
+                      <a:headEnd type="none" w="med" len="med"/>
+                      <a:tailEnd type="none" w="med" len="med"/>
+                    </a:lnT>
+                    <a:lnB w="7620" cap="flat" cmpd="sng" algn="ctr">
+                      <a:solidFill>
+                        <a:srgbClr val="DCD9D4"/>
+                      </a:solidFill>
+                      <a:prstDash val="solid"/>
+                      <a:round/>
+                      <a:headEnd type="none" w="med" len="med"/>
+                      <a:tailEnd type="none" w="med" len="med"/>
+                    </a:lnB>
+                    <a:solidFill>
+                      <a:srgbClr val="D9601A"/>
+                    </a:solidFill>
+                  </a:tcPr>
+                </a:tc>
+                <a:tc>
+                  <a:txBody>
+                    <a:bodyPr/>
+                    <a:lstStyle/>
+                    <a:p>
+                      <a:pPr indent="0" marL="0">
+                        <a:buNone/>
+                      </a:pPr>
+                      <a:r>
+                        <a:rPr lang="en-US" sz="950" b="1" dirty="0">
+                          <a:solidFill>
+                            <a:srgbClr val="FFFFFF"/>
+                          </a:solidFill>
+                          <a:latin typeface="Yu Gothic" pitchFamily="34" charset="0"/>
+                          <a:ea typeface="Yu Gothic" pitchFamily="34" charset="-122"/>
+                          <a:cs typeface="Yu Gothic" pitchFamily="34" charset="-120"/>
+                        </a:rPr>
+                        <a:t>コストメリット（削減額）</a:t>
+                      </a:r>
+                      <a:endParaRPr lang="en-US" sz="950" dirty="0">
+                        <a:latin typeface="Yu Gothic" charset="0"/>
+                        <a:ea typeface="Yu Gothic"/>
+                        <a:cs typeface="Yu Gothic"/>
+                        <a:ea typeface="Yu Gothic" charset="0"/>
+                        <a:cs typeface="Yu Gothic" charset="0"/>
+                      </a:endParaRPr>
+                    </a:p>
+                  </a:txBody>
+                  <a:tcPr marL="88900" marR="88900" marT="50800" marB="50800" anchor="ctr">
+                    <a:lnL w="7620" cap="flat" cmpd="sng" algn="ctr">
+                      <a:solidFill>
+                        <a:srgbClr val="DCD9D4"/>
+                      </a:solidFill>
+                      <a:prstDash val="solid"/>
+                      <a:round/>
+                      <a:headEnd type="none" w="med" len="med"/>
+                      <a:tailEnd type="none" w="med" len="med"/>
+                    </a:lnL>
+                    <a:lnR w="7620" cap="flat" cmpd="sng" algn="ctr">
+                      <a:solidFill>
+                        <a:srgbClr val="DCD9D4"/>
+                      </a:solidFill>
+                      <a:prstDash val="solid"/>
+                      <a:round/>
+                      <a:headEnd type="none" w="med" len="med"/>
+                      <a:tailEnd type="none" w="med" len="med"/>
+                    </a:lnR>
+                    <a:lnT w="7620" cap="flat" cmpd="sng" algn="ctr">
+                      <a:solidFill>
+                        <a:srgbClr val="DCD9D4"/>
+                      </a:solidFill>
+                      <a:prstDash val="solid"/>
+                      <a:round/>
+                      <a:headEnd type="none" w="med" len="med"/>
+                      <a:tailEnd type="none" w="med" len="med"/>
+                    </a:lnT>
+                    <a:lnB w="7620" cap="flat" cmpd="sng" algn="ctr">
+                      <a:solidFill>
+                        <a:srgbClr val="DCD9D4"/>
+                      </a:solidFill>
+                      <a:prstDash val="solid"/>
+                      <a:round/>
+                      <a:headEnd type="none" w="med" len="med"/>
+                      <a:tailEnd type="none" w="med" len="med"/>
+                    </a:lnB>
+                    <a:solidFill>
+                      <a:srgbClr val="D9601A"/>
+                    </a:solidFill>
+                  </a:tcPr>
+                </a:tc>
+                <a:tc>
+                  <a:txBody>
+                    <a:bodyPr/>
+                    <a:lstStyle/>
+                    <a:p>
+                      <a:pPr indent="0" marL="0">
+                        <a:buNone/>
+                      </a:pPr>
+                      <a:r>
+                        <a:rPr lang="en-US" sz="950" b="1" dirty="0">
+                          <a:solidFill>
+                            <a:srgbClr val="FFFFFF"/>
+                          </a:solidFill>
+                          <a:latin typeface="Yu Gothic" pitchFamily="34" charset="0"/>
+                          <a:ea typeface="Yu Gothic" pitchFamily="34" charset="-122"/>
+                          <a:cs typeface="Yu Gothic" pitchFamily="34" charset="-120"/>
+                        </a:rPr>
+                        <a:t>削減率</a:t>
+                      </a:r>
+                      <a:endParaRPr lang="en-US" sz="950" dirty="0">
+                        <a:latin typeface="Yu Gothic" charset="0"/>
+                        <a:ea typeface="Yu Gothic"/>
+                        <a:cs typeface="Yu Gothic"/>
+                        <a:ea typeface="Yu Gothic" charset="0"/>
+                        <a:cs typeface="Yu Gothic" charset="0"/>
+                      </a:endParaRPr>
+                    </a:p>
+                  </a:txBody>
+                  <a:tcPr marL="88900" marR="88900" marT="50800" marB="50800" anchor="ctr">
+                    <a:lnL w="7620" cap="flat" cmpd="sng" algn="ctr">
+                      <a:solidFill>
+                        <a:srgbClr val="DCD9D4"/>
+                      </a:solidFill>
+                      <a:prstDash val="solid"/>
+                      <a:round/>
+                      <a:headEnd type="none" w="med" len="med"/>
+                      <a:tailEnd type="none" w="med" len="med"/>
+                    </a:lnL>
+                    <a:lnR w="7620" cap="flat" cmpd="sng" algn="ctr">
+                      <a:solidFill>
+                        <a:srgbClr val="DCD9D4"/>
+                      </a:solidFill>
+                      <a:prstDash val="solid"/>
+                      <a:round/>
+                      <a:headEnd type="none" w="med" len="med"/>
+                      <a:tailEnd type="none" w="med" len="med"/>
+                    </a:lnR>
+                    <a:lnT w="7620" cap="flat" cmpd="sng" algn="ctr">
+                      <a:solidFill>
+                        <a:srgbClr val="DCD9D4"/>
+                      </a:solidFill>
+                      <a:prstDash val="solid"/>
+                      <a:round/>
+                      <a:headEnd type="none" w="med" len="med"/>
+                      <a:tailEnd type="none" w="med" len="med"/>
+                    </a:lnT>
+                    <a:lnB w="7620" cap="flat" cmpd="sng" algn="ctr">
+                      <a:solidFill>
+                        <a:srgbClr val="DCD9D4"/>
+                      </a:solidFill>
+                      <a:prstDash val="solid"/>
+                      <a:round/>
+                      <a:headEnd type="none" w="med" len="med"/>
+                      <a:tailEnd type="none" w="med" len="med"/>
+                    </a:lnB>
+                    <a:solidFill>
+                      <a:srgbClr val="D9601A"/>
+                    </a:solidFill>
+                  </a:tcPr>
+                </a:tc>
+                <a:tc>
+                  <a:txBody>
+                    <a:bodyPr/>
+                    <a:lstStyle/>
+                    <a:p>
+                      <a:pPr indent="0" marL="0">
+                        <a:buNone/>
+                      </a:pPr>
+                      <a:r>
+                        <a:rPr lang="en-US" sz="950" b="1" dirty="0">
+                          <a:solidFill>
+                            <a:srgbClr val="FFFFFF"/>
+                          </a:solidFill>
+                          <a:latin typeface="Yu Gothic" pitchFamily="34" charset="0"/>
+                          <a:ea typeface="Yu Gothic" pitchFamily="34" charset="-122"/>
+                          <a:cs typeface="Yu Gothic" pitchFamily="34" charset="-120"/>
+                        </a:rPr>
+                        <a:t>AIの効き方</a:t>
+                      </a:r>
+                      <a:endParaRPr lang="en-US" sz="950" dirty="0">
+                        <a:latin typeface="Yu Gothic" charset="0"/>
+                        <a:ea typeface="Yu Gothic"/>
+                        <a:cs typeface="Yu Gothic"/>
+                        <a:ea typeface="Yu Gothic" charset="0"/>
+                        <a:cs typeface="Yu Gothic" charset="0"/>
+                      </a:endParaRPr>
+                    </a:p>
+                  </a:txBody>
+                  <a:tcPr marL="88900" marR="88900" marT="50800" marB="50800" anchor="ctr">
+                    <a:lnL w="7620" cap="flat" cmpd="sng" algn="ctr">
+                      <a:solidFill>
+                        <a:srgbClr val="DCD9D4"/>
+                      </a:solidFill>
+                      <a:prstDash val="solid"/>
+                      <a:round/>
+                      <a:headEnd type="none" w="med" len="med"/>
+                      <a:tailEnd type="none" w="med" len="med"/>
+                    </a:lnL>
+                    <a:lnR w="7620" cap="flat" cmpd="sng" algn="ctr">
+                      <a:solidFill>
+                        <a:srgbClr val="DCD9D4"/>
+                      </a:solidFill>
+                      <a:prstDash val="solid"/>
+                      <a:round/>
+                      <a:headEnd type="none" w="med" len="med"/>
+                      <a:tailEnd type="none" w="med" len="med"/>
+                    </a:lnR>
+                    <a:lnT w="7620" cap="flat" cmpd="sng" algn="ctr">
+                      <a:solidFill>
+                        <a:srgbClr val="DCD9D4"/>
+                      </a:solidFill>
+                      <a:prstDash val="solid"/>
+                      <a:round/>
+                      <a:headEnd type="none" w="med" len="med"/>
+                      <a:tailEnd type="none" w="med" len="med"/>
+                    </a:lnT>
+                    <a:lnB w="7620" cap="flat" cmpd="sng" algn="ctr">
+                      <a:solidFill>
+                        <a:srgbClr val="DCD9D4"/>
+                      </a:solidFill>
+                      <a:prstDash val="solid"/>
+                      <a:round/>
+                      <a:headEnd type="none" w="med" len="med"/>
+                      <a:tailEnd type="none" w="med" len="med"/>
+                    </a:lnB>
+                    <a:solidFill>
+                      <a:srgbClr val="D9601A"/>
+                    </a:solidFill>
+                  </a:tcPr>
+                </a:tc>
+              </a:tr>
+              <a:tr h="365760">
+                <a:tc>
+                  <a:txBody>
+                    <a:bodyPr/>
+                    <a:lstStyle/>
+                    <a:p>
+                      <a:pPr indent="0" marL="0">
+                        <a:buNone/>
+                      </a:pPr>
+                      <a:r>
+                        <a:rPr lang="en-US" sz="950" dirty="0">
+                          <a:solidFill>
+                            <a:srgbClr val="3A3A42"/>
+                          </a:solidFill>
+                          <a:latin typeface="Yu Gothic" pitchFamily="34" charset="0"/>
+                          <a:ea typeface="Yu Gothic" pitchFamily="34" charset="-122"/>
+                          <a:cs typeface="Yu Gothic" pitchFamily="34" charset="-120"/>
+                        </a:rPr>
+                        <a:t>映画（実写）</a:t>
+                      </a:r>
+                      <a:endParaRPr lang="en-US" sz="950" dirty="0">
+                        <a:latin typeface="Yu Gothic" charset="0"/>
+                        <a:ea typeface="Yu Gothic"/>
+                        <a:cs typeface="Yu Gothic"/>
+                        <a:ea typeface="Yu Gothic" charset="0"/>
+                        <a:cs typeface="Yu Gothic" charset="0"/>
+                      </a:endParaRPr>
+                    </a:p>
+                  </a:txBody>
+                  <a:tcPr marL="88900" marR="88900" marT="50800" marB="50800" anchor="ctr">
+                    <a:lnL w="7620" cap="flat" cmpd="sng" algn="ctr">
+                      <a:solidFill>
+                        <a:srgbClr val="DCD9D4"/>
+                      </a:solidFill>
+                      <a:prstDash val="solid"/>
+                      <a:round/>
+                      <a:headEnd type="none" w="med" len="med"/>
+                      <a:tailEnd type="none" w="med" len="med"/>
+                    </a:lnL>
+                    <a:lnR w="7620" cap="flat" cmpd="sng" algn="ctr">
+                      <a:solidFill>
+                        <a:srgbClr val="DCD9D4"/>
+                      </a:solidFill>
+                      <a:prstDash val="solid"/>
+                      <a:round/>
+                      <a:headEnd type="none" w="med" len="med"/>
+                      <a:tailEnd type="none" w="med" len="med"/>
+                    </a:lnR>
+                    <a:lnT w="7620" cap="flat" cmpd="sng" algn="ctr">
+                      <a:solidFill>
+                        <a:srgbClr val="DCD9D4"/>
+                      </a:solidFill>
+                      <a:prstDash val="solid"/>
+                      <a:round/>
+                      <a:headEnd type="none" w="med" len="med"/>
+                      <a:tailEnd type="none" w="med" len="med"/>
+                    </a:lnT>
+                    <a:lnB w="7620" cap="flat" cmpd="sng" algn="ctr">
+                      <a:solidFill>
+                        <a:srgbClr val="DCD9D4"/>
+                      </a:solidFill>
+                      <a:prstDash val="solid"/>
+                      <a:round/>
+                      <a:headEnd type="none" w="med" len="med"/>
+                      <a:tailEnd type="none" w="med" len="med"/>
+                    </a:lnB>
+                  </a:tcPr>
+                </a:tc>
+                <a:tc>
+                  <a:txBody>
+                    <a:bodyPr/>
+                    <a:lstStyle/>
+                    <a:p>
+                      <a:pPr indent="0" marL="0">
+                        <a:buNone/>
+                      </a:pPr>
+                      <a:r>
+                        <a:rPr lang="en-US" sz="950" dirty="0">
+                          <a:solidFill>
+                            <a:srgbClr val="3A3A42"/>
+                          </a:solidFill>
+                          <a:latin typeface="Yu Gothic" pitchFamily="34" charset="0"/>
+                          <a:ea typeface="Yu Gothic" pitchFamily="34" charset="-122"/>
+                          <a:cs typeface="Yu Gothic" pitchFamily="34" charset="-120"/>
+                        </a:rPr>
+                        <a:t>3〜5億円</a:t>
+                      </a:r>
+                      <a:endParaRPr lang="en-US" sz="950" dirty="0">
+                        <a:latin typeface="Yu Gothic" charset="0"/>
+                        <a:ea typeface="Yu Gothic"/>
+                        <a:cs typeface="Yu Gothic"/>
+                        <a:ea typeface="Yu Gothic" charset="0"/>
+                        <a:cs typeface="Yu Gothic" charset="0"/>
+                      </a:endParaRPr>
+                    </a:p>
+                  </a:txBody>
+                  <a:tcPr marL="88900" marR="88900" marT="50800" marB="50800" anchor="ctr">
+                    <a:lnL w="7620" cap="flat" cmpd="sng" algn="ctr">
+                      <a:solidFill>
+                        <a:srgbClr val="DCD9D4"/>
+                      </a:solidFill>
+                      <a:prstDash val="solid"/>
+                      <a:round/>
+                      <a:headEnd type="none" w="med" len="med"/>
+                      <a:tailEnd type="none" w="med" len="med"/>
+                    </a:lnL>
+                    <a:lnR w="7620" cap="flat" cmpd="sng" algn="ctr">
+                      <a:solidFill>
+                        <a:srgbClr val="DCD9D4"/>
+                      </a:solidFill>
+                      <a:prstDash val="solid"/>
+                      <a:round/>
+                      <a:headEnd type="none" w="med" len="med"/>
+                      <a:tailEnd type="none" w="med" len="med"/>
+                    </a:lnR>
+                    <a:lnT w="7620" cap="flat" cmpd="sng" algn="ctr">
+                      <a:solidFill>
+                        <a:srgbClr val="DCD9D4"/>
+                      </a:solidFill>
+                      <a:prstDash val="solid"/>
+                      <a:round/>
+                      <a:headEnd type="none" w="med" len="med"/>
+                      <a:tailEnd type="none" w="med" len="med"/>
+                    </a:lnT>
+                    <a:lnB w="7620" cap="flat" cmpd="sng" algn="ctr">
+                      <a:solidFill>
+                        <a:srgbClr val="DCD9D4"/>
+                      </a:solidFill>
+                      <a:prstDash val="solid"/>
+                      <a:round/>
+                      <a:headEnd type="none" w="med" len="med"/>
+                      <a:tailEnd type="none" w="med" len="med"/>
+                    </a:lnB>
+                  </a:tcPr>
+                </a:tc>
+                <a:tc>
+                  <a:txBody>
+                    <a:bodyPr/>
+                    <a:lstStyle/>
+                    <a:p>
+                      <a:pPr indent="0" marL="0">
+                        <a:buNone/>
+                      </a:pPr>
+                      <a:r>
+                        <a:rPr lang="en-US" sz="950" dirty="0">
+                          <a:solidFill>
+                            <a:srgbClr val="3A3A42"/>
+                          </a:solidFill>
+                          <a:latin typeface="Yu Gothic" pitchFamily="34" charset="0"/>
+                          <a:ea typeface="Yu Gothic" pitchFamily="34" charset="-122"/>
+                          <a:cs typeface="Yu Gothic" pitchFamily="34" charset="-120"/>
+                        </a:rPr>
+                        <a:t>2.4〜4億円</a:t>
+                      </a:r>
+                      <a:endParaRPr lang="en-US" sz="950" dirty="0">
+                        <a:latin typeface="Yu Gothic" charset="0"/>
+                        <a:ea typeface="Yu Gothic"/>
+                        <a:cs typeface="Yu Gothic"/>
+                        <a:ea typeface="Yu Gothic" charset="0"/>
+                        <a:cs typeface="Yu Gothic" charset="0"/>
+                      </a:endParaRPr>
+                    </a:p>
+                  </a:txBody>
+                  <a:tcPr marL="88900" marR="88900" marT="50800" marB="50800" anchor="ctr">
+                    <a:lnL w="7620" cap="flat" cmpd="sng" algn="ctr">
+                      <a:solidFill>
+                        <a:srgbClr val="DCD9D4"/>
+                      </a:solidFill>
+                      <a:prstDash val="solid"/>
+                      <a:round/>
+                      <a:headEnd type="none" w="med" len="med"/>
+                      <a:tailEnd type="none" w="med" len="med"/>
+                    </a:lnL>
+                    <a:lnR w="7620" cap="flat" cmpd="sng" algn="ctr">
+                      <a:solidFill>
+                        <a:srgbClr val="DCD9D4"/>
+                      </a:solidFill>
+                      <a:prstDash val="solid"/>
+                      <a:round/>
+                      <a:headEnd type="none" w="med" len="med"/>
+                      <a:tailEnd type="none" w="med" len="med"/>
+                    </a:lnR>
+                    <a:lnT w="7620" cap="flat" cmpd="sng" algn="ctr">
+                      <a:solidFill>
+                        <a:srgbClr val="DCD9D4"/>
+                      </a:solidFill>
+                      <a:prstDash val="solid"/>
+                      <a:round/>
+                      <a:headEnd type="none" w="med" len="med"/>
+                      <a:tailEnd type="none" w="med" len="med"/>
+                    </a:lnT>
+                    <a:lnB w="7620" cap="flat" cmpd="sng" algn="ctr">
+                      <a:solidFill>
+                        <a:srgbClr val="DCD9D4"/>
+                      </a:solidFill>
+                      <a:prstDash val="solid"/>
+                      <a:round/>
+                      <a:headEnd type="none" w="med" len="med"/>
+                      <a:tailEnd type="none" w="med" len="med"/>
+                    </a:lnB>
+                  </a:tcPr>
+                </a:tc>
+                <a:tc>
+                  <a:txBody>
+                    <a:bodyPr/>
+                    <a:lstStyle/>
+                    <a:p>
+                      <a:pPr indent="0" marL="0">
+                        <a:buNone/>
+                      </a:pPr>
+                      <a:r>
+                        <a:rPr lang="en-US" sz="950" b="1" dirty="0">
+                          <a:solidFill>
+                            <a:srgbClr val="B3121B"/>
+                          </a:solidFill>
+                          <a:latin typeface="Yu Gothic" pitchFamily="34" charset="0"/>
+                          <a:ea typeface="Yu Gothic" pitchFamily="34" charset="-122"/>
+                          <a:cs typeface="Yu Gothic" pitchFamily="34" charset="-120"/>
+                        </a:rPr>
+                        <a:t>▲6,000万〜1億円</a:t>
+                      </a:r>
+                      <a:endParaRPr lang="en-US" sz="950" dirty="0">
+                        <a:latin typeface="Yu Gothic" charset="0"/>
+                        <a:ea typeface="Yu Gothic"/>
+                        <a:cs typeface="Yu Gothic"/>
+                        <a:ea typeface="Yu Gothic" charset="0"/>
+                        <a:cs typeface="Yu Gothic" charset="0"/>
+                      </a:endParaRPr>
+                    </a:p>
+                  </a:txBody>
+                  <a:tcPr marL="88900" marR="88900" marT="50800" marB="50800" anchor="ctr">
+                    <a:lnL w="7620" cap="flat" cmpd="sng" algn="ctr">
+                      <a:solidFill>
+                        <a:srgbClr val="DCD9D4"/>
+                      </a:solidFill>
+                      <a:prstDash val="solid"/>
+                      <a:round/>
+                      <a:headEnd type="none" w="med" len="med"/>
+                      <a:tailEnd type="none" w="med" len="med"/>
+                    </a:lnL>
+                    <a:lnR w="7620" cap="flat" cmpd="sng" algn="ctr">
+                      <a:solidFill>
+                        <a:srgbClr val="DCD9D4"/>
+                      </a:solidFill>
+                      <a:prstDash val="solid"/>
+                      <a:round/>
+                      <a:headEnd type="none" w="med" len="med"/>
+                      <a:tailEnd type="none" w="med" len="med"/>
+                    </a:lnR>
+                    <a:lnT w="7620" cap="flat" cmpd="sng" algn="ctr">
+                      <a:solidFill>
+                        <a:srgbClr val="DCD9D4"/>
+                      </a:solidFill>
+                      <a:prstDash val="solid"/>
+                      <a:round/>
+                      <a:headEnd type="none" w="med" len="med"/>
+                      <a:tailEnd type="none" w="med" len="med"/>
+                    </a:lnT>
+                    <a:lnB w="7620" cap="flat" cmpd="sng" algn="ctr">
+                      <a:solidFill>
+                        <a:srgbClr val="DCD9D4"/>
+                      </a:solidFill>
+                      <a:prstDash val="solid"/>
+                      <a:round/>
+                      <a:headEnd type="none" w="med" len="med"/>
+                      <a:tailEnd type="none" w="med" len="med"/>
+                    </a:lnB>
+                  </a:tcPr>
+                </a:tc>
+                <a:tc>
+                  <a:txBody>
+                    <a:bodyPr/>
+                    <a:lstStyle/>
+                    <a:p>
+                      <a:pPr algn="ctr" indent="0" marL="0">
+                        <a:buNone/>
+                      </a:pPr>
+                      <a:r>
+                        <a:rPr lang="en-US" sz="950" b="1" dirty="0">
+                          <a:solidFill>
+                            <a:srgbClr val="3A3A42"/>
+                          </a:solidFill>
+                          <a:latin typeface="Yu Gothic" pitchFamily="34" charset="0"/>
+                          <a:ea typeface="Yu Gothic" pitchFamily="34" charset="-122"/>
+                          <a:cs typeface="Yu Gothic" pitchFamily="34" charset="-120"/>
+                        </a:rPr>
+                        <a:t>▲20%</a:t>
+                      </a:r>
+                      <a:endParaRPr lang="en-US" sz="950" dirty="0">
+                        <a:latin typeface="Yu Gothic" charset="0"/>
+                        <a:ea typeface="Yu Gothic"/>
+                        <a:cs typeface="Yu Gothic"/>
+                        <a:ea typeface="Yu Gothic" charset="0"/>
+                        <a:cs typeface="Yu Gothic" charset="0"/>
+                      </a:endParaRPr>
+                    </a:p>
+                  </a:txBody>
+                  <a:tcPr marL="88900" marR="88900" marT="50800" marB="50800" anchor="ctr">
+                    <a:lnL w="7620" cap="flat" cmpd="sng" algn="ctr">
+                      <a:solidFill>
+                        <a:srgbClr val="DCD9D4"/>
+                      </a:solidFill>
+                      <a:prstDash val="solid"/>
+                      <a:round/>
+                      <a:headEnd type="none" w="med" len="med"/>
+                      <a:tailEnd type="none" w="med" len="med"/>
+                    </a:lnL>
+                    <a:lnR w="7620" cap="flat" cmpd="sng" algn="ctr">
+                      <a:solidFill>
+                        <a:srgbClr val="DCD9D4"/>
+                      </a:solidFill>
+                      <a:prstDash val="solid"/>
+                      <a:round/>
+                      <a:headEnd type="none" w="med" len="med"/>
+                      <a:tailEnd type="none" w="med" len="med"/>
+                    </a:lnR>
+                    <a:lnT w="7620" cap="flat" cmpd="sng" algn="ctr">
+                      <a:solidFill>
+                        <a:srgbClr val="DCD9D4"/>
+                      </a:solidFill>
+                      <a:prstDash val="solid"/>
+                      <a:round/>
+                      <a:headEnd type="none" w="med" len="med"/>
+                      <a:tailEnd type="none" w="med" len="med"/>
+                    </a:lnT>
+                    <a:lnB w="7620" cap="flat" cmpd="sng" algn="ctr">
+                      <a:solidFill>
+                        <a:srgbClr val="DCD9D4"/>
+                      </a:solidFill>
+                      <a:prstDash val="solid"/>
+                      <a:round/>
+                      <a:headEnd type="none" w="med" len="med"/>
+                      <a:tailEnd type="none" w="med" len="med"/>
+                    </a:lnB>
+                  </a:tcPr>
+                </a:tc>
+                <a:tc>
+                  <a:txBody>
+                    <a:bodyPr/>
+                    <a:lstStyle/>
+                    <a:p>
+                      <a:pPr indent="0" marL="0">
+                        <a:buNone/>
+                      </a:pPr>
+                      <a:r>
+                        <a:rPr lang="en-US" sz="950" dirty="0">
+                          <a:solidFill>
+                            <a:srgbClr val="3A3A42"/>
+                          </a:solidFill>
+                          <a:latin typeface="Yu Gothic" pitchFamily="34" charset="0"/>
+                          <a:ea typeface="Yu Gothic" pitchFamily="34" charset="-122"/>
+                          <a:cs typeface="Yu Gothic" pitchFamily="34" charset="-120"/>
+                        </a:rPr>
+                        <a:t>部分適用のみ。VFX・群衆・背景</a:t>
+                      </a:r>
+                      <a:endParaRPr lang="en-US" sz="950" dirty="0">
+                        <a:latin typeface="Yu Gothic" charset="0"/>
+                        <a:ea typeface="Yu Gothic"/>
+                        <a:cs typeface="Yu Gothic"/>
+                        <a:ea typeface="Yu Gothic" charset="0"/>
+                        <a:cs typeface="Yu Gothic" charset="0"/>
+                      </a:endParaRPr>
+                    </a:p>
+                  </a:txBody>
+                  <a:tcPr marL="88900" marR="88900" marT="50800" marB="50800" anchor="ctr">
+                    <a:lnL w="7620" cap="flat" cmpd="sng" algn="ctr">
+                      <a:solidFill>
+                        <a:srgbClr val="DCD9D4"/>
+                      </a:solidFill>
+                      <a:prstDash val="solid"/>
+                      <a:round/>
+                      <a:headEnd type="none" w="med" len="med"/>
+                      <a:tailEnd type="none" w="med" len="med"/>
+                    </a:lnL>
+                    <a:lnR w="7620" cap="flat" cmpd="sng" algn="ctr">
+                      <a:solidFill>
+                        <a:srgbClr val="DCD9D4"/>
+                      </a:solidFill>
+                      <a:prstDash val="solid"/>
+                      <a:round/>
+                      <a:headEnd type="none" w="med" len="med"/>
+                      <a:tailEnd type="none" w="med" len="med"/>
+                    </a:lnR>
+                    <a:lnT w="7620" cap="flat" cmpd="sng" algn="ctr">
+                      <a:solidFill>
+                        <a:srgbClr val="DCD9D4"/>
+                      </a:solidFill>
+                      <a:prstDash val="solid"/>
+                      <a:round/>
+                      <a:headEnd type="none" w="med" len="med"/>
+                      <a:tailEnd type="none" w="med" len="med"/>
+                    </a:lnT>
+                    <a:lnB w="7620" cap="flat" cmpd="sng" algn="ctr">
+                      <a:solidFill>
+                        <a:srgbClr val="DCD9D4"/>
+                      </a:solidFill>
+                      <a:prstDash val="solid"/>
+                      <a:round/>
+                      <a:headEnd type="none" w="med" len="med"/>
+                      <a:tailEnd type="none" w="med" len="med"/>
+                    </a:lnB>
+                  </a:tcPr>
+                </a:tc>
+              </a:tr>
+              <a:tr h="365760">
+                <a:tc>
+                  <a:txBody>
+                    <a:bodyPr/>
+                    <a:lstStyle/>
+                    <a:p>
+                      <a:pPr indent="0" marL="0">
+                        <a:buNone/>
+                      </a:pPr>
+                      <a:r>
+                        <a:rPr lang="en-US" sz="950" dirty="0">
+                          <a:solidFill>
+                            <a:srgbClr val="3A3A42"/>
+                          </a:solidFill>
+                          <a:latin typeface="Yu Gothic" pitchFamily="34" charset="0"/>
+                          <a:ea typeface="Yu Gothic" pitchFamily="34" charset="-122"/>
+                          <a:cs typeface="Yu Gothic" pitchFamily="34" charset="-120"/>
+                        </a:rPr>
+                        <a:t>アニメ映画</a:t>
+                      </a:r>
+                      <a:endParaRPr lang="en-US" sz="950" dirty="0">
+                        <a:latin typeface="Yu Gothic" charset="0"/>
+                        <a:ea typeface="Yu Gothic"/>
+                        <a:cs typeface="Yu Gothic"/>
+                        <a:ea typeface="Yu Gothic" charset="0"/>
+                        <a:cs typeface="Yu Gothic" charset="0"/>
+                      </a:endParaRPr>
+                    </a:p>
+                  </a:txBody>
+                  <a:tcPr marL="88900" marR="88900" marT="50800" marB="50800" anchor="ctr">
+                    <a:lnL w="7620" cap="flat" cmpd="sng" algn="ctr">
+                      <a:solidFill>
+                        <a:srgbClr val="DCD9D4"/>
+                      </a:solidFill>
+                      <a:prstDash val="solid"/>
+                      <a:round/>
+                      <a:headEnd type="none" w="med" len="med"/>
+                      <a:tailEnd type="none" w="med" len="med"/>
+                    </a:lnL>
+                    <a:lnR w="7620" cap="flat" cmpd="sng" algn="ctr">
+                      <a:solidFill>
+                        <a:srgbClr val="DCD9D4"/>
+                      </a:solidFill>
+                      <a:prstDash val="solid"/>
+                      <a:round/>
+                      <a:headEnd type="none" w="med" len="med"/>
+                      <a:tailEnd type="none" w="med" len="med"/>
+                    </a:lnR>
+                    <a:lnT w="7620" cap="flat" cmpd="sng" algn="ctr">
+                      <a:solidFill>
+                        <a:srgbClr val="DCD9D4"/>
+                      </a:solidFill>
+                      <a:prstDash val="solid"/>
+                      <a:round/>
+                      <a:headEnd type="none" w="med" len="med"/>
+                      <a:tailEnd type="none" w="med" len="med"/>
+                    </a:lnT>
+                    <a:lnB w="7620" cap="flat" cmpd="sng" algn="ctr">
+                      <a:solidFill>
+                        <a:srgbClr val="DCD9D4"/>
+                      </a:solidFill>
+                      <a:prstDash val="solid"/>
+                      <a:round/>
+                      <a:headEnd type="none" w="med" len="med"/>
+                      <a:tailEnd type="none" w="med" len="med"/>
+                    </a:lnB>
+                  </a:tcPr>
+                </a:tc>
+                <a:tc>
+                  <a:txBody>
+                    <a:bodyPr/>
+                    <a:lstStyle/>
+                    <a:p>
+                      <a:pPr indent="0" marL="0">
+                        <a:buNone/>
+                      </a:pPr>
+                      <a:r>
+                        <a:rPr lang="en-US" sz="950" dirty="0">
+                          <a:solidFill>
+                            <a:srgbClr val="3A3A42"/>
+                          </a:solidFill>
+                          <a:latin typeface="Yu Gothic" pitchFamily="34" charset="0"/>
+                          <a:ea typeface="Yu Gothic" pitchFamily="34" charset="-122"/>
+                          <a:cs typeface="Yu Gothic" pitchFamily="34" charset="-120"/>
+                        </a:rPr>
+                        <a:t>1〜20億円</a:t>
+                      </a:r>
+                      <a:endParaRPr lang="en-US" sz="950" dirty="0">
+                        <a:latin typeface="Yu Gothic" charset="0"/>
+                        <a:ea typeface="Yu Gothic"/>
+                        <a:cs typeface="Yu Gothic"/>
+                        <a:ea typeface="Yu Gothic" charset="0"/>
+                        <a:cs typeface="Yu Gothic" charset="0"/>
+                      </a:endParaRPr>
+                    </a:p>
+                  </a:txBody>
+                  <a:tcPr marL="88900" marR="88900" marT="50800" marB="50800" anchor="ctr">
+                    <a:lnL w="7620" cap="flat" cmpd="sng" algn="ctr">
+                      <a:solidFill>
+                        <a:srgbClr val="DCD9D4"/>
+                      </a:solidFill>
+                      <a:prstDash val="solid"/>
+                      <a:round/>
+                      <a:headEnd type="none" w="med" len="med"/>
+                      <a:tailEnd type="none" w="med" len="med"/>
+                    </a:lnL>
+                    <a:lnR w="7620" cap="flat" cmpd="sng" algn="ctr">
+                      <a:solidFill>
+                        <a:srgbClr val="DCD9D4"/>
+                      </a:solidFill>
+                      <a:prstDash val="solid"/>
+                      <a:round/>
+                      <a:headEnd type="none" w="med" len="med"/>
+                      <a:tailEnd type="none" w="med" len="med"/>
+                    </a:lnR>
+                    <a:lnT w="7620" cap="flat" cmpd="sng" algn="ctr">
+                      <a:solidFill>
+                        <a:srgbClr val="DCD9D4"/>
+                      </a:solidFill>
+                      <a:prstDash val="solid"/>
+                      <a:round/>
+                      <a:headEnd type="none" w="med" len="med"/>
+                      <a:tailEnd type="none" w="med" len="med"/>
+                    </a:lnT>
+                    <a:lnB w="7620" cap="flat" cmpd="sng" algn="ctr">
+                      <a:solidFill>
+                        <a:srgbClr val="DCD9D4"/>
+                      </a:solidFill>
+                      <a:prstDash val="solid"/>
+                      <a:round/>
+                      <a:headEnd type="none" w="med" len="med"/>
+                      <a:tailEnd type="none" w="med" len="med"/>
+                    </a:lnB>
+                  </a:tcPr>
+                </a:tc>
+                <a:tc>
+                  <a:txBody>
+                    <a:bodyPr/>
+                    <a:lstStyle/>
+                    <a:p>
+                      <a:pPr indent="0" marL="0">
+                        <a:buNone/>
+                      </a:pPr>
+                      <a:r>
+                        <a:rPr lang="en-US" sz="950" dirty="0">
+                          <a:solidFill>
+                            <a:srgbClr val="3A3A42"/>
+                          </a:solidFill>
+                          <a:latin typeface="Yu Gothic" pitchFamily="34" charset="0"/>
+                          <a:ea typeface="Yu Gothic" pitchFamily="34" charset="-122"/>
+                          <a:cs typeface="Yu Gothic" pitchFamily="34" charset="-120"/>
+                        </a:rPr>
+                        <a:t>7,000万〜14億円</a:t>
+                      </a:r>
+                      <a:endParaRPr lang="en-US" sz="950" dirty="0">
+                        <a:latin typeface="Yu Gothic" charset="0"/>
+                        <a:ea typeface="Yu Gothic"/>
+                        <a:cs typeface="Yu Gothic"/>
+                        <a:ea typeface="Yu Gothic" charset="0"/>
+                        <a:cs typeface="Yu Gothic" charset="0"/>
+                      </a:endParaRPr>
+                    </a:p>
+                  </a:txBody>
+                  <a:tcPr marL="88900" marR="88900" marT="50800" marB="50800" anchor="ctr">
+                    <a:lnL w="7620" cap="flat" cmpd="sng" algn="ctr">
+                      <a:solidFill>
+                        <a:srgbClr val="DCD9D4"/>
+                      </a:solidFill>
+                      <a:prstDash val="solid"/>
+                      <a:round/>
+                      <a:headEnd type="none" w="med" len="med"/>
+                      <a:tailEnd type="none" w="med" len="med"/>
+                    </a:lnL>
+                    <a:lnR w="7620" cap="flat" cmpd="sng" algn="ctr">
+                      <a:solidFill>
+                        <a:srgbClr val="DCD9D4"/>
+                      </a:solidFill>
+                      <a:prstDash val="solid"/>
+                      <a:round/>
+                      <a:headEnd type="none" w="med" len="med"/>
+                      <a:tailEnd type="none" w="med" len="med"/>
+                    </a:lnR>
+                    <a:lnT w="7620" cap="flat" cmpd="sng" algn="ctr">
+                      <a:solidFill>
+                        <a:srgbClr val="DCD9D4"/>
+                      </a:solidFill>
+                      <a:prstDash val="solid"/>
+                      <a:round/>
+                      <a:headEnd type="none" w="med" len="med"/>
+                      <a:tailEnd type="none" w="med" len="med"/>
+                    </a:lnT>
+                    <a:lnB w="7620" cap="flat" cmpd="sng" algn="ctr">
+                      <a:solidFill>
+                        <a:srgbClr val="DCD9D4"/>
+                      </a:solidFill>
+                      <a:prstDash val="solid"/>
+                      <a:round/>
+                      <a:headEnd type="none" w="med" len="med"/>
+                      <a:tailEnd type="none" w="med" len="med"/>
+                    </a:lnB>
+                  </a:tcPr>
+                </a:tc>
+                <a:tc>
+                  <a:txBody>
+                    <a:bodyPr/>
+                    <a:lstStyle/>
+                    <a:p>
+                      <a:pPr indent="0" marL="0">
+                        <a:buNone/>
+                      </a:pPr>
+                      <a:r>
+                        <a:rPr lang="en-US" sz="950" b="1" dirty="0">
+                          <a:solidFill>
+                            <a:srgbClr val="B3121B"/>
+                          </a:solidFill>
+                          <a:latin typeface="Yu Gothic" pitchFamily="34" charset="0"/>
+                          <a:ea typeface="Yu Gothic" pitchFamily="34" charset="-122"/>
+                          <a:cs typeface="Yu Gothic" pitchFamily="34" charset="-120"/>
+                        </a:rPr>
+                        <a:t>▲3,000万〜6億円</a:t>
+                      </a:r>
+                      <a:endParaRPr lang="en-US" sz="950" dirty="0">
+                        <a:latin typeface="Yu Gothic" charset="0"/>
+                        <a:ea typeface="Yu Gothic"/>
+                        <a:cs typeface="Yu Gothic"/>
+                        <a:ea typeface="Yu Gothic" charset="0"/>
+                        <a:cs typeface="Yu Gothic" charset="0"/>
+                      </a:endParaRPr>
+                    </a:p>
+                  </a:txBody>
+                  <a:tcPr marL="88900" marR="88900" marT="50800" marB="50800" anchor="ctr">
+                    <a:lnL w="7620" cap="flat" cmpd="sng" algn="ctr">
+                      <a:solidFill>
+                        <a:srgbClr val="DCD9D4"/>
+                      </a:solidFill>
+                      <a:prstDash val="solid"/>
+                      <a:round/>
+                      <a:headEnd type="none" w="med" len="med"/>
+                      <a:tailEnd type="none" w="med" len="med"/>
+                    </a:lnL>
+                    <a:lnR w="7620" cap="flat" cmpd="sng" algn="ctr">
+                      <a:solidFill>
+                        <a:srgbClr val="DCD9D4"/>
+                      </a:solidFill>
+                      <a:prstDash val="solid"/>
+                      <a:round/>
+                      <a:headEnd type="none" w="med" len="med"/>
+                      <a:tailEnd type="none" w="med" len="med"/>
+                    </a:lnR>
+                    <a:lnT w="7620" cap="flat" cmpd="sng" algn="ctr">
+                      <a:solidFill>
+                        <a:srgbClr val="DCD9D4"/>
+                      </a:solidFill>
+                      <a:prstDash val="solid"/>
+                      <a:round/>
+                      <a:headEnd type="none" w="med" len="med"/>
+                      <a:tailEnd type="none" w="med" len="med"/>
+                    </a:lnT>
+                    <a:lnB w="7620" cap="flat" cmpd="sng" algn="ctr">
+                      <a:solidFill>
+                        <a:srgbClr val="DCD9D4"/>
+                      </a:solidFill>
+                      <a:prstDash val="solid"/>
+                      <a:round/>
+                      <a:headEnd type="none" w="med" len="med"/>
+                      <a:tailEnd type="none" w="med" len="med"/>
+                    </a:lnB>
+                  </a:tcPr>
+                </a:tc>
+                <a:tc>
+                  <a:txBody>
+                    <a:bodyPr/>
+                    <a:lstStyle/>
+                    <a:p>
+                      <a:pPr algn="ctr" indent="0" marL="0">
+                        <a:buNone/>
+                      </a:pPr>
+                      <a:r>
+                        <a:rPr lang="en-US" sz="950" b="1" dirty="0">
+                          <a:solidFill>
+                            <a:srgbClr val="3A3A42"/>
+                          </a:solidFill>
+                          <a:latin typeface="Yu Gothic" pitchFamily="34" charset="0"/>
+                          <a:ea typeface="Yu Gothic" pitchFamily="34" charset="-122"/>
+                          <a:cs typeface="Yu Gothic" pitchFamily="34" charset="-120"/>
+                        </a:rPr>
+                        <a:t>▲30%</a:t>
+                      </a:r>
+                      <a:endParaRPr lang="en-US" sz="950" dirty="0">
+                        <a:latin typeface="Yu Gothic" charset="0"/>
+                        <a:ea typeface="Yu Gothic"/>
+                        <a:cs typeface="Yu Gothic"/>
+                        <a:ea typeface="Yu Gothic" charset="0"/>
+                        <a:cs typeface="Yu Gothic" charset="0"/>
+                      </a:endParaRPr>
+                    </a:p>
+                  </a:txBody>
+                  <a:tcPr marL="88900" marR="88900" marT="50800" marB="50800" anchor="ctr">
+                    <a:lnL w="7620" cap="flat" cmpd="sng" algn="ctr">
+                      <a:solidFill>
+                        <a:srgbClr val="DCD9D4"/>
+                      </a:solidFill>
+                      <a:prstDash val="solid"/>
+                      <a:round/>
+                      <a:headEnd type="none" w="med" len="med"/>
+                      <a:tailEnd type="none" w="med" len="med"/>
+                    </a:lnL>
+                    <a:lnR w="7620" cap="flat" cmpd="sng" algn="ctr">
+                      <a:solidFill>
+                        <a:srgbClr val="DCD9D4"/>
+                      </a:solidFill>
+                      <a:prstDash val="solid"/>
+                      <a:round/>
+                      <a:headEnd type="none" w="med" len="med"/>
+                      <a:tailEnd type="none" w="med" len="med"/>
+                    </a:lnR>
+                    <a:lnT w="7620" cap="flat" cmpd="sng" algn="ctr">
+                      <a:solidFill>
+                        <a:srgbClr val="DCD9D4"/>
+                      </a:solidFill>
+                      <a:prstDash val="solid"/>
+                      <a:round/>
+                      <a:headEnd type="none" w="med" len="med"/>
+                      <a:tailEnd type="none" w="med" len="med"/>
+                    </a:lnT>
+                    <a:lnB w="7620" cap="flat" cmpd="sng" algn="ctr">
+                      <a:solidFill>
+                        <a:srgbClr val="DCD9D4"/>
+                      </a:solidFill>
+                      <a:prstDash val="solid"/>
+                      <a:round/>
+                      <a:headEnd type="none" w="med" len="med"/>
+                      <a:tailEnd type="none" w="med" len="med"/>
+                    </a:lnB>
+                  </a:tcPr>
+                </a:tc>
+                <a:tc>
+                  <a:txBody>
+                    <a:bodyPr/>
+                    <a:lstStyle/>
+                    <a:p>
+                      <a:pPr indent="0" marL="0">
+                        <a:buNone/>
+                      </a:pPr>
+                      <a:r>
+                        <a:rPr lang="en-US" sz="950" dirty="0">
+                          <a:solidFill>
+                            <a:srgbClr val="3A3A42"/>
+                          </a:solidFill>
+                          <a:latin typeface="Yu Gothic" pitchFamily="34" charset="0"/>
+                          <a:ea typeface="Yu Gothic" pitchFamily="34" charset="-122"/>
+                          <a:cs typeface="Yu Gothic" pitchFamily="34" charset="-120"/>
+                        </a:rPr>
+                        <a:t>中割・背景・彩色の自動化</a:t>
+                      </a:r>
+                      <a:endParaRPr lang="en-US" sz="950" dirty="0">
+                        <a:latin typeface="Yu Gothic" charset="0"/>
+                        <a:ea typeface="Yu Gothic"/>
+                        <a:cs typeface="Yu Gothic"/>
+                        <a:ea typeface="Yu Gothic" charset="0"/>
+                        <a:cs typeface="Yu Gothic" charset="0"/>
+                      </a:endParaRPr>
+                    </a:p>
+                  </a:txBody>
+                  <a:tcPr marL="88900" marR="88900" marT="50800" marB="50800" anchor="ctr">
+                    <a:lnL w="7620" cap="flat" cmpd="sng" algn="ctr">
+                      <a:solidFill>
+                        <a:srgbClr val="DCD9D4"/>
+                      </a:solidFill>
+                      <a:prstDash val="solid"/>
+                      <a:round/>
+                      <a:headEnd type="none" w="med" len="med"/>
+                      <a:tailEnd type="none" w="med" len="med"/>
+                    </a:lnL>
+                    <a:lnR w="7620" cap="flat" cmpd="sng" algn="ctr">
+                      <a:solidFill>
+                        <a:srgbClr val="DCD9D4"/>
+                      </a:solidFill>
+                      <a:prstDash val="solid"/>
+                      <a:round/>
+                      <a:headEnd type="none" w="med" len="med"/>
+                      <a:tailEnd type="none" w="med" len="med"/>
+                    </a:lnR>
+                    <a:lnT w="7620" cap="flat" cmpd="sng" algn="ctr">
+                      <a:solidFill>
+                        <a:srgbClr val="DCD9D4"/>
+                      </a:solidFill>
+                      <a:prstDash val="solid"/>
+                      <a:round/>
+                      <a:headEnd type="none" w="med" len="med"/>
+                      <a:tailEnd type="none" w="med" len="med"/>
+                    </a:lnT>
+                    <a:lnB w="7620" cap="flat" cmpd="sng" algn="ctr">
+                      <a:solidFill>
+                        <a:srgbClr val="DCD9D4"/>
+                      </a:solidFill>
+                      <a:prstDash val="solid"/>
+                      <a:round/>
+                      <a:headEnd type="none" w="med" len="med"/>
+                      <a:tailEnd type="none" w="med" len="med"/>
+                    </a:lnB>
+                  </a:tcPr>
+                </a:tc>
+              </a:tr>
+              <a:tr h="365760">
+                <a:tc>
+                  <a:txBody>
+                    <a:bodyPr/>
+                    <a:lstStyle/>
+                    <a:p>
+                      <a:pPr indent="0" marL="0">
+                        <a:buNone/>
+                      </a:pPr>
+                      <a:r>
+                        <a:rPr lang="en-US" sz="950" dirty="0">
+                          <a:solidFill>
+                            <a:srgbClr val="3A3A42"/>
+                          </a:solidFill>
+                          <a:latin typeface="Yu Gothic" pitchFamily="34" charset="0"/>
+                          <a:ea typeface="Yu Gothic" pitchFamily="34" charset="-122"/>
+                          <a:cs typeface="Yu Gothic" pitchFamily="34" charset="-120"/>
+                        </a:rPr>
+                        <a:t>テレビCM（制作費）</a:t>
+                      </a:r>
+                      <a:endParaRPr lang="en-US" sz="950" dirty="0">
+                        <a:latin typeface="Yu Gothic" charset="0"/>
+                        <a:ea typeface="Yu Gothic"/>
+                        <a:cs typeface="Yu Gothic"/>
+                        <a:ea typeface="Yu Gothic" charset="0"/>
+                        <a:cs typeface="Yu Gothic" charset="0"/>
+                      </a:endParaRPr>
+                    </a:p>
+                  </a:txBody>
+                  <a:tcPr marL="88900" marR="88900" marT="50800" marB="50800" anchor="ctr">
+                    <a:lnL w="7620" cap="flat" cmpd="sng" algn="ctr">
+                      <a:solidFill>
+                        <a:srgbClr val="DCD9D4"/>
+                      </a:solidFill>
+                      <a:prstDash val="solid"/>
+                      <a:round/>
+                      <a:headEnd type="none" w="med" len="med"/>
+                      <a:tailEnd type="none" w="med" len="med"/>
+                    </a:lnL>
+                    <a:lnR w="7620" cap="flat" cmpd="sng" algn="ctr">
+                      <a:solidFill>
+                        <a:srgbClr val="DCD9D4"/>
+                      </a:solidFill>
+                      <a:prstDash val="solid"/>
+                      <a:round/>
+                      <a:headEnd type="none" w="med" len="med"/>
+                      <a:tailEnd type="none" w="med" len="med"/>
+                    </a:lnR>
+                    <a:lnT w="7620" cap="flat" cmpd="sng" algn="ctr">
+                      <a:solidFill>
+                        <a:srgbClr val="DCD9D4"/>
+                      </a:solidFill>
+                      <a:prstDash val="solid"/>
+                      <a:round/>
+                      <a:headEnd type="none" w="med" len="med"/>
+                      <a:tailEnd type="none" w="med" len="med"/>
+                    </a:lnT>
+                    <a:lnB w="7620" cap="flat" cmpd="sng" algn="ctr">
+                      <a:solidFill>
+                        <a:srgbClr val="DCD9D4"/>
+                      </a:solidFill>
+                      <a:prstDash val="solid"/>
+                      <a:round/>
+                      <a:headEnd type="none" w="med" len="med"/>
+                      <a:tailEnd type="none" w="med" len="med"/>
+                    </a:lnB>
+                  </a:tcPr>
+                </a:tc>
+                <a:tc>
+                  <a:txBody>
+                    <a:bodyPr/>
+                    <a:lstStyle/>
+                    <a:p>
+                      <a:pPr indent="0" marL="0">
+                        <a:buNone/>
+                      </a:pPr>
+                      <a:r>
+                        <a:rPr lang="en-US" sz="950" dirty="0">
+                          <a:solidFill>
+                            <a:srgbClr val="3A3A42"/>
+                          </a:solidFill>
+                          <a:latin typeface="Yu Gothic" pitchFamily="34" charset="0"/>
+                          <a:ea typeface="Yu Gothic" pitchFamily="34" charset="-122"/>
+                          <a:cs typeface="Yu Gothic" pitchFamily="34" charset="-120"/>
+                        </a:rPr>
+                        <a:t>1,000万〜1億円</a:t>
+                      </a:r>
+                      <a:endParaRPr lang="en-US" sz="950" dirty="0">
+                        <a:latin typeface="Yu Gothic" charset="0"/>
+                        <a:ea typeface="Yu Gothic"/>
+                        <a:cs typeface="Yu Gothic"/>
+                        <a:ea typeface="Yu Gothic" charset="0"/>
+                        <a:cs typeface="Yu Gothic" charset="0"/>
+                      </a:endParaRPr>
+                    </a:p>
+                  </a:txBody>
+                  <a:tcPr marL="88900" marR="88900" marT="50800" marB="50800" anchor="ctr">
+                    <a:lnL w="7620" cap="flat" cmpd="sng" algn="ctr">
+                      <a:solidFill>
+                        <a:srgbClr val="DCD9D4"/>
+                      </a:solidFill>
+                      <a:prstDash val="solid"/>
+                      <a:round/>
+                      <a:headEnd type="none" w="med" len="med"/>
+                      <a:tailEnd type="none" w="med" len="med"/>
+                    </a:lnL>
+                    <a:lnR w="7620" cap="flat" cmpd="sng" algn="ctr">
+                      <a:solidFill>
+                        <a:srgbClr val="DCD9D4"/>
+                      </a:solidFill>
+                      <a:prstDash val="solid"/>
+                      <a:round/>
+                      <a:headEnd type="none" w="med" len="med"/>
+                      <a:tailEnd type="none" w="med" len="med"/>
+                    </a:lnR>
+                    <a:lnT w="7620" cap="flat" cmpd="sng" algn="ctr">
+                      <a:solidFill>
+                        <a:srgbClr val="DCD9D4"/>
+                      </a:solidFill>
+                      <a:prstDash val="solid"/>
+                      <a:round/>
+                      <a:headEnd type="none" w="med" len="med"/>
+                      <a:tailEnd type="none" w="med" len="med"/>
+                    </a:lnT>
+                    <a:lnB w="7620" cap="flat" cmpd="sng" algn="ctr">
+                      <a:solidFill>
+                        <a:srgbClr val="DCD9D4"/>
+                      </a:solidFill>
+                      <a:prstDash val="solid"/>
+                      <a:round/>
+                      <a:headEnd type="none" w="med" len="med"/>
+                      <a:tailEnd type="none" w="med" len="med"/>
+                    </a:lnB>
+                  </a:tcPr>
+                </a:tc>
+                <a:tc>
+                  <a:txBody>
+                    <a:bodyPr/>
+                    <a:lstStyle/>
+                    <a:p>
+                      <a:pPr indent="0" marL="0">
+                        <a:buNone/>
+                      </a:pPr>
+                      <a:r>
+                        <a:rPr lang="en-US" sz="950" dirty="0">
+                          <a:solidFill>
+                            <a:srgbClr val="3A3A42"/>
+                          </a:solidFill>
+                          <a:latin typeface="Yu Gothic" pitchFamily="34" charset="0"/>
+                          <a:ea typeface="Yu Gothic" pitchFamily="34" charset="-122"/>
+                          <a:cs typeface="Yu Gothic" pitchFamily="34" charset="-120"/>
+                        </a:rPr>
+                        <a:t>500万〜5,000万円</a:t>
+                      </a:r>
+                      <a:endParaRPr lang="en-US" sz="950" dirty="0">
+                        <a:latin typeface="Yu Gothic" charset="0"/>
+                        <a:ea typeface="Yu Gothic"/>
+                        <a:cs typeface="Yu Gothic"/>
+                        <a:ea typeface="Yu Gothic" charset="0"/>
+                        <a:cs typeface="Yu Gothic" charset="0"/>
+                      </a:endParaRPr>
+                    </a:p>
+                  </a:txBody>
+                  <a:tcPr marL="88900" marR="88900" marT="50800" marB="50800" anchor="ctr">
+                    <a:lnL w="7620" cap="flat" cmpd="sng" algn="ctr">
+                      <a:solidFill>
+                        <a:srgbClr val="DCD9D4"/>
+                      </a:solidFill>
+                      <a:prstDash val="solid"/>
+                      <a:round/>
+                      <a:headEnd type="none" w="med" len="med"/>
+                      <a:tailEnd type="none" w="med" len="med"/>
+                    </a:lnL>
+                    <a:lnR w="7620" cap="flat" cmpd="sng" algn="ctr">
+                      <a:solidFill>
+                        <a:srgbClr val="DCD9D4"/>
+                      </a:solidFill>
+                      <a:prstDash val="solid"/>
+                      <a:round/>
+                      <a:headEnd type="none" w="med" len="med"/>
+                      <a:tailEnd type="none" w="med" len="med"/>
+                    </a:lnR>
+                    <a:lnT w="7620" cap="flat" cmpd="sng" algn="ctr">
+                      <a:solidFill>
+                        <a:srgbClr val="DCD9D4"/>
+                      </a:solidFill>
+                      <a:prstDash val="solid"/>
+                      <a:round/>
+                      <a:headEnd type="none" w="med" len="med"/>
+                      <a:tailEnd type="none" w="med" len="med"/>
+                    </a:lnT>
+                    <a:lnB w="7620" cap="flat" cmpd="sng" algn="ctr">
+                      <a:solidFill>
+                        <a:srgbClr val="DCD9D4"/>
+                      </a:solidFill>
+                      <a:prstDash val="solid"/>
+                      <a:round/>
+                      <a:headEnd type="none" w="med" len="med"/>
+                      <a:tailEnd type="none" w="med" len="med"/>
+                    </a:lnB>
+                  </a:tcPr>
+                </a:tc>
+                <a:tc>
+                  <a:txBody>
+                    <a:bodyPr/>
+                    <a:lstStyle/>
+                    <a:p>
+                      <a:pPr indent="0" marL="0">
+                        <a:buNone/>
+                      </a:pPr>
+                      <a:r>
+                        <a:rPr lang="en-US" sz="950" b="1" dirty="0">
+                          <a:solidFill>
+                            <a:srgbClr val="B3121B"/>
+                          </a:solidFill>
+                          <a:latin typeface="Yu Gothic" pitchFamily="34" charset="0"/>
+                          <a:ea typeface="Yu Gothic" pitchFamily="34" charset="-122"/>
+                          <a:cs typeface="Yu Gothic" pitchFamily="34" charset="-120"/>
+                        </a:rPr>
+                        <a:t>▲500万〜5,000万円</a:t>
+                      </a:r>
+                      <a:endParaRPr lang="en-US" sz="950" dirty="0">
+                        <a:latin typeface="Yu Gothic" charset="0"/>
+                        <a:ea typeface="Yu Gothic"/>
+                        <a:cs typeface="Yu Gothic"/>
+                        <a:ea typeface="Yu Gothic" charset="0"/>
+                        <a:cs typeface="Yu Gothic" charset="0"/>
+                      </a:endParaRPr>
+                    </a:p>
+                  </a:txBody>
+                  <a:tcPr marL="88900" marR="88900" marT="50800" marB="50800" anchor="ctr">
+                    <a:lnL w="7620" cap="flat" cmpd="sng" algn="ctr">
+                      <a:solidFill>
+                        <a:srgbClr val="DCD9D4"/>
+                      </a:solidFill>
+                      <a:prstDash val="solid"/>
+                      <a:round/>
+                      <a:headEnd type="none" w="med" len="med"/>
+                      <a:tailEnd type="none" w="med" len="med"/>
+                    </a:lnL>
+                    <a:lnR w="7620" cap="flat" cmpd="sng" algn="ctr">
+                      <a:solidFill>
+                        <a:srgbClr val="DCD9D4"/>
+                      </a:solidFill>
+                      <a:prstDash val="solid"/>
+                      <a:round/>
+                      <a:headEnd type="none" w="med" len="med"/>
+                      <a:tailEnd type="none" w="med" len="med"/>
+                    </a:lnR>
+                    <a:lnT w="7620" cap="flat" cmpd="sng" algn="ctr">
+                      <a:solidFill>
+                        <a:srgbClr val="DCD9D4"/>
+                      </a:solidFill>
+                      <a:prstDash val="solid"/>
+                      <a:round/>
+                      <a:headEnd type="none" w="med" len="med"/>
+                      <a:tailEnd type="none" w="med" len="med"/>
+                    </a:lnT>
+                    <a:lnB w="7620" cap="flat" cmpd="sng" algn="ctr">
+                      <a:solidFill>
+                        <a:srgbClr val="DCD9D4"/>
+                      </a:solidFill>
+                      <a:prstDash val="solid"/>
+                      <a:round/>
+                      <a:headEnd type="none" w="med" len="med"/>
+                      <a:tailEnd type="none" w="med" len="med"/>
+                    </a:lnB>
+                  </a:tcPr>
+                </a:tc>
+                <a:tc>
+                  <a:txBody>
+                    <a:bodyPr/>
+                    <a:lstStyle/>
+                    <a:p>
+                      <a:pPr algn="ctr" indent="0" marL="0">
+                        <a:buNone/>
+                      </a:pPr>
+                      <a:r>
+                        <a:rPr lang="en-US" sz="950" b="1" dirty="0">
+                          <a:solidFill>
+                            <a:srgbClr val="3A3A42"/>
+                          </a:solidFill>
+                          <a:latin typeface="Yu Gothic" pitchFamily="34" charset="0"/>
+                          <a:ea typeface="Yu Gothic" pitchFamily="34" charset="-122"/>
+                          <a:cs typeface="Yu Gothic" pitchFamily="34" charset="-120"/>
+                        </a:rPr>
+                        <a:t>▲50%</a:t>
+                      </a:r>
+                      <a:endParaRPr lang="en-US" sz="950" dirty="0">
+                        <a:latin typeface="Yu Gothic" charset="0"/>
+                        <a:ea typeface="Yu Gothic"/>
+                        <a:cs typeface="Yu Gothic"/>
+                        <a:ea typeface="Yu Gothic" charset="0"/>
+                        <a:cs typeface="Yu Gothic" charset="0"/>
+                      </a:endParaRPr>
+                    </a:p>
+                  </a:txBody>
+                  <a:tcPr marL="88900" marR="88900" marT="50800" marB="50800" anchor="ctr">
+                    <a:lnL w="7620" cap="flat" cmpd="sng" algn="ctr">
+                      <a:solidFill>
+                        <a:srgbClr val="DCD9D4"/>
+                      </a:solidFill>
+                      <a:prstDash val="solid"/>
+                      <a:round/>
+                      <a:headEnd type="none" w="med" len="med"/>
+                      <a:tailEnd type="none" w="med" len="med"/>
+                    </a:lnL>
+                    <a:lnR w="7620" cap="flat" cmpd="sng" algn="ctr">
+                      <a:solidFill>
+                        <a:srgbClr val="DCD9D4"/>
+                      </a:solidFill>
+                      <a:prstDash val="solid"/>
+                      <a:round/>
+                      <a:headEnd type="none" w="med" len="med"/>
+                      <a:tailEnd type="none" w="med" len="med"/>
+                    </a:lnR>
+                    <a:lnT w="7620" cap="flat" cmpd="sng" algn="ctr">
+                      <a:solidFill>
+                        <a:srgbClr val="DCD9D4"/>
+                      </a:solidFill>
+                      <a:prstDash val="solid"/>
+                      <a:round/>
+                      <a:headEnd type="none" w="med" len="med"/>
+                      <a:tailEnd type="none" w="med" len="med"/>
+                    </a:lnT>
+                    <a:lnB w="7620" cap="flat" cmpd="sng" algn="ctr">
+                      <a:solidFill>
+                        <a:srgbClr val="DCD9D4"/>
+                      </a:solidFill>
+                      <a:prstDash val="solid"/>
+                      <a:round/>
+                      <a:headEnd type="none" w="med" len="med"/>
+                      <a:tailEnd type="none" w="med" len="med"/>
+                    </a:lnB>
+                  </a:tcPr>
+                </a:tc>
+                <a:tc>
+                  <a:txBody>
+                    <a:bodyPr/>
+                    <a:lstStyle/>
+                    <a:p>
+                      <a:pPr indent="0" marL="0">
+                        <a:buNone/>
+                      </a:pPr>
+                      <a:r>
+                        <a:rPr lang="en-US" sz="950" dirty="0">
+                          <a:solidFill>
+                            <a:srgbClr val="3A3A42"/>
+                          </a:solidFill>
+                          <a:latin typeface="Yu Gothic" pitchFamily="34" charset="0"/>
+                          <a:ea typeface="Yu Gothic" pitchFamily="34" charset="-122"/>
+                          <a:cs typeface="Yu Gothic" pitchFamily="34" charset="-120"/>
+                        </a:rPr>
+                        <a:t>実写×生成AIのハイブリッド</a:t>
+                      </a:r>
+                      <a:endParaRPr lang="en-US" sz="950" dirty="0">
+                        <a:latin typeface="Yu Gothic" charset="0"/>
+                        <a:ea typeface="Yu Gothic"/>
+                        <a:cs typeface="Yu Gothic"/>
+                        <a:ea typeface="Yu Gothic" charset="0"/>
+                        <a:cs typeface="Yu Gothic" charset="0"/>
+                      </a:endParaRPr>
+                    </a:p>
+                  </a:txBody>
+                  <a:tcPr marL="88900" marR="88900" marT="50800" marB="50800" anchor="ctr">
+                    <a:lnL w="7620" cap="flat" cmpd="sng" algn="ctr">
+                      <a:solidFill>
+                        <a:srgbClr val="DCD9D4"/>
+                      </a:solidFill>
+                      <a:prstDash val="solid"/>
+                      <a:round/>
+                      <a:headEnd type="none" w="med" len="med"/>
+                      <a:tailEnd type="none" w="med" len="med"/>
+                    </a:lnL>
+                    <a:lnR w="7620" cap="flat" cmpd="sng" algn="ctr">
+                      <a:solidFill>
+                        <a:srgbClr val="DCD9D4"/>
+                      </a:solidFill>
+                      <a:prstDash val="solid"/>
+                      <a:round/>
+                      <a:headEnd type="none" w="med" len="med"/>
+                      <a:tailEnd type="none" w="med" len="med"/>
+                    </a:lnR>
+                    <a:lnT w="7620" cap="flat" cmpd="sng" algn="ctr">
+                      <a:solidFill>
+                        <a:srgbClr val="DCD9D4"/>
+                      </a:solidFill>
+                      <a:prstDash val="solid"/>
+                      <a:round/>
+                      <a:headEnd type="none" w="med" len="med"/>
+                      <a:tailEnd type="none" w="med" len="med"/>
+                    </a:lnT>
+                    <a:lnB w="7620" cap="flat" cmpd="sng" algn="ctr">
+                      <a:solidFill>
+                        <a:srgbClr val="DCD9D4"/>
+                      </a:solidFill>
+                      <a:prstDash val="solid"/>
+                      <a:round/>
+                      <a:headEnd type="none" w="med" len="med"/>
+                      <a:tailEnd type="none" w="med" len="med"/>
+                    </a:lnB>
+                  </a:tcPr>
+                </a:tc>
+              </a:tr>
+              <a:tr h="365760">
+                <a:tc>
+                  <a:txBody>
+                    <a:bodyPr/>
+                    <a:lstStyle/>
+                    <a:p>
+                      <a:pPr indent="0" marL="0">
+                        <a:buNone/>
+                      </a:pPr>
+                      <a:r>
+                        <a:rPr lang="en-US" sz="950" b="1" dirty="0">
+                          <a:solidFill>
+                            <a:srgbClr val="16161A"/>
+                          </a:solidFill>
+                          <a:latin typeface="Yu Gothic" pitchFamily="34" charset="0"/>
+                          <a:ea typeface="Yu Gothic" pitchFamily="34" charset="-122"/>
+                          <a:cs typeface="Yu Gothic" pitchFamily="34" charset="-120"/>
+                        </a:rPr>
+                        <a:t>★ 企業VP・会社紹介</a:t>
+                      </a:r>
+                      <a:endParaRPr lang="en-US" sz="950" dirty="0">
+                        <a:latin typeface="Yu Gothic" charset="0"/>
+                        <a:ea typeface="Yu Gothic"/>
+                        <a:cs typeface="Yu Gothic"/>
+                        <a:ea typeface="Yu Gothic" charset="0"/>
+                        <a:cs typeface="Yu Gothic" charset="0"/>
+                      </a:endParaRPr>
+                    </a:p>
+                  </a:txBody>
+                  <a:tcPr marL="88900" marR="88900" marT="50800" marB="50800" anchor="ctr">
+                    <a:lnL w="7620" cap="flat" cmpd="sng" algn="ctr">
+                      <a:solidFill>
+                        <a:srgbClr val="DCD9D4"/>
+                      </a:solidFill>
+                      <a:prstDash val="solid"/>
+                      <a:round/>
+                      <a:headEnd type="none" w="med" len="med"/>
+                      <a:tailEnd type="none" w="med" len="med"/>
+                    </a:lnL>
+                    <a:lnR w="7620" cap="flat" cmpd="sng" algn="ctr">
+                      <a:solidFill>
+                        <a:srgbClr val="DCD9D4"/>
+                      </a:solidFill>
+                      <a:prstDash val="solid"/>
+                      <a:round/>
+                      <a:headEnd type="none" w="med" len="med"/>
+                      <a:tailEnd type="none" w="med" len="med"/>
+                    </a:lnR>
+                    <a:lnT w="7620" cap="flat" cmpd="sng" algn="ctr">
+                      <a:solidFill>
+                        <a:srgbClr val="DCD9D4"/>
+                      </a:solidFill>
+                      <a:prstDash val="solid"/>
+                      <a:round/>
+                      <a:headEnd type="none" w="med" len="med"/>
+                      <a:tailEnd type="none" w="med" len="med"/>
+                    </a:lnT>
+                    <a:lnB w="7620" cap="flat" cmpd="sng" algn="ctr">
+                      <a:solidFill>
+                        <a:srgbClr val="DCD9D4"/>
+                      </a:solidFill>
+                      <a:prstDash val="solid"/>
+                      <a:round/>
+                      <a:headEnd type="none" w="med" len="med"/>
+                      <a:tailEnd type="none" w="med" len="med"/>
+                    </a:lnB>
+                  </a:tcPr>
+                </a:tc>
+                <a:tc>
+                  <a:txBody>
+                    <a:bodyPr/>
+                    <a:lstStyle/>
+                    <a:p>
+                      <a:pPr indent="0" marL="0">
+                        <a:buNone/>
+                      </a:pPr>
+                      <a:r>
+                        <a:rPr lang="en-US" sz="950" b="1" dirty="0">
+                          <a:solidFill>
+                            <a:srgbClr val="3A3A42"/>
+                          </a:solidFill>
+                          <a:latin typeface="Yu Gothic" pitchFamily="34" charset="0"/>
+                          <a:ea typeface="Yu Gothic" pitchFamily="34" charset="-122"/>
+                          <a:cs typeface="Yu Gothic" pitchFamily="34" charset="-120"/>
+                        </a:rPr>
+                        <a:t>50〜150万円</a:t>
+                      </a:r>
+                      <a:endParaRPr lang="en-US" sz="950" dirty="0">
+                        <a:latin typeface="Yu Gothic" charset="0"/>
+                        <a:ea typeface="Yu Gothic"/>
+                        <a:cs typeface="Yu Gothic"/>
+                        <a:ea typeface="Yu Gothic" charset="0"/>
+                        <a:cs typeface="Yu Gothic" charset="0"/>
+                      </a:endParaRPr>
+                    </a:p>
+                  </a:txBody>
+                  <a:tcPr marL="88900" marR="88900" marT="50800" marB="50800" anchor="ctr">
+                    <a:lnL w="7620" cap="flat" cmpd="sng" algn="ctr">
+                      <a:solidFill>
+                        <a:srgbClr val="DCD9D4"/>
+                      </a:solidFill>
+                      <a:prstDash val="solid"/>
+                      <a:round/>
+                      <a:headEnd type="none" w="med" len="med"/>
+                      <a:tailEnd type="none" w="med" len="med"/>
+                    </a:lnL>
+                    <a:lnR w="7620" cap="flat" cmpd="sng" algn="ctr">
+                      <a:solidFill>
+                        <a:srgbClr val="DCD9D4"/>
+                      </a:solidFill>
+                      <a:prstDash val="solid"/>
+                      <a:round/>
+                      <a:headEnd type="none" w="med" len="med"/>
+                      <a:tailEnd type="none" w="med" len="med"/>
+                    </a:lnR>
+                    <a:lnT w="7620" cap="flat" cmpd="sng" algn="ctr">
+                      <a:solidFill>
+                        <a:srgbClr val="DCD9D4"/>
+                      </a:solidFill>
+                      <a:prstDash val="solid"/>
+                      <a:round/>
+                      <a:headEnd type="none" w="med" len="med"/>
+                      <a:tailEnd type="none" w="med" len="med"/>
+                    </a:lnT>
+                    <a:lnB w="7620" cap="flat" cmpd="sng" algn="ctr">
+                      <a:solidFill>
+                        <a:srgbClr val="DCD9D4"/>
+                      </a:solidFill>
+                      <a:prstDash val="solid"/>
+                      <a:round/>
+                      <a:headEnd type="none" w="med" len="med"/>
+                      <a:tailEnd type="none" w="med" len="med"/>
+                    </a:lnB>
+                  </a:tcPr>
+                </a:tc>
+                <a:tc>
+                  <a:txBody>
+                    <a:bodyPr/>
+                    <a:lstStyle/>
+                    <a:p>
+                      <a:pPr indent="0" marL="0">
+                        <a:buNone/>
+                      </a:pPr>
+                      <a:r>
+                        <a:rPr lang="en-US" sz="950" b="1" dirty="0">
+                          <a:solidFill>
+                            <a:srgbClr val="1F6F63"/>
+                          </a:solidFill>
+                          <a:latin typeface="Yu Gothic" pitchFamily="34" charset="0"/>
+                          <a:ea typeface="Yu Gothic" pitchFamily="34" charset="-122"/>
+                          <a:cs typeface="Yu Gothic" pitchFamily="34" charset="-120"/>
+                        </a:rPr>
+                        <a:t>18〜52万円</a:t>
+                      </a:r>
+                      <a:endParaRPr lang="en-US" sz="950" dirty="0">
+                        <a:latin typeface="Yu Gothic" charset="0"/>
+                        <a:ea typeface="Yu Gothic"/>
+                        <a:cs typeface="Yu Gothic"/>
+                        <a:ea typeface="Yu Gothic" charset="0"/>
+                        <a:cs typeface="Yu Gothic" charset="0"/>
+                      </a:endParaRPr>
+                    </a:p>
+                  </a:txBody>
+                  <a:tcPr marL="88900" marR="88900" marT="50800" marB="50800" anchor="ctr">
+                    <a:lnL w="7620" cap="flat" cmpd="sng" algn="ctr">
+                      <a:solidFill>
+                        <a:srgbClr val="DCD9D4"/>
+                      </a:solidFill>
+                      <a:prstDash val="solid"/>
+                      <a:round/>
+                      <a:headEnd type="none" w="med" len="med"/>
+                      <a:tailEnd type="none" w="med" len="med"/>
+                    </a:lnL>
+                    <a:lnR w="7620" cap="flat" cmpd="sng" algn="ctr">
+                      <a:solidFill>
+                        <a:srgbClr val="DCD9D4"/>
+                      </a:solidFill>
+                      <a:prstDash val="solid"/>
+                      <a:round/>
+                      <a:headEnd type="none" w="med" len="med"/>
+                      <a:tailEnd type="none" w="med" len="med"/>
+                    </a:lnR>
+                    <a:lnT w="7620" cap="flat" cmpd="sng" algn="ctr">
+                      <a:solidFill>
+                        <a:srgbClr val="DCD9D4"/>
+                      </a:solidFill>
+                      <a:prstDash val="solid"/>
+                      <a:round/>
+                      <a:headEnd type="none" w="med" len="med"/>
+                      <a:tailEnd type="none" w="med" len="med"/>
+                    </a:lnT>
+                    <a:lnB w="7620" cap="flat" cmpd="sng" algn="ctr">
+                      <a:solidFill>
+                        <a:srgbClr val="DCD9D4"/>
+                      </a:solidFill>
+                      <a:prstDash val="solid"/>
+                      <a:round/>
+                      <a:headEnd type="none" w="med" len="med"/>
+                      <a:tailEnd type="none" w="med" len="med"/>
+                    </a:lnB>
+                  </a:tcPr>
+                </a:tc>
+                <a:tc>
+                  <a:txBody>
+                    <a:bodyPr/>
+                    <a:lstStyle/>
+                    <a:p>
+                      <a:pPr indent="0" marL="0">
+                        <a:buNone/>
+                      </a:pPr>
+                      <a:r>
+                        <a:rPr lang="en-US" sz="950" b="1" dirty="0">
+                          <a:solidFill>
+                            <a:srgbClr val="B3121B"/>
+                          </a:solidFill>
+                          <a:latin typeface="Yu Gothic" pitchFamily="34" charset="0"/>
+                          <a:ea typeface="Yu Gothic" pitchFamily="34" charset="-122"/>
+                          <a:cs typeface="Yu Gothic" pitchFamily="34" charset="-120"/>
+                        </a:rPr>
+                        <a:t>▲32〜98万円</a:t>
+                      </a:r>
+                      <a:endParaRPr lang="en-US" sz="950" dirty="0">
+                        <a:latin typeface="Yu Gothic" charset="0"/>
+                        <a:ea typeface="Yu Gothic"/>
+                        <a:cs typeface="Yu Gothic"/>
+                        <a:ea typeface="Yu Gothic" charset="0"/>
+                        <a:cs typeface="Yu Gothic" charset="0"/>
+                      </a:endParaRPr>
+                    </a:p>
+                  </a:txBody>
+                  <a:tcPr marL="88900" marR="88900" marT="50800" marB="50800" anchor="ctr">
+                    <a:lnL w="7620" cap="flat" cmpd="sng" algn="ctr">
+                      <a:solidFill>
+                        <a:srgbClr val="DCD9D4"/>
+                      </a:solidFill>
+                      <a:prstDash val="solid"/>
+                      <a:round/>
+                      <a:headEnd type="none" w="med" len="med"/>
+                      <a:tailEnd type="none" w="med" len="med"/>
+                    </a:lnL>
+                    <a:lnR w="7620" cap="flat" cmpd="sng" algn="ctr">
+                      <a:solidFill>
+                        <a:srgbClr val="DCD9D4"/>
+                      </a:solidFill>
+                      <a:prstDash val="solid"/>
+                      <a:round/>
+                      <a:headEnd type="none" w="med" len="med"/>
+                      <a:tailEnd type="none" w="med" len="med"/>
+                    </a:lnR>
+                    <a:lnT w="7620" cap="flat" cmpd="sng" algn="ctr">
+                      <a:solidFill>
+                        <a:srgbClr val="DCD9D4"/>
+                      </a:solidFill>
+                      <a:prstDash val="solid"/>
+                      <a:round/>
+                      <a:headEnd type="none" w="med" len="med"/>
+                      <a:tailEnd type="none" w="med" len="med"/>
+                    </a:lnT>
+                    <a:lnB w="7620" cap="flat" cmpd="sng" algn="ctr">
+                      <a:solidFill>
+                        <a:srgbClr val="DCD9D4"/>
+                      </a:solidFill>
+                      <a:prstDash val="solid"/>
+                      <a:round/>
+                      <a:headEnd type="none" w="med" len="med"/>
+                      <a:tailEnd type="none" w="med" len="med"/>
+                    </a:lnB>
+                  </a:tcPr>
+                </a:tc>
+                <a:tc>
+                  <a:txBody>
+                    <a:bodyPr/>
+                    <a:lstStyle/>
+                    <a:p>
+                      <a:pPr algn="ctr" indent="0" marL="0">
+                        <a:buNone/>
+                      </a:pPr>
+                      <a:r>
+                        <a:rPr lang="en-US" sz="950" b="1" dirty="0">
+                          <a:solidFill>
+                            <a:srgbClr val="B3121B"/>
+                          </a:solidFill>
+                          <a:latin typeface="Yu Gothic" pitchFamily="34" charset="0"/>
+                          <a:ea typeface="Yu Gothic" pitchFamily="34" charset="-122"/>
+                          <a:cs typeface="Yu Gothic" pitchFamily="34" charset="-120"/>
+                        </a:rPr>
+                        <a:t>▲65%</a:t>
+                      </a:r>
+                      <a:endParaRPr lang="en-US" sz="950" dirty="0">
+                        <a:latin typeface="Yu Gothic" charset="0"/>
+                        <a:ea typeface="Yu Gothic"/>
+                        <a:cs typeface="Yu Gothic"/>
+                        <a:ea typeface="Yu Gothic" charset="0"/>
+                        <a:cs typeface="Yu Gothic" charset="0"/>
+                      </a:endParaRPr>
+                    </a:p>
+                  </a:txBody>
+                  <a:tcPr marL="88900" marR="88900" marT="50800" marB="50800" anchor="ctr">
+                    <a:lnL w="7620" cap="flat" cmpd="sng" algn="ctr">
+                      <a:solidFill>
+                        <a:srgbClr val="DCD9D4"/>
+                      </a:solidFill>
+                      <a:prstDash val="solid"/>
+                      <a:round/>
+                      <a:headEnd type="none" w="med" len="med"/>
+                      <a:tailEnd type="none" w="med" len="med"/>
+                    </a:lnL>
+                    <a:lnR w="7620" cap="flat" cmpd="sng" algn="ctr">
+                      <a:solidFill>
+                        <a:srgbClr val="DCD9D4"/>
+                      </a:solidFill>
+                      <a:prstDash val="solid"/>
+                      <a:round/>
+                      <a:headEnd type="none" w="med" len="med"/>
+                      <a:tailEnd type="none" w="med" len="med"/>
+                    </a:lnR>
+                    <a:lnT w="7620" cap="flat" cmpd="sng" algn="ctr">
+                      <a:solidFill>
+                        <a:srgbClr val="DCD9D4"/>
+                      </a:solidFill>
+                      <a:prstDash val="solid"/>
+                      <a:round/>
+                      <a:headEnd type="none" w="med" len="med"/>
+                      <a:tailEnd type="none" w="med" len="med"/>
+                    </a:lnT>
+                    <a:lnB w="7620" cap="flat" cmpd="sng" algn="ctr">
+                      <a:solidFill>
+                        <a:srgbClr val="DCD9D4"/>
+                      </a:solidFill>
+                      <a:prstDash val="solid"/>
+                      <a:round/>
+                      <a:headEnd type="none" w="med" len="med"/>
+                      <a:tailEnd type="none" w="med" len="med"/>
+                    </a:lnB>
+                  </a:tcPr>
+                </a:tc>
+                <a:tc>
+                  <a:txBody>
+                    <a:bodyPr/>
+                    <a:lstStyle/>
+                    <a:p>
+                      <a:pPr indent="0" marL="0">
+                        <a:buNone/>
+                      </a:pPr>
+                      <a:r>
+                        <a:rPr lang="en-US" sz="950" b="1" dirty="0">
+                          <a:solidFill>
+                            <a:srgbClr val="3A3A42"/>
+                          </a:solidFill>
+                          <a:latin typeface="Yu Gothic" pitchFamily="34" charset="0"/>
+                          <a:ea typeface="Yu Gothic" pitchFamily="34" charset="-122"/>
+                          <a:cs typeface="Yu Gothic" pitchFamily="34" charset="-120"/>
+                        </a:rPr>
+                        <a:t>フル生成AIが成立。撮影が消える</a:t>
+                      </a:r>
+                      <a:endParaRPr lang="en-US" sz="950" dirty="0">
+                        <a:latin typeface="Yu Gothic" charset="0"/>
+                        <a:ea typeface="Yu Gothic"/>
+                        <a:cs typeface="Yu Gothic"/>
+                        <a:ea typeface="Yu Gothic" charset="0"/>
+                        <a:cs typeface="Yu Gothic" charset="0"/>
+                      </a:endParaRPr>
+                    </a:p>
+                  </a:txBody>
+                  <a:tcPr marL="88900" marR="88900" marT="50800" marB="50800" anchor="ctr">
+                    <a:lnL w="7620" cap="flat" cmpd="sng" algn="ctr">
+                      <a:solidFill>
+                        <a:srgbClr val="DCD9D4"/>
+                      </a:solidFill>
+                      <a:prstDash val="solid"/>
+                      <a:round/>
+                      <a:headEnd type="none" w="med" len="med"/>
+                      <a:tailEnd type="none" w="med" len="med"/>
+                    </a:lnL>
+                    <a:lnR w="7620" cap="flat" cmpd="sng" algn="ctr">
+                      <a:solidFill>
+                        <a:srgbClr val="DCD9D4"/>
+                      </a:solidFill>
+                      <a:prstDash val="solid"/>
+                      <a:round/>
+                      <a:headEnd type="none" w="med" len="med"/>
+                      <a:tailEnd type="none" w="med" len="med"/>
+                    </a:lnR>
+                    <a:lnT w="7620" cap="flat" cmpd="sng" algn="ctr">
+                      <a:solidFill>
+                        <a:srgbClr val="DCD9D4"/>
+                      </a:solidFill>
+                      <a:prstDash val="solid"/>
+                      <a:round/>
+                      <a:headEnd type="none" w="med" len="med"/>
+                      <a:tailEnd type="none" w="med" len="med"/>
+                    </a:lnT>
+                    <a:lnB w="7620" cap="flat" cmpd="sng" algn="ctr">
+                      <a:solidFill>
+                        <a:srgbClr val="DCD9D4"/>
+                      </a:solidFill>
+                      <a:prstDash val="solid"/>
+                      <a:round/>
+                      <a:headEnd type="none" w="med" len="med"/>
+                      <a:tailEnd type="none" w="med" len="med"/>
+                    </a:lnB>
+                  </a:tcPr>
+                </a:tc>
+              </a:tr>
+              <a:tr h="365760">
+                <a:tc>
+                  <a:txBody>
+                    <a:bodyPr/>
+                    <a:lstStyle/>
+                    <a:p>
+                      <a:pPr indent="0" marL="0">
+                        <a:buNone/>
+                      </a:pPr>
+                      <a:r>
+                        <a:rPr lang="en-US" sz="950" b="1" dirty="0">
+                          <a:solidFill>
+                            <a:srgbClr val="16161A"/>
+                          </a:solidFill>
+                          <a:latin typeface="Yu Gothic" pitchFamily="34" charset="0"/>
+                          <a:ea typeface="Yu Gothic" pitchFamily="34" charset="-122"/>
+                          <a:cs typeface="Yu Gothic" pitchFamily="34" charset="-120"/>
+                        </a:rPr>
+                        <a:t>★ 展示会・社内イベント映像</a:t>
+                      </a:r>
+                      <a:endParaRPr lang="en-US" sz="950" dirty="0">
+                        <a:latin typeface="Yu Gothic" charset="0"/>
+                        <a:ea typeface="Yu Gothic"/>
+                        <a:cs typeface="Yu Gothic"/>
+                        <a:ea typeface="Yu Gothic" charset="0"/>
+                        <a:cs typeface="Yu Gothic" charset="0"/>
+                      </a:endParaRPr>
+                    </a:p>
+                  </a:txBody>
+                  <a:tcPr marL="88900" marR="88900" marT="50800" marB="50800" anchor="ctr">
+                    <a:lnL w="7620" cap="flat" cmpd="sng" algn="ctr">
+                      <a:solidFill>
+                        <a:srgbClr val="DCD9D4"/>
+                      </a:solidFill>
+                      <a:prstDash val="solid"/>
+                      <a:round/>
+                      <a:headEnd type="none" w="med" len="med"/>
+                      <a:tailEnd type="none" w="med" len="med"/>
+                    </a:lnL>
+                    <a:lnR w="7620" cap="flat" cmpd="sng" algn="ctr">
+                      <a:solidFill>
+                        <a:srgbClr val="DCD9D4"/>
+                      </a:solidFill>
+                      <a:prstDash val="solid"/>
+                      <a:round/>
+                      <a:headEnd type="none" w="med" len="med"/>
+                      <a:tailEnd type="none" w="med" len="med"/>
+                    </a:lnR>
+                    <a:lnT w="7620" cap="flat" cmpd="sng" algn="ctr">
+                      <a:solidFill>
+                        <a:srgbClr val="DCD9D4"/>
+                      </a:solidFill>
+                      <a:prstDash val="solid"/>
+                      <a:round/>
+                      <a:headEnd type="none" w="med" len="med"/>
+                      <a:tailEnd type="none" w="med" len="med"/>
+                    </a:lnT>
+                    <a:lnB w="7620" cap="flat" cmpd="sng" algn="ctr">
+                      <a:solidFill>
+                        <a:srgbClr val="DCD9D4"/>
+                      </a:solidFill>
+                      <a:prstDash val="solid"/>
+                      <a:round/>
+                      <a:headEnd type="none" w="med" len="med"/>
+                      <a:tailEnd type="none" w="med" len="med"/>
+                    </a:lnB>
+                  </a:tcPr>
+                </a:tc>
+                <a:tc>
+                  <a:txBody>
+                    <a:bodyPr/>
+                    <a:lstStyle/>
+                    <a:p>
+                      <a:pPr indent="0" marL="0">
+                        <a:buNone/>
+                      </a:pPr>
+                      <a:r>
+                        <a:rPr lang="en-US" sz="950" b="1" dirty="0">
+                          <a:solidFill>
+                            <a:srgbClr val="3A3A42"/>
+                          </a:solidFill>
+                          <a:latin typeface="Yu Gothic" pitchFamily="34" charset="0"/>
+                          <a:ea typeface="Yu Gothic" pitchFamily="34" charset="-122"/>
+                          <a:cs typeface="Yu Gothic" pitchFamily="34" charset="-120"/>
+                        </a:rPr>
+                        <a:t>20〜100万円</a:t>
+                      </a:r>
+                      <a:endParaRPr lang="en-US" sz="950" dirty="0">
+                        <a:latin typeface="Yu Gothic" charset="0"/>
+                        <a:ea typeface="Yu Gothic"/>
+                        <a:cs typeface="Yu Gothic"/>
+                        <a:ea typeface="Yu Gothic" charset="0"/>
+                        <a:cs typeface="Yu Gothic" charset="0"/>
+                      </a:endParaRPr>
+                    </a:p>
+                  </a:txBody>
+                  <a:tcPr marL="88900" marR="88900" marT="50800" marB="50800" anchor="ctr">
+                    <a:lnL w="7620" cap="flat" cmpd="sng" algn="ctr">
+                      <a:solidFill>
+                        <a:srgbClr val="DCD9D4"/>
+                      </a:solidFill>
+                      <a:prstDash val="solid"/>
+                      <a:round/>
+                      <a:headEnd type="none" w="med" len="med"/>
+                      <a:tailEnd type="none" w="med" len="med"/>
+                    </a:lnL>
+                    <a:lnR w="7620" cap="flat" cmpd="sng" algn="ctr">
+                      <a:solidFill>
+                        <a:srgbClr val="DCD9D4"/>
+                      </a:solidFill>
+                      <a:prstDash val="solid"/>
+                      <a:round/>
+                      <a:headEnd type="none" w="med" len="med"/>
+                      <a:tailEnd type="none" w="med" len="med"/>
+                    </a:lnR>
+                    <a:lnT w="7620" cap="flat" cmpd="sng" algn="ctr">
+                      <a:solidFill>
+                        <a:srgbClr val="DCD9D4"/>
+                      </a:solidFill>
+                      <a:prstDash val="solid"/>
+                      <a:round/>
+                      <a:headEnd type="none" w="med" len="med"/>
+                      <a:tailEnd type="none" w="med" len="med"/>
+                    </a:lnT>
+                    <a:lnB w="7620" cap="flat" cmpd="sng" algn="ctr">
+                      <a:solidFill>
+                        <a:srgbClr val="DCD9D4"/>
+                      </a:solidFill>
+                      <a:prstDash val="solid"/>
+                      <a:round/>
+                      <a:headEnd type="none" w="med" len="med"/>
+                      <a:tailEnd type="none" w="med" len="med"/>
+                    </a:lnB>
+                  </a:tcPr>
+                </a:tc>
+                <a:tc>
+                  <a:txBody>
+                    <a:bodyPr/>
+                    <a:lstStyle/>
+                    <a:p>
+                      <a:pPr indent="0" marL="0">
+                        <a:buNone/>
+                      </a:pPr>
+                      <a:r>
+                        <a:rPr lang="en-US" sz="950" b="1" dirty="0">
+                          <a:solidFill>
+                            <a:srgbClr val="1F6F63"/>
+                          </a:solidFill>
+                          <a:latin typeface="Yu Gothic" pitchFamily="34" charset="0"/>
+                          <a:ea typeface="Yu Gothic" pitchFamily="34" charset="-122"/>
+                          <a:cs typeface="Yu Gothic" pitchFamily="34" charset="-120"/>
+                        </a:rPr>
+                        <a:t>6〜30万円</a:t>
+                      </a:r>
+                      <a:endParaRPr lang="en-US" sz="950" dirty="0">
+                        <a:latin typeface="Yu Gothic" charset="0"/>
+                        <a:ea typeface="Yu Gothic"/>
+                        <a:cs typeface="Yu Gothic"/>
+                        <a:ea typeface="Yu Gothic" charset="0"/>
+                        <a:cs typeface="Yu Gothic" charset="0"/>
+                      </a:endParaRPr>
+                    </a:p>
+                  </a:txBody>
+                  <a:tcPr marL="88900" marR="88900" marT="50800" marB="50800" anchor="ctr">
+                    <a:lnL w="7620" cap="flat" cmpd="sng" algn="ctr">
+                      <a:solidFill>
+                        <a:srgbClr val="DCD9D4"/>
+                      </a:solidFill>
+                      <a:prstDash val="solid"/>
+                      <a:round/>
+                      <a:headEnd type="none" w="med" len="med"/>
+                      <a:tailEnd type="none" w="med" len="med"/>
+                    </a:lnL>
+                    <a:lnR w="7620" cap="flat" cmpd="sng" algn="ctr">
+                      <a:solidFill>
+                        <a:srgbClr val="DCD9D4"/>
+                      </a:solidFill>
+                      <a:prstDash val="solid"/>
+                      <a:round/>
+                      <a:headEnd type="none" w="med" len="med"/>
+                      <a:tailEnd type="none" w="med" len="med"/>
+                    </a:lnR>
+                    <a:lnT w="7620" cap="flat" cmpd="sng" algn="ctr">
+                      <a:solidFill>
+                        <a:srgbClr val="DCD9D4"/>
+                      </a:solidFill>
+                      <a:prstDash val="solid"/>
+                      <a:round/>
+                      <a:headEnd type="none" w="med" len="med"/>
+                      <a:tailEnd type="none" w="med" len="med"/>
+                    </a:lnT>
+                    <a:lnB w="7620" cap="flat" cmpd="sng" algn="ctr">
+                      <a:solidFill>
+                        <a:srgbClr val="DCD9D4"/>
+                      </a:solidFill>
+                      <a:prstDash val="solid"/>
+                      <a:round/>
+                      <a:headEnd type="none" w="med" len="med"/>
+                      <a:tailEnd type="none" w="med" len="med"/>
+                    </a:lnB>
+                  </a:tcPr>
+                </a:tc>
+                <a:tc>
+                  <a:txBody>
+                    <a:bodyPr/>
+                    <a:lstStyle/>
+                    <a:p>
+                      <a:pPr indent="0" marL="0">
+                        <a:buNone/>
+                      </a:pPr>
+                      <a:r>
+                        <a:rPr lang="en-US" sz="950" b="1" dirty="0">
+                          <a:solidFill>
+                            <a:srgbClr val="B3121B"/>
+                          </a:solidFill>
+                          <a:latin typeface="Yu Gothic" pitchFamily="34" charset="0"/>
+                          <a:ea typeface="Yu Gothic" pitchFamily="34" charset="-122"/>
+                          <a:cs typeface="Yu Gothic" pitchFamily="34" charset="-120"/>
+                        </a:rPr>
+                        <a:t>▲14〜70万円</a:t>
+                      </a:r>
+                      <a:endParaRPr lang="en-US" sz="950" dirty="0">
+                        <a:latin typeface="Yu Gothic" charset="0"/>
+                        <a:ea typeface="Yu Gothic"/>
+                        <a:cs typeface="Yu Gothic"/>
+                        <a:ea typeface="Yu Gothic" charset="0"/>
+                        <a:cs typeface="Yu Gothic" charset="0"/>
+                      </a:endParaRPr>
+                    </a:p>
+                  </a:txBody>
+                  <a:tcPr marL="88900" marR="88900" marT="50800" marB="50800" anchor="ctr">
+                    <a:lnL w="7620" cap="flat" cmpd="sng" algn="ctr">
+                      <a:solidFill>
+                        <a:srgbClr val="DCD9D4"/>
+                      </a:solidFill>
+                      <a:prstDash val="solid"/>
+                      <a:round/>
+                      <a:headEnd type="none" w="med" len="med"/>
+                      <a:tailEnd type="none" w="med" len="med"/>
+                    </a:lnL>
+                    <a:lnR w="7620" cap="flat" cmpd="sng" algn="ctr">
+                      <a:solidFill>
+                        <a:srgbClr val="DCD9D4"/>
+                      </a:solidFill>
+                      <a:prstDash val="solid"/>
+                      <a:round/>
+                      <a:headEnd type="none" w="med" len="med"/>
+                      <a:tailEnd type="none" w="med" len="med"/>
+                    </a:lnR>
+                    <a:lnT w="7620" cap="flat" cmpd="sng" algn="ctr">
+                      <a:solidFill>
+                        <a:srgbClr val="DCD9D4"/>
+                      </a:solidFill>
+                      <a:prstDash val="solid"/>
+                      <a:round/>
+                      <a:headEnd type="none" w="med" len="med"/>
+                      <a:tailEnd type="none" w="med" len="med"/>
+                    </a:lnT>
+                    <a:lnB w="7620" cap="flat" cmpd="sng" algn="ctr">
+                      <a:solidFill>
+                        <a:srgbClr val="DCD9D4"/>
+                      </a:solidFill>
+                      <a:prstDash val="solid"/>
+                      <a:round/>
+                      <a:headEnd type="none" w="med" len="med"/>
+                      <a:tailEnd type="none" w="med" len="med"/>
+                    </a:lnB>
+                  </a:tcPr>
+                </a:tc>
+                <a:tc>
+                  <a:txBody>
+                    <a:bodyPr/>
+                    <a:lstStyle/>
+                    <a:p>
+                      <a:pPr algn="ctr" indent="0" marL="0">
+                        <a:buNone/>
+                      </a:pPr>
+                      <a:r>
+                        <a:rPr lang="en-US" sz="950" b="1" dirty="0">
+                          <a:solidFill>
+                            <a:srgbClr val="B3121B"/>
+                          </a:solidFill>
+                          <a:latin typeface="Yu Gothic" pitchFamily="34" charset="0"/>
+                          <a:ea typeface="Yu Gothic" pitchFamily="34" charset="-122"/>
+                          <a:cs typeface="Yu Gothic" pitchFamily="34" charset="-120"/>
+                        </a:rPr>
+                        <a:t>▲70%</a:t>
+                      </a:r>
+                      <a:endParaRPr lang="en-US" sz="950" dirty="0">
+                        <a:latin typeface="Yu Gothic" charset="0"/>
+                        <a:ea typeface="Yu Gothic"/>
+                        <a:cs typeface="Yu Gothic"/>
+                        <a:ea typeface="Yu Gothic" charset="0"/>
+                        <a:cs typeface="Yu Gothic" charset="0"/>
+                      </a:endParaRPr>
+                    </a:p>
+                  </a:txBody>
+                  <a:tcPr marL="88900" marR="88900" marT="50800" marB="50800" anchor="ctr">
+                    <a:lnL w="7620" cap="flat" cmpd="sng" algn="ctr">
+                      <a:solidFill>
+                        <a:srgbClr val="DCD9D4"/>
+                      </a:solidFill>
+                      <a:prstDash val="solid"/>
+                      <a:round/>
+                      <a:headEnd type="none" w="med" len="med"/>
+                      <a:tailEnd type="none" w="med" len="med"/>
+                    </a:lnL>
+                    <a:lnR w="7620" cap="flat" cmpd="sng" algn="ctr">
+                      <a:solidFill>
+                        <a:srgbClr val="DCD9D4"/>
+                      </a:solidFill>
+                      <a:prstDash val="solid"/>
+                      <a:round/>
+                      <a:headEnd type="none" w="med" len="med"/>
+                      <a:tailEnd type="none" w="med" len="med"/>
+                    </a:lnR>
+                    <a:lnT w="7620" cap="flat" cmpd="sng" algn="ctr">
+                      <a:solidFill>
+                        <a:srgbClr val="DCD9D4"/>
+                      </a:solidFill>
+                      <a:prstDash val="solid"/>
+                      <a:round/>
+                      <a:headEnd type="none" w="med" len="med"/>
+                      <a:tailEnd type="none" w="med" len="med"/>
+                    </a:lnT>
+                    <a:lnB w="7620" cap="flat" cmpd="sng" algn="ctr">
+                      <a:solidFill>
+                        <a:srgbClr val="DCD9D4"/>
+                      </a:solidFill>
+                      <a:prstDash val="solid"/>
+                      <a:round/>
+                      <a:headEnd type="none" w="med" len="med"/>
+                      <a:tailEnd type="none" w="med" len="med"/>
+                    </a:lnB>
+                  </a:tcPr>
+                </a:tc>
+                <a:tc>
+                  <a:txBody>
+                    <a:bodyPr/>
+                    <a:lstStyle/>
+                    <a:p>
+                      <a:pPr indent="0" marL="0">
+                        <a:buNone/>
+                      </a:pPr>
+                      <a:r>
+                        <a:rPr lang="en-US" sz="950" b="1" dirty="0">
+                          <a:solidFill>
+                            <a:srgbClr val="3A3A42"/>
+                          </a:solidFill>
+                          <a:latin typeface="Yu Gothic" pitchFamily="34" charset="0"/>
+                          <a:ea typeface="Yu Gothic" pitchFamily="34" charset="-122"/>
+                          <a:cs typeface="Yu Gothic" pitchFamily="34" charset="-120"/>
+                        </a:rPr>
+                        <a:t>同上。ループ素材は特に効く</a:t>
+                      </a:r>
+                      <a:endParaRPr lang="en-US" sz="950" dirty="0">
+                        <a:latin typeface="Yu Gothic" charset="0"/>
+                        <a:ea typeface="Yu Gothic"/>
+                        <a:cs typeface="Yu Gothic"/>
+                        <a:ea typeface="Yu Gothic" charset="0"/>
+                        <a:cs typeface="Yu Gothic" charset="0"/>
+                      </a:endParaRPr>
+                    </a:p>
+                  </a:txBody>
+                  <a:tcPr marL="88900" marR="88900" marT="50800" marB="50800" anchor="ctr">
+                    <a:lnL w="7620" cap="flat" cmpd="sng" algn="ctr">
+                      <a:solidFill>
+                        <a:srgbClr val="DCD9D4"/>
+                      </a:solidFill>
+                      <a:prstDash val="solid"/>
+                      <a:round/>
+                      <a:headEnd type="none" w="med" len="med"/>
+                      <a:tailEnd type="none" w="med" len="med"/>
+                    </a:lnL>
+                    <a:lnR w="7620" cap="flat" cmpd="sng" algn="ctr">
+                      <a:solidFill>
+                        <a:srgbClr val="DCD9D4"/>
+                      </a:solidFill>
+                      <a:prstDash val="solid"/>
+                      <a:round/>
+                      <a:headEnd type="none" w="med" len="med"/>
+                      <a:tailEnd type="none" w="med" len="med"/>
+                    </a:lnR>
+                    <a:lnT w="7620" cap="flat" cmpd="sng" algn="ctr">
+                      <a:solidFill>
+                        <a:srgbClr val="DCD9D4"/>
+                      </a:solidFill>
+                      <a:prstDash val="solid"/>
+                      <a:round/>
+                      <a:headEnd type="none" w="med" len="med"/>
+                      <a:tailEnd type="none" w="med" len="med"/>
+                    </a:lnT>
+                    <a:lnB w="7620" cap="flat" cmpd="sng" algn="ctr">
+                      <a:solidFill>
+                        <a:srgbClr val="DCD9D4"/>
+                      </a:solidFill>
+                      <a:prstDash val="solid"/>
+                      <a:round/>
+                      <a:headEnd type="none" w="med" len="med"/>
+                      <a:tailEnd type="none" w="med" len="med"/>
+                    </a:lnB>
+                  </a:tcPr>
+                </a:tc>
+              </a:tr>
+              <a:tr h="365760">
+                <a:tc>
+                  <a:txBody>
+                    <a:bodyPr/>
+                    <a:lstStyle/>
+                    <a:p>
+                      <a:pPr indent="0" marL="0">
+                        <a:buNone/>
+                      </a:pPr>
+                      <a:r>
+                        <a:rPr lang="en-US" sz="950" b="1" dirty="0">
+                          <a:solidFill>
+                            <a:srgbClr val="16161A"/>
+                          </a:solidFill>
+                          <a:latin typeface="Yu Gothic" pitchFamily="34" charset="0"/>
+                          <a:ea typeface="Yu Gothic" pitchFamily="34" charset="-122"/>
+                          <a:cs typeface="Yu Gothic" pitchFamily="34" charset="-120"/>
+                        </a:rPr>
+                        <a:t>★ PR素材・SNS縦型</a:t>
+                      </a:r>
+                      <a:endParaRPr lang="en-US" sz="950" dirty="0">
+                        <a:latin typeface="Yu Gothic" charset="0"/>
+                        <a:ea typeface="Yu Gothic"/>
+                        <a:cs typeface="Yu Gothic"/>
+                        <a:ea typeface="Yu Gothic" charset="0"/>
+                        <a:cs typeface="Yu Gothic" charset="0"/>
+                      </a:endParaRPr>
+                    </a:p>
+                  </a:txBody>
+                  <a:tcPr marL="88900" marR="88900" marT="50800" marB="50800" anchor="ctr">
+                    <a:lnL w="7620" cap="flat" cmpd="sng" algn="ctr">
+                      <a:solidFill>
+                        <a:srgbClr val="DCD9D4"/>
+                      </a:solidFill>
+                      <a:prstDash val="solid"/>
+                      <a:round/>
+                      <a:headEnd type="none" w="med" len="med"/>
+                      <a:tailEnd type="none" w="med" len="med"/>
+                    </a:lnL>
+                    <a:lnR w="7620" cap="flat" cmpd="sng" algn="ctr">
+                      <a:solidFill>
+                        <a:srgbClr val="DCD9D4"/>
+                      </a:solidFill>
+                      <a:prstDash val="solid"/>
+                      <a:round/>
+                      <a:headEnd type="none" w="med" len="med"/>
+                      <a:tailEnd type="none" w="med" len="med"/>
+                    </a:lnR>
+                    <a:lnT w="7620" cap="flat" cmpd="sng" algn="ctr">
+                      <a:solidFill>
+                        <a:srgbClr val="DCD9D4"/>
+                      </a:solidFill>
+                      <a:prstDash val="solid"/>
+                      <a:round/>
+                      <a:headEnd type="none" w="med" len="med"/>
+                      <a:tailEnd type="none" w="med" len="med"/>
+                    </a:lnT>
+                    <a:lnB w="7620" cap="flat" cmpd="sng" algn="ctr">
+                      <a:solidFill>
+                        <a:srgbClr val="DCD9D4"/>
+                      </a:solidFill>
+                      <a:prstDash val="solid"/>
+                      <a:round/>
+                      <a:headEnd type="none" w="med" len="med"/>
+                      <a:tailEnd type="none" w="med" len="med"/>
+                    </a:lnB>
+                  </a:tcPr>
+                </a:tc>
+                <a:tc>
+                  <a:txBody>
+                    <a:bodyPr/>
+                    <a:lstStyle/>
+                    <a:p>
+                      <a:pPr indent="0" marL="0">
+                        <a:buNone/>
+                      </a:pPr>
+                      <a:r>
+                        <a:rPr lang="en-US" sz="950" b="1" dirty="0">
+                          <a:solidFill>
+                            <a:srgbClr val="3A3A42"/>
+                          </a:solidFill>
+                          <a:latin typeface="Yu Gothic" pitchFamily="34" charset="0"/>
+                          <a:ea typeface="Yu Gothic" pitchFamily="34" charset="-122"/>
+                          <a:cs typeface="Yu Gothic" pitchFamily="34" charset="-120"/>
+                        </a:rPr>
+                        <a:t>10〜50万円</a:t>
+                      </a:r>
+                      <a:endParaRPr lang="en-US" sz="950" dirty="0">
+                        <a:latin typeface="Yu Gothic" charset="0"/>
+                        <a:ea typeface="Yu Gothic"/>
+                        <a:cs typeface="Yu Gothic"/>
+                        <a:ea typeface="Yu Gothic" charset="0"/>
+                        <a:cs typeface="Yu Gothic" charset="0"/>
+                      </a:endParaRPr>
+                    </a:p>
+                  </a:txBody>
+                  <a:tcPr marL="88900" marR="88900" marT="50800" marB="50800" anchor="ctr">
+                    <a:lnL w="7620" cap="flat" cmpd="sng" algn="ctr">
+                      <a:solidFill>
+                        <a:srgbClr val="DCD9D4"/>
+                      </a:solidFill>
+                      <a:prstDash val="solid"/>
+                      <a:round/>
+                      <a:headEnd type="none" w="med" len="med"/>
+                      <a:tailEnd type="none" w="med" len="med"/>
+                    </a:lnL>
+                    <a:lnR w="7620" cap="flat" cmpd="sng" algn="ctr">
+                      <a:solidFill>
+                        <a:srgbClr val="DCD9D4"/>
+                      </a:solidFill>
+                      <a:prstDash val="solid"/>
+                      <a:round/>
+                      <a:headEnd type="none" w="med" len="med"/>
+                      <a:tailEnd type="none" w="med" len="med"/>
+                    </a:lnR>
+                    <a:lnT w="7620" cap="flat" cmpd="sng" algn="ctr">
+                      <a:solidFill>
+                        <a:srgbClr val="DCD9D4"/>
+                      </a:solidFill>
+                      <a:prstDash val="solid"/>
+                      <a:round/>
+                      <a:headEnd type="none" w="med" len="med"/>
+                      <a:tailEnd type="none" w="med" len="med"/>
+                    </a:lnT>
+                    <a:lnB w="7620" cap="flat" cmpd="sng" algn="ctr">
+                      <a:solidFill>
+                        <a:srgbClr val="DCD9D4"/>
+                      </a:solidFill>
+                      <a:prstDash val="solid"/>
+                      <a:round/>
+                      <a:headEnd type="none" w="med" len="med"/>
+                      <a:tailEnd type="none" w="med" len="med"/>
+                    </a:lnB>
+                  </a:tcPr>
+                </a:tc>
+                <a:tc>
+                  <a:txBody>
+                    <a:bodyPr/>
+                    <a:lstStyle/>
+                    <a:p>
+                      <a:pPr indent="0" marL="0">
+                        <a:buNone/>
+                      </a:pPr>
+                      <a:r>
+                        <a:rPr lang="en-US" sz="950" b="1" dirty="0">
+                          <a:solidFill>
+                            <a:srgbClr val="1F6F63"/>
+                          </a:solidFill>
+                          <a:latin typeface="Yu Gothic" pitchFamily="34" charset="0"/>
+                          <a:ea typeface="Yu Gothic" pitchFamily="34" charset="-122"/>
+                          <a:cs typeface="Yu Gothic" pitchFamily="34" charset="-120"/>
+                        </a:rPr>
+                        <a:t>2〜10万円</a:t>
+                      </a:r>
+                      <a:endParaRPr lang="en-US" sz="950" dirty="0">
+                        <a:latin typeface="Yu Gothic" charset="0"/>
+                        <a:ea typeface="Yu Gothic"/>
+                        <a:cs typeface="Yu Gothic"/>
+                        <a:ea typeface="Yu Gothic" charset="0"/>
+                        <a:cs typeface="Yu Gothic" charset="0"/>
+                      </a:endParaRPr>
+                    </a:p>
+                  </a:txBody>
+                  <a:tcPr marL="88900" marR="88900" marT="50800" marB="50800" anchor="ctr">
+                    <a:lnL w="7620" cap="flat" cmpd="sng" algn="ctr">
+                      <a:solidFill>
+                        <a:srgbClr val="DCD9D4"/>
+                      </a:solidFill>
+                      <a:prstDash val="solid"/>
+                      <a:round/>
+                      <a:headEnd type="none" w="med" len="med"/>
+                      <a:tailEnd type="none" w="med" len="med"/>
+                    </a:lnL>
+                    <a:lnR w="7620" cap="flat" cmpd="sng" algn="ctr">
+                      <a:solidFill>
+                        <a:srgbClr val="DCD9D4"/>
+                      </a:solidFill>
+                      <a:prstDash val="solid"/>
+                      <a:round/>
+                      <a:headEnd type="none" w="med" len="med"/>
+                      <a:tailEnd type="none" w="med" len="med"/>
+                    </a:lnR>
+                    <a:lnT w="7620" cap="flat" cmpd="sng" algn="ctr">
+                      <a:solidFill>
+                        <a:srgbClr val="DCD9D4"/>
+                      </a:solidFill>
+                      <a:prstDash val="solid"/>
+                      <a:round/>
+                      <a:headEnd type="none" w="med" len="med"/>
+                      <a:tailEnd type="none" w="med" len="med"/>
+                    </a:lnT>
+                    <a:lnB w="7620" cap="flat" cmpd="sng" algn="ctr">
+                      <a:solidFill>
+                        <a:srgbClr val="DCD9D4"/>
+                      </a:solidFill>
+                      <a:prstDash val="solid"/>
+                      <a:round/>
+                      <a:headEnd type="none" w="med" len="med"/>
+                      <a:tailEnd type="none" w="med" len="med"/>
+                    </a:lnB>
+                  </a:tcPr>
+                </a:tc>
+                <a:tc>
+                  <a:txBody>
+                    <a:bodyPr/>
+                    <a:lstStyle/>
+                    <a:p>
+                      <a:pPr indent="0" marL="0">
+                        <a:buNone/>
+                      </a:pPr>
+                      <a:r>
+                        <a:rPr lang="en-US" sz="950" b="1" dirty="0">
+                          <a:solidFill>
+                            <a:srgbClr val="B3121B"/>
+                          </a:solidFill>
+                          <a:latin typeface="Yu Gothic" pitchFamily="34" charset="0"/>
+                          <a:ea typeface="Yu Gothic" pitchFamily="34" charset="-122"/>
+                          <a:cs typeface="Yu Gothic" pitchFamily="34" charset="-120"/>
+                        </a:rPr>
+                        <a:t>▲8〜40万円</a:t>
+                      </a:r>
+                      <a:endParaRPr lang="en-US" sz="950" dirty="0">
+                        <a:latin typeface="Yu Gothic" charset="0"/>
+                        <a:ea typeface="Yu Gothic"/>
+                        <a:cs typeface="Yu Gothic"/>
+                        <a:ea typeface="Yu Gothic" charset="0"/>
+                        <a:cs typeface="Yu Gothic" charset="0"/>
+                      </a:endParaRPr>
+                    </a:p>
+                  </a:txBody>
+                  <a:tcPr marL="88900" marR="88900" marT="50800" marB="50800" anchor="ctr">
+                    <a:lnL w="7620" cap="flat" cmpd="sng" algn="ctr">
+                      <a:solidFill>
+                        <a:srgbClr val="DCD9D4"/>
+                      </a:solidFill>
+                      <a:prstDash val="solid"/>
+                      <a:round/>
+                      <a:headEnd type="none" w="med" len="med"/>
+                      <a:tailEnd type="none" w="med" len="med"/>
+                    </a:lnL>
+                    <a:lnR w="7620" cap="flat" cmpd="sng" algn="ctr">
+                      <a:solidFill>
+                        <a:srgbClr val="DCD9D4"/>
+                      </a:solidFill>
+                      <a:prstDash val="solid"/>
+                      <a:round/>
+                      <a:headEnd type="none" w="med" len="med"/>
+                      <a:tailEnd type="none" w="med" len="med"/>
+                    </a:lnR>
+                    <a:lnT w="7620" cap="flat" cmpd="sng" algn="ctr">
+                      <a:solidFill>
+                        <a:srgbClr val="DCD9D4"/>
+                      </a:solidFill>
+                      <a:prstDash val="solid"/>
+                      <a:round/>
+                      <a:headEnd type="none" w="med" len="med"/>
+                      <a:tailEnd type="none" w="med" len="med"/>
+                    </a:lnT>
+                    <a:lnB w="7620" cap="flat" cmpd="sng" algn="ctr">
+                      <a:solidFill>
+                        <a:srgbClr val="DCD9D4"/>
+                      </a:solidFill>
+                      <a:prstDash val="solid"/>
+                      <a:round/>
+                      <a:headEnd type="none" w="med" len="med"/>
+                      <a:tailEnd type="none" w="med" len="med"/>
+                    </a:lnB>
+                  </a:tcPr>
+                </a:tc>
+                <a:tc>
+                  <a:txBody>
+                    <a:bodyPr/>
+                    <a:lstStyle/>
+                    <a:p>
+                      <a:pPr algn="ctr" indent="0" marL="0">
+                        <a:buNone/>
+                      </a:pPr>
+                      <a:r>
+                        <a:rPr lang="en-US" sz="950" b="1" dirty="0">
+                          <a:solidFill>
+                            <a:srgbClr val="B3121B"/>
+                          </a:solidFill>
+                          <a:latin typeface="Yu Gothic" pitchFamily="34" charset="0"/>
+                          <a:ea typeface="Yu Gothic" pitchFamily="34" charset="-122"/>
+                          <a:cs typeface="Yu Gothic" pitchFamily="34" charset="-120"/>
+                        </a:rPr>
+                        <a:t>▲80%</a:t>
+                      </a:r>
+                      <a:endParaRPr lang="en-US" sz="950" dirty="0">
+                        <a:latin typeface="Yu Gothic" charset="0"/>
+                        <a:ea typeface="Yu Gothic"/>
+                        <a:cs typeface="Yu Gothic"/>
+                        <a:ea typeface="Yu Gothic" charset="0"/>
+                        <a:cs typeface="Yu Gothic" charset="0"/>
+                      </a:endParaRPr>
+                    </a:p>
+                  </a:txBody>
+                  <a:tcPr marL="88900" marR="88900" marT="50800" marB="50800" anchor="ctr">
+                    <a:lnL w="7620" cap="flat" cmpd="sng" algn="ctr">
+                      <a:solidFill>
+                        <a:srgbClr val="DCD9D4"/>
+                      </a:solidFill>
+                      <a:prstDash val="solid"/>
+                      <a:round/>
+                      <a:headEnd type="none" w="med" len="med"/>
+                      <a:tailEnd type="none" w="med" len="med"/>
+                    </a:lnL>
+                    <a:lnR w="7620" cap="flat" cmpd="sng" algn="ctr">
+                      <a:solidFill>
+                        <a:srgbClr val="DCD9D4"/>
+                      </a:solidFill>
+                      <a:prstDash val="solid"/>
+                      <a:round/>
+                      <a:headEnd type="none" w="med" len="med"/>
+                      <a:tailEnd type="none" w="med" len="med"/>
+                    </a:lnR>
+                    <a:lnT w="7620" cap="flat" cmpd="sng" algn="ctr">
+                      <a:solidFill>
+                        <a:srgbClr val="DCD9D4"/>
+                      </a:solidFill>
+                      <a:prstDash val="solid"/>
+                      <a:round/>
+                      <a:headEnd type="none" w="med" len="med"/>
+                      <a:tailEnd type="none" w="med" len="med"/>
+                    </a:lnT>
+                    <a:lnB w="7620" cap="flat" cmpd="sng" algn="ctr">
+                      <a:solidFill>
+                        <a:srgbClr val="DCD9D4"/>
+                      </a:solidFill>
+                      <a:prstDash val="solid"/>
+                      <a:round/>
+                      <a:headEnd type="none" w="med" len="med"/>
+                      <a:tailEnd type="none" w="med" len="med"/>
+                    </a:lnB>
+                  </a:tcPr>
+                </a:tc>
+                <a:tc>
+                  <a:txBody>
+                    <a:bodyPr/>
+                    <a:lstStyle/>
+                    <a:p>
+                      <a:pPr indent="0" marL="0">
+                        <a:buNone/>
+                      </a:pPr>
+                      <a:r>
+                        <a:rPr lang="en-US" sz="950" b="1" dirty="0">
+                          <a:solidFill>
+                            <a:srgbClr val="3A3A42"/>
+                          </a:solidFill>
+                          <a:latin typeface="Yu Gothic" pitchFamily="34" charset="0"/>
+                          <a:ea typeface="Yu Gothic" pitchFamily="34" charset="-122"/>
+                          <a:cs typeface="Yu Gothic" pitchFamily="34" charset="-120"/>
+                        </a:rPr>
+                        <a:t>量産前提。1本あたりが最も下がる</a:t>
+                      </a:r>
+                      <a:endParaRPr lang="en-US" sz="950" dirty="0">
+                        <a:latin typeface="Yu Gothic" charset="0"/>
+                        <a:ea typeface="Yu Gothic"/>
+                        <a:cs typeface="Yu Gothic"/>
+                        <a:ea typeface="Yu Gothic" charset="0"/>
+                        <a:cs typeface="Yu Gothic" charset="0"/>
+                      </a:endParaRPr>
+                    </a:p>
+                  </a:txBody>
+                  <a:tcPr marL="88900" marR="88900" marT="50800" marB="50800" anchor="ctr">
+                    <a:lnL w="7620" cap="flat" cmpd="sng" algn="ctr">
+                      <a:solidFill>
+                        <a:srgbClr val="DCD9D4"/>
+                      </a:solidFill>
+                      <a:prstDash val="solid"/>
+                      <a:round/>
+                      <a:headEnd type="none" w="med" len="med"/>
+                      <a:tailEnd type="none" w="med" len="med"/>
+                    </a:lnL>
+                    <a:lnR w="7620" cap="flat" cmpd="sng" algn="ctr">
+                      <a:solidFill>
+                        <a:srgbClr val="DCD9D4"/>
+                      </a:solidFill>
+                      <a:prstDash val="solid"/>
+                      <a:round/>
+                      <a:headEnd type="none" w="med" len="med"/>
+                      <a:tailEnd type="none" w="med" len="med"/>
+                    </a:lnR>
+                    <a:lnT w="7620" cap="flat" cmpd="sng" algn="ctr">
+                      <a:solidFill>
+                        <a:srgbClr val="DCD9D4"/>
+                      </a:solidFill>
+                      <a:prstDash val="solid"/>
+                      <a:round/>
+                      <a:headEnd type="none" w="med" len="med"/>
+                      <a:tailEnd type="none" w="med" len="med"/>
+                    </a:lnT>
+                    <a:lnB w="7620" cap="flat" cmpd="sng" algn="ctr">
+                      <a:solidFill>
+                        <a:srgbClr val="DCD9D4"/>
+                      </a:solidFill>
+                      <a:prstDash val="solid"/>
+                      <a:round/>
+                      <a:headEnd type="none" w="med" len="med"/>
+                      <a:tailEnd type="none" w="med" len="med"/>
+                    </a:lnB>
+                  </a:tcPr>
+                </a:tc>
+              </a:tr>
+            </a:tbl>
+          </a:graphicData>
+        </a:graphic>
+      </p:graphicFrame>
       <p:sp>
         <p:nvSpPr>
-          <p:cNvPr id="7" name="Shape 5"/>
-          <p:cNvSpPr/>
-          <p:nvPr/>
-        </p:nvSpPr>
-        <p:spPr>
-          <a:xfrm>
-            <a:off x="2103120" y="1755648"/>
-            <a:ext cx="0" cy="2395728"/>
-          </a:xfrm>
-          <a:prstGeom prst="line">
-            <a:avLst/>
-          </a:prstGeom>
-          <a:noFill/>
-          <a:ln w="9525">
-            <a:solidFill>
-              <a:srgbClr val="DCD9D4"/>
-            </a:solidFill>
-            <a:prstDash val="dash"/>
-          </a:ln>
-        </p:spPr>
-      </p:sp>
-      <p:sp>
-        <p:nvSpPr>
-          <p:cNvPr id="8" name="Text 6"/>
+          <p:cNvPr id="8" name="Text 5"/>
           <p:cNvSpPr txBox="1"/>
           <p:nvPr/>
         </p:nvSpPr>
         <p:spPr>
           <a:xfrm>
-            <a:off x="1783080" y="4133088"/>
-            <a:ext cx="640080" cy="219456"/>
-          </a:xfrm>
-          <a:prstGeom prst="rect">
-            <a:avLst/>
-          </a:prstGeom>
-          <a:noFill/>
-          <a:ln/>
-        </p:spPr>
-        <p:txBody>
-          <a:bodyPr wrap="square" lIns="0" tIns="0" rIns="0" bIns="0" rtlCol="0" anchor="ctr"/>
-          <a:lstStyle/>
-          <a:p>
-            <a:pPr algn="ctr" indent="0" marL="0">
-              <a:buNone/>
-            </a:pPr>
-            <a:r>
-              <a:rPr lang="en-US" sz="800" dirty="0">
-                <a:solidFill>
-                  <a:srgbClr val="6E6E76"/>
-                </a:solidFill>
-                <a:latin typeface="Yu Gothic" pitchFamily="34" charset="0"/>
-                <a:ea typeface="Yu Gothic" pitchFamily="34" charset="-122"/>
-                <a:cs typeface="Yu Gothic" pitchFamily="34" charset="-120"/>
-              </a:rPr>
-              <a:t>10万</a:t>
-            </a:r>
-            <a:endParaRPr lang="en-US" sz="800" dirty="0"/>
-          </a:p>
-        </p:txBody>
-      </p:sp>
-      <p:sp>
-        <p:nvSpPr>
-          <p:cNvPr id="9" name="Shape 7"/>
-          <p:cNvSpPr/>
-          <p:nvPr/>
-        </p:nvSpPr>
-        <p:spPr>
-          <a:xfrm>
-            <a:off x="2934393" y="1755648"/>
-            <a:ext cx="0" cy="2395728"/>
-          </a:xfrm>
-          <a:prstGeom prst="line">
-            <a:avLst/>
-          </a:prstGeom>
-          <a:noFill/>
-          <a:ln w="9525">
-            <a:solidFill>
-              <a:srgbClr val="DCD9D4"/>
-            </a:solidFill>
-            <a:prstDash val="dash"/>
-          </a:ln>
-        </p:spPr>
-      </p:sp>
-      <p:sp>
-        <p:nvSpPr>
-          <p:cNvPr id="10" name="Text 8"/>
-          <p:cNvSpPr txBox="1"/>
-          <p:nvPr/>
-        </p:nvSpPr>
-        <p:spPr>
-          <a:xfrm>
-            <a:off x="2614353" y="4133088"/>
-            <a:ext cx="640080" cy="219456"/>
-          </a:xfrm>
-          <a:prstGeom prst="rect">
-            <a:avLst/>
-          </a:prstGeom>
-          <a:noFill/>
-          <a:ln/>
-        </p:spPr>
-        <p:txBody>
-          <a:bodyPr wrap="square" lIns="0" tIns="0" rIns="0" bIns="0" rtlCol="0" anchor="ctr"/>
-          <a:lstStyle/>
-          <a:p>
-            <a:pPr algn="ctr" indent="0" marL="0">
-              <a:buNone/>
-            </a:pPr>
-            <a:r>
-              <a:rPr lang="en-US" sz="800" dirty="0">
-                <a:solidFill>
-                  <a:srgbClr val="6E6E76"/>
-                </a:solidFill>
-                <a:latin typeface="Yu Gothic" pitchFamily="34" charset="0"/>
-                <a:ea typeface="Yu Gothic" pitchFamily="34" charset="-122"/>
-                <a:cs typeface="Yu Gothic" pitchFamily="34" charset="-120"/>
-              </a:rPr>
-              <a:t>100万</a:t>
-            </a:r>
-            <a:endParaRPr lang="en-US" sz="800" dirty="0"/>
-          </a:p>
-        </p:txBody>
-      </p:sp>
-      <p:sp>
-        <p:nvSpPr>
-          <p:cNvPr id="11" name="Shape 9"/>
-          <p:cNvSpPr/>
-          <p:nvPr/>
-        </p:nvSpPr>
-        <p:spPr>
-          <a:xfrm>
-            <a:off x="3765665" y="1755648"/>
-            <a:ext cx="0" cy="2395728"/>
-          </a:xfrm>
-          <a:prstGeom prst="line">
-            <a:avLst/>
-          </a:prstGeom>
-          <a:noFill/>
-          <a:ln w="9525">
-            <a:solidFill>
-              <a:srgbClr val="DCD9D4"/>
-            </a:solidFill>
-            <a:prstDash val="dash"/>
-          </a:ln>
-        </p:spPr>
-      </p:sp>
-      <p:sp>
-        <p:nvSpPr>
-          <p:cNvPr id="12" name="Text 10"/>
-          <p:cNvSpPr txBox="1"/>
-          <p:nvPr/>
-        </p:nvSpPr>
-        <p:spPr>
-          <a:xfrm>
-            <a:off x="3445625" y="4133088"/>
-            <a:ext cx="640080" cy="219456"/>
-          </a:xfrm>
-          <a:prstGeom prst="rect">
-            <a:avLst/>
-          </a:prstGeom>
-          <a:noFill/>
-          <a:ln/>
-        </p:spPr>
-        <p:txBody>
-          <a:bodyPr wrap="square" lIns="0" tIns="0" rIns="0" bIns="0" rtlCol="0" anchor="ctr"/>
-          <a:lstStyle/>
-          <a:p>
-            <a:pPr algn="ctr" indent="0" marL="0">
-              <a:buNone/>
-            </a:pPr>
-            <a:r>
-              <a:rPr lang="en-US" sz="800" dirty="0">
-                <a:solidFill>
-                  <a:srgbClr val="6E6E76"/>
-                </a:solidFill>
-                <a:latin typeface="Yu Gothic" pitchFamily="34" charset="0"/>
-                <a:ea typeface="Yu Gothic" pitchFamily="34" charset="-122"/>
-                <a:cs typeface="Yu Gothic" pitchFamily="34" charset="-120"/>
-              </a:rPr>
-              <a:t>1,000万</a:t>
-            </a:r>
-            <a:endParaRPr lang="en-US" sz="800" dirty="0"/>
-          </a:p>
-        </p:txBody>
-      </p:sp>
-      <p:sp>
-        <p:nvSpPr>
-          <p:cNvPr id="13" name="Shape 11"/>
-          <p:cNvSpPr/>
-          <p:nvPr/>
-        </p:nvSpPr>
-        <p:spPr>
-          <a:xfrm>
-            <a:off x="4596938" y="1755648"/>
-            <a:ext cx="0" cy="2395728"/>
-          </a:xfrm>
-          <a:prstGeom prst="line">
-            <a:avLst/>
-          </a:prstGeom>
-          <a:noFill/>
-          <a:ln w="9525">
-            <a:solidFill>
-              <a:srgbClr val="DCD9D4"/>
-            </a:solidFill>
-            <a:prstDash val="dash"/>
-          </a:ln>
-        </p:spPr>
-      </p:sp>
-      <p:sp>
-        <p:nvSpPr>
-          <p:cNvPr id="14" name="Text 12"/>
-          <p:cNvSpPr txBox="1"/>
-          <p:nvPr/>
-        </p:nvSpPr>
-        <p:spPr>
-          <a:xfrm>
-            <a:off x="4276898" y="4133088"/>
-            <a:ext cx="640080" cy="219456"/>
-          </a:xfrm>
-          <a:prstGeom prst="rect">
-            <a:avLst/>
-          </a:prstGeom>
-          <a:noFill/>
-          <a:ln/>
-        </p:spPr>
-        <p:txBody>
-          <a:bodyPr wrap="square" lIns="0" tIns="0" rIns="0" bIns="0" rtlCol="0" anchor="ctr"/>
-          <a:lstStyle/>
-          <a:p>
-            <a:pPr algn="ctr" indent="0" marL="0">
-              <a:buNone/>
-            </a:pPr>
-            <a:r>
-              <a:rPr lang="en-US" sz="800" dirty="0">
-                <a:solidFill>
-                  <a:srgbClr val="6E6E76"/>
-                </a:solidFill>
-                <a:latin typeface="Yu Gothic" pitchFamily="34" charset="0"/>
-                <a:ea typeface="Yu Gothic" pitchFamily="34" charset="-122"/>
-                <a:cs typeface="Yu Gothic" pitchFamily="34" charset="-120"/>
-              </a:rPr>
-              <a:t>1億</a:t>
-            </a:r>
-            <a:endParaRPr lang="en-US" sz="800" dirty="0"/>
-          </a:p>
-        </p:txBody>
-      </p:sp>
-      <p:sp>
-        <p:nvSpPr>
-          <p:cNvPr id="15" name="Shape 13"/>
-          <p:cNvSpPr/>
-          <p:nvPr/>
-        </p:nvSpPr>
-        <p:spPr>
-          <a:xfrm>
-            <a:off x="5428211" y="1755648"/>
-            <a:ext cx="0" cy="2395728"/>
-          </a:xfrm>
-          <a:prstGeom prst="line">
-            <a:avLst/>
-          </a:prstGeom>
-          <a:noFill/>
-          <a:ln w="9525">
-            <a:solidFill>
-              <a:srgbClr val="DCD9D4"/>
-            </a:solidFill>
-            <a:prstDash val="dash"/>
-          </a:ln>
-        </p:spPr>
-      </p:sp>
-      <p:sp>
-        <p:nvSpPr>
-          <p:cNvPr id="16" name="Text 14"/>
-          <p:cNvSpPr txBox="1"/>
-          <p:nvPr/>
-        </p:nvSpPr>
-        <p:spPr>
-          <a:xfrm>
-            <a:off x="5108171" y="4133088"/>
-            <a:ext cx="640080" cy="219456"/>
-          </a:xfrm>
-          <a:prstGeom prst="rect">
-            <a:avLst/>
-          </a:prstGeom>
-          <a:noFill/>
-          <a:ln/>
-        </p:spPr>
-        <p:txBody>
-          <a:bodyPr wrap="square" lIns="0" tIns="0" rIns="0" bIns="0" rtlCol="0" anchor="ctr"/>
-          <a:lstStyle/>
-          <a:p>
-            <a:pPr algn="ctr" indent="0" marL="0">
-              <a:buNone/>
-            </a:pPr>
-            <a:r>
-              <a:rPr lang="en-US" sz="800" dirty="0">
-                <a:solidFill>
-                  <a:srgbClr val="6E6E76"/>
-                </a:solidFill>
-                <a:latin typeface="Yu Gothic" pitchFamily="34" charset="0"/>
-                <a:ea typeface="Yu Gothic" pitchFamily="34" charset="-122"/>
-                <a:cs typeface="Yu Gothic" pitchFamily="34" charset="-120"/>
-              </a:rPr>
-              <a:t>10億</a:t>
-            </a:r>
-            <a:endParaRPr lang="en-US" sz="800" dirty="0"/>
-          </a:p>
-        </p:txBody>
-      </p:sp>
-      <p:sp>
-        <p:nvSpPr>
-          <p:cNvPr id="17" name="Text 15"/>
-          <p:cNvSpPr txBox="1"/>
-          <p:nvPr/>
-        </p:nvSpPr>
-        <p:spPr>
-          <a:xfrm>
-            <a:off x="594360" y="1847088"/>
-            <a:ext cx="1463040" cy="256032"/>
+            <a:off x="594360" y="4224528"/>
+            <a:ext cx="11000232" cy="256032"/>
           </a:xfrm>
           <a:prstGeom prst="rect">
             <a:avLst/>
@@ -3101,579 +5671,30 @@
               <a:buNone/>
             </a:pPr>
             <a:r>
-              <a:rPr lang="en-US" sz="850" dirty="0">
+              <a:rPr lang="en-US" sz="1000" b="1" dirty="0">
                 <a:solidFill>
-                  <a:srgbClr val="3A3A42"/>
+                  <a:srgbClr val="B3121B"/>
                 </a:solidFill>
                 <a:latin typeface="Yu Gothic" pitchFamily="34" charset="0"/>
                 <a:ea typeface="Yu Gothic" pitchFamily="34" charset="-122"/>
                 <a:cs typeface="Yu Gothic" pitchFamily="34" charset="-120"/>
               </a:rPr>
-              <a:t>映画（実写）</a:t>
+              <a:t>★ 下3行がフル生成AIの成立帯です。当社の企業案件（P1）は、この帯を取りに行きます。映画・CMは部分適用にとどまり、桁は変わりません。</a:t>
             </a:r>
-            <a:endParaRPr lang="en-US" sz="850" dirty="0"/>
+            <a:endParaRPr lang="en-US" sz="1000" dirty="0"/>
           </a:p>
         </p:txBody>
       </p:sp>
       <p:sp>
         <p:nvSpPr>
-          <p:cNvPr id="18" name="Shape 16"/>
-          <p:cNvSpPr/>
-          <p:nvPr/>
-        </p:nvSpPr>
-        <p:spPr>
-          <a:xfrm>
-            <a:off x="4993556" y="1892808"/>
-            <a:ext cx="184417" cy="164592"/>
-          </a:xfrm>
-          <a:prstGeom prst="rect">
-            <a:avLst/>
-          </a:prstGeom>
-          <a:solidFill>
-            <a:srgbClr val="B3121B"/>
-          </a:solidFill>
-          <a:ln/>
-        </p:spPr>
-      </p:sp>
-      <p:sp>
-        <p:nvSpPr>
-          <p:cNvPr id="19" name="Text 17"/>
+          <p:cNvPr id="9" name="Text 6"/>
           <p:cNvSpPr txBox="1"/>
           <p:nvPr/>
         </p:nvSpPr>
         <p:spPr>
           <a:xfrm>
-            <a:off x="5232837" y="1847088"/>
-            <a:ext cx="1051560" cy="256032"/>
-          </a:xfrm>
-          <a:prstGeom prst="rect">
-            <a:avLst/>
-          </a:prstGeom>
-          <a:noFill/>
-          <a:ln/>
-        </p:spPr>
-        <p:txBody>
-          <a:bodyPr wrap="square" lIns="0" tIns="0" rIns="0" bIns="0" rtlCol="0" anchor="ctr"/>
-          <a:lstStyle/>
-          <a:p>
-            <a:pPr indent="0" marL="0">
-              <a:buNone/>
-            </a:pPr>
-            <a:r>
-              <a:rPr lang="en-US" sz="850" b="1" dirty="0">
-                <a:solidFill>
-                  <a:srgbClr val="16161A"/>
-                </a:solidFill>
-                <a:latin typeface="Yu Gothic" pitchFamily="34" charset="0"/>
-                <a:ea typeface="Yu Gothic" pitchFamily="34" charset="-122"/>
-                <a:cs typeface="Yu Gothic" pitchFamily="34" charset="-120"/>
-              </a:rPr>
-              <a:t>3〜5億円</a:t>
-            </a:r>
-            <a:endParaRPr lang="en-US" sz="850" dirty="0"/>
-          </a:p>
-        </p:txBody>
-      </p:sp>
-      <p:sp>
-        <p:nvSpPr>
-          <p:cNvPr id="20" name="Text 18"/>
-          <p:cNvSpPr txBox="1"/>
-          <p:nvPr/>
-        </p:nvSpPr>
-        <p:spPr>
-          <a:xfrm>
-            <a:off x="594360" y="2231136"/>
-            <a:ext cx="1463040" cy="256032"/>
-          </a:xfrm>
-          <a:prstGeom prst="rect">
-            <a:avLst/>
-          </a:prstGeom>
-          <a:noFill/>
-          <a:ln/>
-        </p:spPr>
-        <p:txBody>
-          <a:bodyPr wrap="square" lIns="0" tIns="0" rIns="0" bIns="0" rtlCol="0" anchor="ctr"/>
-          <a:lstStyle/>
-          <a:p>
-            <a:pPr indent="0" marL="0">
-              <a:buNone/>
-            </a:pPr>
-            <a:r>
-              <a:rPr lang="en-US" sz="850" dirty="0">
-                <a:solidFill>
-                  <a:srgbClr val="3A3A42"/>
-                </a:solidFill>
-                <a:latin typeface="Yu Gothic" pitchFamily="34" charset="0"/>
-                <a:ea typeface="Yu Gothic" pitchFamily="34" charset="-122"/>
-                <a:cs typeface="Yu Gothic" pitchFamily="34" charset="-120"/>
-              </a:rPr>
-              <a:t>アニメ映画</a:t>
-            </a:r>
-            <a:endParaRPr lang="en-US" sz="850" dirty="0"/>
-          </a:p>
-        </p:txBody>
-      </p:sp>
-      <p:sp>
-        <p:nvSpPr>
-          <p:cNvPr id="21" name="Shape 19"/>
-          <p:cNvSpPr/>
-          <p:nvPr/>
-        </p:nvSpPr>
-        <p:spPr>
-          <a:xfrm>
-            <a:off x="4596938" y="2276856"/>
-            <a:ext cx="1081511" cy="164592"/>
-          </a:xfrm>
-          <a:prstGeom prst="rect">
-            <a:avLst/>
-          </a:prstGeom>
-          <a:solidFill>
-            <a:srgbClr val="B3121B"/>
-          </a:solidFill>
-          <a:ln/>
-        </p:spPr>
-      </p:sp>
-      <p:sp>
-        <p:nvSpPr>
-          <p:cNvPr id="22" name="Text 20"/>
-          <p:cNvSpPr txBox="1"/>
-          <p:nvPr/>
-        </p:nvSpPr>
-        <p:spPr>
-          <a:xfrm>
-            <a:off x="5733313" y="2231136"/>
-            <a:ext cx="1051560" cy="256032"/>
-          </a:xfrm>
-          <a:prstGeom prst="rect">
-            <a:avLst/>
-          </a:prstGeom>
-          <a:noFill/>
-          <a:ln/>
-        </p:spPr>
-        <p:txBody>
-          <a:bodyPr wrap="square" lIns="0" tIns="0" rIns="0" bIns="0" rtlCol="0" anchor="ctr"/>
-          <a:lstStyle/>
-          <a:p>
-            <a:pPr indent="0" marL="0">
-              <a:buNone/>
-            </a:pPr>
-            <a:r>
-              <a:rPr lang="en-US" sz="850" b="1" dirty="0">
-                <a:solidFill>
-                  <a:srgbClr val="16161A"/>
-                </a:solidFill>
-                <a:latin typeface="Yu Gothic" pitchFamily="34" charset="0"/>
-                <a:ea typeface="Yu Gothic" pitchFamily="34" charset="-122"/>
-                <a:cs typeface="Yu Gothic" pitchFamily="34" charset="-120"/>
-              </a:rPr>
-              <a:t>1〜20億円</a:t>
-            </a:r>
-            <a:endParaRPr lang="en-US" sz="850" dirty="0"/>
-          </a:p>
-        </p:txBody>
-      </p:sp>
-      <p:sp>
-        <p:nvSpPr>
-          <p:cNvPr id="23" name="Text 21"/>
-          <p:cNvSpPr txBox="1"/>
-          <p:nvPr/>
-        </p:nvSpPr>
-        <p:spPr>
-          <a:xfrm>
-            <a:off x="594360" y="2615184"/>
-            <a:ext cx="1463040" cy="256032"/>
-          </a:xfrm>
-          <a:prstGeom prst="rect">
-            <a:avLst/>
-          </a:prstGeom>
-          <a:noFill/>
-          <a:ln/>
-        </p:spPr>
-        <p:txBody>
-          <a:bodyPr wrap="square" lIns="0" tIns="0" rIns="0" bIns="0" rtlCol="0" anchor="ctr"/>
-          <a:lstStyle/>
-          <a:p>
-            <a:pPr indent="0" marL="0">
-              <a:buNone/>
-            </a:pPr>
-            <a:r>
-              <a:rPr lang="en-US" sz="850" dirty="0">
-                <a:solidFill>
-                  <a:srgbClr val="3A3A42"/>
-                </a:solidFill>
-                <a:latin typeface="Yu Gothic" pitchFamily="34" charset="0"/>
-                <a:ea typeface="Yu Gothic" pitchFamily="34" charset="-122"/>
-                <a:cs typeface="Yu Gothic" pitchFamily="34" charset="-120"/>
-              </a:rPr>
-              <a:t>テレビCM（制作費のみ）</a:t>
-            </a:r>
-            <a:endParaRPr lang="en-US" sz="850" dirty="0"/>
-          </a:p>
-        </p:txBody>
-      </p:sp>
-      <p:sp>
-        <p:nvSpPr>
-          <p:cNvPr id="24" name="Shape 22"/>
-          <p:cNvSpPr/>
-          <p:nvPr/>
-        </p:nvSpPr>
-        <p:spPr>
-          <a:xfrm>
-            <a:off x="3765665" y="2660904"/>
-            <a:ext cx="831273" cy="164592"/>
-          </a:xfrm>
-          <a:prstGeom prst="rect">
-            <a:avLst/>
-          </a:prstGeom>
-          <a:solidFill>
-            <a:srgbClr val="B3121B"/>
-          </a:solidFill>
-          <a:ln/>
-        </p:spPr>
-      </p:sp>
-      <p:sp>
-        <p:nvSpPr>
-          <p:cNvPr id="25" name="Text 23"/>
-          <p:cNvSpPr txBox="1"/>
-          <p:nvPr/>
-        </p:nvSpPr>
-        <p:spPr>
-          <a:xfrm>
-            <a:off x="4651802" y="2615184"/>
-            <a:ext cx="1051560" cy="256032"/>
-          </a:xfrm>
-          <a:prstGeom prst="rect">
-            <a:avLst/>
-          </a:prstGeom>
-          <a:noFill/>
-          <a:ln/>
-        </p:spPr>
-        <p:txBody>
-          <a:bodyPr wrap="square" lIns="0" tIns="0" rIns="0" bIns="0" rtlCol="0" anchor="ctr"/>
-          <a:lstStyle/>
-          <a:p>
-            <a:pPr indent="0" marL="0">
-              <a:buNone/>
-            </a:pPr>
-            <a:r>
-              <a:rPr lang="en-US" sz="850" b="1" dirty="0">
-                <a:solidFill>
-                  <a:srgbClr val="16161A"/>
-                </a:solidFill>
-                <a:latin typeface="Yu Gothic" pitchFamily="34" charset="0"/>
-                <a:ea typeface="Yu Gothic" pitchFamily="34" charset="-122"/>
-                <a:cs typeface="Yu Gothic" pitchFamily="34" charset="-120"/>
-              </a:rPr>
-              <a:t>1,000万〜1億円</a:t>
-            </a:r>
-            <a:endParaRPr lang="en-US" sz="850" dirty="0"/>
-          </a:p>
-        </p:txBody>
-      </p:sp>
-      <p:sp>
-        <p:nvSpPr>
-          <p:cNvPr id="26" name="Text 24"/>
-          <p:cNvSpPr txBox="1"/>
-          <p:nvPr/>
-        </p:nvSpPr>
-        <p:spPr>
-          <a:xfrm>
-            <a:off x="594360" y="2999232"/>
-            <a:ext cx="1463040" cy="256032"/>
-          </a:xfrm>
-          <a:prstGeom prst="rect">
-            <a:avLst/>
-          </a:prstGeom>
-          <a:noFill/>
-          <a:ln/>
-        </p:spPr>
-        <p:txBody>
-          <a:bodyPr wrap="square" lIns="0" tIns="0" rIns="0" bIns="0" rtlCol="0" anchor="ctr"/>
-          <a:lstStyle/>
-          <a:p>
-            <a:pPr indent="0" marL="0">
-              <a:buNone/>
-            </a:pPr>
-            <a:r>
-              <a:rPr lang="en-US" sz="850" dirty="0">
-                <a:solidFill>
-                  <a:srgbClr val="3A3A42"/>
-                </a:solidFill>
-                <a:latin typeface="Yu Gothic" pitchFamily="34" charset="0"/>
-                <a:ea typeface="Yu Gothic" pitchFamily="34" charset="-122"/>
-                <a:cs typeface="Yu Gothic" pitchFamily="34" charset="-120"/>
-              </a:rPr>
-              <a:t>企業VP・会社紹介</a:t>
-            </a:r>
-            <a:endParaRPr lang="en-US" sz="850" dirty="0"/>
-          </a:p>
-        </p:txBody>
-      </p:sp>
-      <p:sp>
-        <p:nvSpPr>
-          <p:cNvPr id="27" name="Shape 25"/>
-          <p:cNvSpPr/>
-          <p:nvPr/>
-        </p:nvSpPr>
-        <p:spPr>
-          <a:xfrm>
-            <a:off x="2684155" y="3044952"/>
-            <a:ext cx="396618" cy="164592"/>
-          </a:xfrm>
-          <a:prstGeom prst="rect">
-            <a:avLst/>
-          </a:prstGeom>
-          <a:solidFill>
-            <a:srgbClr val="2A3563"/>
-          </a:solidFill>
-          <a:ln/>
-        </p:spPr>
-      </p:sp>
-      <p:sp>
-        <p:nvSpPr>
-          <p:cNvPr id="28" name="Text 26"/>
-          <p:cNvSpPr txBox="1"/>
-          <p:nvPr/>
-        </p:nvSpPr>
-        <p:spPr>
-          <a:xfrm>
-            <a:off x="3135637" y="2999232"/>
-            <a:ext cx="1051560" cy="256032"/>
-          </a:xfrm>
-          <a:prstGeom prst="rect">
-            <a:avLst/>
-          </a:prstGeom>
-          <a:noFill/>
-          <a:ln/>
-        </p:spPr>
-        <p:txBody>
-          <a:bodyPr wrap="square" lIns="0" tIns="0" rIns="0" bIns="0" rtlCol="0" anchor="ctr"/>
-          <a:lstStyle/>
-          <a:p>
-            <a:pPr indent="0" marL="0">
-              <a:buNone/>
-            </a:pPr>
-            <a:r>
-              <a:rPr lang="en-US" sz="850" b="1" dirty="0">
-                <a:solidFill>
-                  <a:srgbClr val="16161A"/>
-                </a:solidFill>
-                <a:latin typeface="Yu Gothic" pitchFamily="34" charset="0"/>
-                <a:ea typeface="Yu Gothic" pitchFamily="34" charset="-122"/>
-                <a:cs typeface="Yu Gothic" pitchFamily="34" charset="-120"/>
-              </a:rPr>
-              <a:t>50〜150万円</a:t>
-            </a:r>
-            <a:endParaRPr lang="en-US" sz="850" dirty="0"/>
-          </a:p>
-        </p:txBody>
-      </p:sp>
-      <p:sp>
-        <p:nvSpPr>
-          <p:cNvPr id="29" name="Text 27"/>
-          <p:cNvSpPr txBox="1"/>
-          <p:nvPr/>
-        </p:nvSpPr>
-        <p:spPr>
-          <a:xfrm>
-            <a:off x="594360" y="3383280"/>
-            <a:ext cx="1463040" cy="256032"/>
-          </a:xfrm>
-          <a:prstGeom prst="rect">
-            <a:avLst/>
-          </a:prstGeom>
-          <a:noFill/>
-          <a:ln/>
-        </p:spPr>
-        <p:txBody>
-          <a:bodyPr wrap="square" lIns="0" tIns="0" rIns="0" bIns="0" rtlCol="0" anchor="ctr"/>
-          <a:lstStyle/>
-          <a:p>
-            <a:pPr indent="0" marL="0">
-              <a:buNone/>
-            </a:pPr>
-            <a:r>
-              <a:rPr lang="en-US" sz="850" dirty="0">
-                <a:solidFill>
-                  <a:srgbClr val="3A3A42"/>
-                </a:solidFill>
-                <a:latin typeface="Yu Gothic" pitchFamily="34" charset="0"/>
-                <a:ea typeface="Yu Gothic" pitchFamily="34" charset="-122"/>
-                <a:cs typeface="Yu Gothic" pitchFamily="34" charset="-120"/>
-              </a:rPr>
-              <a:t>展示会・社内イベント映像</a:t>
-            </a:r>
-            <a:endParaRPr lang="en-US" sz="850" dirty="0"/>
-          </a:p>
-        </p:txBody>
-      </p:sp>
-      <p:sp>
-        <p:nvSpPr>
-          <p:cNvPr id="30" name="Shape 28"/>
-          <p:cNvSpPr/>
-          <p:nvPr/>
-        </p:nvSpPr>
-        <p:spPr>
-          <a:xfrm>
-            <a:off x="2353358" y="3429000"/>
-            <a:ext cx="581035" cy="164592"/>
-          </a:xfrm>
-          <a:prstGeom prst="rect">
-            <a:avLst/>
-          </a:prstGeom>
-          <a:solidFill>
-            <a:srgbClr val="2A3563"/>
-          </a:solidFill>
-          <a:ln/>
-        </p:spPr>
-      </p:sp>
-      <p:sp>
-        <p:nvSpPr>
-          <p:cNvPr id="31" name="Text 29"/>
-          <p:cNvSpPr txBox="1"/>
-          <p:nvPr/>
-        </p:nvSpPr>
-        <p:spPr>
-          <a:xfrm>
-            <a:off x="2989257" y="3383280"/>
-            <a:ext cx="1051560" cy="256032"/>
-          </a:xfrm>
-          <a:prstGeom prst="rect">
-            <a:avLst/>
-          </a:prstGeom>
-          <a:noFill/>
-          <a:ln/>
-        </p:spPr>
-        <p:txBody>
-          <a:bodyPr wrap="square" lIns="0" tIns="0" rIns="0" bIns="0" rtlCol="0" anchor="ctr"/>
-          <a:lstStyle/>
-          <a:p>
-            <a:pPr indent="0" marL="0">
-              <a:buNone/>
-            </a:pPr>
-            <a:r>
-              <a:rPr lang="en-US" sz="850" b="1" dirty="0">
-                <a:solidFill>
-                  <a:srgbClr val="16161A"/>
-                </a:solidFill>
-                <a:latin typeface="Yu Gothic" pitchFamily="34" charset="0"/>
-                <a:ea typeface="Yu Gothic" pitchFamily="34" charset="-122"/>
-                <a:cs typeface="Yu Gothic" pitchFamily="34" charset="-120"/>
-              </a:rPr>
-              <a:t>20〜100万円</a:t>
-            </a:r>
-            <a:endParaRPr lang="en-US" sz="850" dirty="0"/>
-          </a:p>
-        </p:txBody>
-      </p:sp>
-      <p:sp>
-        <p:nvSpPr>
-          <p:cNvPr id="32" name="Text 30"/>
-          <p:cNvSpPr txBox="1"/>
-          <p:nvPr/>
-        </p:nvSpPr>
-        <p:spPr>
-          <a:xfrm>
-            <a:off x="594360" y="3767328"/>
-            <a:ext cx="1463040" cy="256032"/>
-          </a:xfrm>
-          <a:prstGeom prst="rect">
-            <a:avLst/>
-          </a:prstGeom>
-          <a:noFill/>
-          <a:ln/>
-        </p:spPr>
-        <p:txBody>
-          <a:bodyPr wrap="square" lIns="0" tIns="0" rIns="0" bIns="0" rtlCol="0" anchor="ctr"/>
-          <a:lstStyle/>
-          <a:p>
-            <a:pPr indent="0" marL="0">
-              <a:buNone/>
-            </a:pPr>
-            <a:r>
-              <a:rPr lang="en-US" sz="850" dirty="0">
-                <a:solidFill>
-                  <a:srgbClr val="3A3A42"/>
-                </a:solidFill>
-                <a:latin typeface="Yu Gothic" pitchFamily="34" charset="0"/>
-                <a:ea typeface="Yu Gothic" pitchFamily="34" charset="-122"/>
-                <a:cs typeface="Yu Gothic" pitchFamily="34" charset="-120"/>
-              </a:rPr>
-              <a:t>PR素材・SNS縦型</a:t>
-            </a:r>
-            <a:endParaRPr lang="en-US" sz="850" dirty="0"/>
-          </a:p>
-        </p:txBody>
-      </p:sp>
-      <p:sp>
-        <p:nvSpPr>
-          <p:cNvPr id="33" name="Shape 31"/>
-          <p:cNvSpPr/>
-          <p:nvPr/>
-        </p:nvSpPr>
-        <p:spPr>
-          <a:xfrm>
-            <a:off x="2103120" y="3813048"/>
-            <a:ext cx="581035" cy="164592"/>
-          </a:xfrm>
-          <a:prstGeom prst="rect">
-            <a:avLst/>
-          </a:prstGeom>
-          <a:solidFill>
-            <a:srgbClr val="1F6F63"/>
-          </a:solidFill>
-          <a:ln/>
-        </p:spPr>
-      </p:sp>
-      <p:sp>
-        <p:nvSpPr>
-          <p:cNvPr id="34" name="Text 32"/>
-          <p:cNvSpPr txBox="1"/>
-          <p:nvPr/>
-        </p:nvSpPr>
-        <p:spPr>
-          <a:xfrm>
-            <a:off x="2739019" y="3767328"/>
-            <a:ext cx="1051560" cy="256032"/>
-          </a:xfrm>
-          <a:prstGeom prst="rect">
-            <a:avLst/>
-          </a:prstGeom>
-          <a:noFill/>
-          <a:ln/>
-        </p:spPr>
-        <p:txBody>
-          <a:bodyPr wrap="square" lIns="0" tIns="0" rIns="0" bIns="0" rtlCol="0" anchor="ctr"/>
-          <a:lstStyle/>
-          <a:p>
-            <a:pPr indent="0" marL="0">
-              <a:buNone/>
-            </a:pPr>
-            <a:r>
-              <a:rPr lang="en-US" sz="850" b="1" dirty="0">
-                <a:solidFill>
-                  <a:srgbClr val="16161A"/>
-                </a:solidFill>
-                <a:latin typeface="Yu Gothic" pitchFamily="34" charset="0"/>
-                <a:ea typeface="Yu Gothic" pitchFamily="34" charset="-122"/>
-                <a:cs typeface="Yu Gothic" pitchFamily="34" charset="-120"/>
-              </a:rPr>
-              <a:t>10〜50万円</a:t>
-            </a:r>
-            <a:endParaRPr lang="en-US" sz="850" dirty="0"/>
-          </a:p>
-        </p:txBody>
-      </p:sp>
-      <p:sp>
-        <p:nvSpPr>
-          <p:cNvPr id="35" name="Text 33"/>
-          <p:cNvSpPr txBox="1"/>
-          <p:nvPr/>
-        </p:nvSpPr>
-        <p:spPr>
-          <a:xfrm>
-            <a:off x="6903720" y="1371600"/>
-            <a:ext cx="4690872" cy="274320"/>
+            <a:off x="594360" y="4553712"/>
+            <a:ext cx="5394960" cy="274320"/>
           </a:xfrm>
           <a:prstGeom prst="rect">
             <a:avLst/>
@@ -3697,7 +5718,7 @@
                 <a:ea typeface="Yu Gothic" pitchFamily="34" charset="-122"/>
                 <a:cs typeface="Yu Gothic" pitchFamily="34" charset="-120"/>
               </a:rPr>
-              <a:t>費用の内訳｜企業VP 1本 100万円の例</a:t>
+              <a:t>内訳はこう変わる｜企業VP 1本　100万円 → 35万円</a:t>
             </a:r>
             <a:endParaRPr lang="en-US" sz="1150" dirty="0"/>
           </a:p>
@@ -3705,14 +5726,53 @@
       </p:sp>
       <p:sp>
         <p:nvSpPr>
-          <p:cNvPr id="36" name="Shape 34"/>
+          <p:cNvPr id="10" name="Text 7"/>
+          <p:cNvSpPr txBox="1"/>
+          <p:nvPr/>
+        </p:nvSpPr>
+        <p:spPr>
+          <a:xfrm>
+            <a:off x="594360" y="4882896"/>
+            <a:ext cx="932688" cy="274320"/>
+          </a:xfrm>
+          <a:prstGeom prst="rect">
+            <a:avLst/>
+          </a:prstGeom>
+          <a:noFill/>
+          <a:ln/>
+        </p:spPr>
+        <p:txBody>
+          <a:bodyPr wrap="square" lIns="0" tIns="0" rIns="0" bIns="0" rtlCol="0" anchor="ctr"/>
+          <a:lstStyle/>
+          <a:p>
+            <a:pPr indent="0" marL="0">
+              <a:buNone/>
+            </a:pPr>
+            <a:r>
+              <a:rPr lang="en-US" sz="950" b="1" dirty="0">
+                <a:solidFill>
+                  <a:srgbClr val="16161A"/>
+                </a:solidFill>
+                <a:latin typeface="Yu Gothic" pitchFamily="34" charset="0"/>
+                <a:ea typeface="Yu Gothic" pitchFamily="34" charset="-122"/>
+                <a:cs typeface="Yu Gothic" pitchFamily="34" charset="-120"/>
+              </a:rPr>
+              <a:t>現状</a:t>
+            </a:r>
+            <a:endParaRPr lang="en-US" sz="950" dirty="0"/>
+          </a:p>
+        </p:txBody>
+      </p:sp>
+      <p:sp>
+        <p:nvSpPr>
+          <p:cNvPr id="11" name="Shape 8"/>
           <p:cNvSpPr/>
           <p:nvPr/>
         </p:nvSpPr>
         <p:spPr>
           <a:xfrm>
-            <a:off x="6903720" y="1755648"/>
-            <a:ext cx="703631" cy="402336"/>
+            <a:off x="1600200" y="4882896"/>
+            <a:ext cx="569214" cy="274320"/>
           </a:xfrm>
           <a:prstGeom prst="rect">
             <a:avLst/>
@@ -3725,14 +5785,14 @@
       </p:sp>
       <p:sp>
         <p:nvSpPr>
-          <p:cNvPr id="37" name="Text 35"/>
+          <p:cNvPr id="12" name="Text 9"/>
           <p:cNvSpPr txBox="1"/>
           <p:nvPr/>
         </p:nvSpPr>
         <p:spPr>
           <a:xfrm>
-            <a:off x="6903720" y="1755648"/>
-            <a:ext cx="703631" cy="402336"/>
+            <a:off x="1600200" y="4882896"/>
+            <a:ext cx="569214" cy="274320"/>
           </a:xfrm>
           <a:prstGeom prst="rect">
             <a:avLst/>
@@ -3748,7 +5808,7 @@
               <a:buNone/>
             </a:pPr>
             <a:r>
-              <a:rPr lang="en-US" sz="950" b="1" dirty="0">
+              <a:rPr lang="en-US" sz="850" b="1" dirty="0">
                 <a:solidFill>
                   <a:srgbClr val="FFFFFF"/>
                 </a:solidFill>
@@ -3756,22 +5816,22 @@
                 <a:ea typeface="Yu Gothic" pitchFamily="34" charset="-122"/>
                 <a:cs typeface="Yu Gothic" pitchFamily="34" charset="-120"/>
               </a:rPr>
-              <a:t>15%</a:t>
+              <a:t>15</a:t>
             </a:r>
-            <a:endParaRPr lang="en-US" sz="950" dirty="0"/>
+            <a:endParaRPr lang="en-US" sz="850" dirty="0"/>
           </a:p>
         </p:txBody>
       </p:sp>
       <p:sp>
         <p:nvSpPr>
-          <p:cNvPr id="38" name="Shape 36"/>
+          <p:cNvPr id="13" name="Shape 10"/>
           <p:cNvSpPr/>
           <p:nvPr/>
         </p:nvSpPr>
         <p:spPr>
           <a:xfrm>
-            <a:off x="7607351" y="1755648"/>
-            <a:ext cx="1782531" cy="402336"/>
+            <a:off x="2169414" y="4882896"/>
+            <a:ext cx="1442009" cy="274320"/>
           </a:xfrm>
           <a:prstGeom prst="rect">
             <a:avLst/>
@@ -3784,14 +5844,14 @@
       </p:sp>
       <p:sp>
         <p:nvSpPr>
-          <p:cNvPr id="39" name="Text 37"/>
+          <p:cNvPr id="14" name="Text 11"/>
           <p:cNvSpPr txBox="1"/>
           <p:nvPr/>
         </p:nvSpPr>
         <p:spPr>
           <a:xfrm>
-            <a:off x="7607351" y="1755648"/>
-            <a:ext cx="1782531" cy="402336"/>
+            <a:off x="2169414" y="4882896"/>
+            <a:ext cx="1442009" cy="274320"/>
           </a:xfrm>
           <a:prstGeom prst="rect">
             <a:avLst/>
@@ -3807,7 +5867,7 @@
               <a:buNone/>
             </a:pPr>
             <a:r>
-              <a:rPr lang="en-US" sz="950" b="1" dirty="0">
+              <a:rPr lang="en-US" sz="850" b="1" dirty="0">
                 <a:solidFill>
                   <a:srgbClr val="FFFFFF"/>
                 </a:solidFill>
@@ -3815,22 +5875,22 @@
                 <a:ea typeface="Yu Gothic" pitchFamily="34" charset="-122"/>
                 <a:cs typeface="Yu Gothic" pitchFamily="34" charset="-120"/>
               </a:rPr>
-              <a:t>38%</a:t>
+              <a:t>38</a:t>
             </a:r>
-            <a:endParaRPr lang="en-US" sz="950" dirty="0"/>
+            <a:endParaRPr lang="en-US" sz="850" dirty="0"/>
           </a:p>
         </p:txBody>
       </p:sp>
       <p:sp>
         <p:nvSpPr>
-          <p:cNvPr id="40" name="Shape 38"/>
+          <p:cNvPr id="15" name="Shape 12"/>
           <p:cNvSpPr/>
           <p:nvPr/>
         </p:nvSpPr>
         <p:spPr>
           <a:xfrm>
-            <a:off x="9389882" y="1755648"/>
-            <a:ext cx="469087" cy="402336"/>
+            <a:off x="3611423" y="4882896"/>
+            <a:ext cx="379476" cy="274320"/>
           </a:xfrm>
           <a:prstGeom prst="rect">
             <a:avLst/>
@@ -3843,14 +5903,54 @@
       </p:sp>
       <p:sp>
         <p:nvSpPr>
-          <p:cNvPr id="41" name="Text 39"/>
+          <p:cNvPr id="16" name="Shape 13"/>
+          <p:cNvSpPr/>
+          <p:nvPr/>
+        </p:nvSpPr>
+        <p:spPr>
+          <a:xfrm>
+            <a:off x="3990899" y="4882896"/>
+            <a:ext cx="265633" cy="274320"/>
+          </a:xfrm>
+          <a:prstGeom prst="rect">
+            <a:avLst/>
+          </a:prstGeom>
+          <a:solidFill>
+            <a:srgbClr val="D9601A"/>
+          </a:solidFill>
+          <a:ln/>
+        </p:spPr>
+      </p:sp>
+      <p:sp>
+        <p:nvSpPr>
+          <p:cNvPr id="17" name="Shape 14"/>
+          <p:cNvSpPr/>
+          <p:nvPr/>
+        </p:nvSpPr>
+        <p:spPr>
+          <a:xfrm>
+            <a:off x="4256532" y="4882896"/>
+            <a:ext cx="758952" cy="274320"/>
+          </a:xfrm>
+          <a:prstGeom prst="rect">
+            <a:avLst/>
+          </a:prstGeom>
+          <a:solidFill>
+            <a:srgbClr val="1F6F63"/>
+          </a:solidFill>
+          <a:ln/>
+        </p:spPr>
+      </p:sp>
+      <p:sp>
+        <p:nvSpPr>
+          <p:cNvPr id="18" name="Text 15"/>
           <p:cNvSpPr txBox="1"/>
           <p:nvPr/>
         </p:nvSpPr>
         <p:spPr>
           <a:xfrm>
-            <a:off x="9389882" y="1755648"/>
-            <a:ext cx="469087" cy="402336"/>
+            <a:off x="4256532" y="4882896"/>
+            <a:ext cx="758952" cy="274320"/>
           </a:xfrm>
           <a:prstGeom prst="rect">
             <a:avLst/>
@@ -3866,7 +5966,7 @@
               <a:buNone/>
             </a:pPr>
             <a:r>
-              <a:rPr lang="en-US" sz="950" b="1" dirty="0">
+              <a:rPr lang="en-US" sz="850" b="1" dirty="0">
                 <a:solidFill>
                   <a:srgbClr val="FFFFFF"/>
                 </a:solidFill>
@@ -3874,101 +5974,22 @@
                 <a:ea typeface="Yu Gothic" pitchFamily="34" charset="-122"/>
                 <a:cs typeface="Yu Gothic" pitchFamily="34" charset="-120"/>
               </a:rPr>
-              <a:t>10%</a:t>
+              <a:t>20</a:t>
             </a:r>
-            <a:endParaRPr lang="en-US" sz="950" dirty="0"/>
+            <a:endParaRPr lang="en-US" sz="850" dirty="0"/>
           </a:p>
         </p:txBody>
       </p:sp>
       <p:sp>
         <p:nvSpPr>
-          <p:cNvPr id="42" name="Shape 40"/>
+          <p:cNvPr id="19" name="Shape 16"/>
           <p:cNvSpPr/>
           <p:nvPr/>
         </p:nvSpPr>
         <p:spPr>
           <a:xfrm>
-            <a:off x="9858969" y="1755648"/>
-            <a:ext cx="328361" cy="402336"/>
-          </a:xfrm>
-          <a:prstGeom prst="rect">
-            <a:avLst/>
-          </a:prstGeom>
-          <a:solidFill>
-            <a:srgbClr val="D9601A"/>
-          </a:solidFill>
-          <a:ln/>
-        </p:spPr>
-      </p:sp>
-      <p:sp>
-        <p:nvSpPr>
-          <p:cNvPr id="43" name="Shape 41"/>
-          <p:cNvSpPr/>
-          <p:nvPr/>
-        </p:nvSpPr>
-        <p:spPr>
-          <a:xfrm>
-            <a:off x="10187330" y="1755648"/>
-            <a:ext cx="938174" cy="402336"/>
-          </a:xfrm>
-          <a:prstGeom prst="rect">
-            <a:avLst/>
-          </a:prstGeom>
-          <a:solidFill>
-            <a:srgbClr val="1F6F63"/>
-          </a:solidFill>
-          <a:ln/>
-        </p:spPr>
-      </p:sp>
-      <p:sp>
-        <p:nvSpPr>
-          <p:cNvPr id="44" name="Text 42"/>
-          <p:cNvSpPr txBox="1"/>
-          <p:nvPr/>
-        </p:nvSpPr>
-        <p:spPr>
-          <a:xfrm>
-            <a:off x="10187330" y="1755648"/>
-            <a:ext cx="938174" cy="402336"/>
-          </a:xfrm>
-          <a:prstGeom prst="rect">
-            <a:avLst/>
-          </a:prstGeom>
-          <a:noFill/>
-          <a:ln/>
-        </p:spPr>
-        <p:txBody>
-          <a:bodyPr wrap="square" lIns="0" tIns="0" rIns="0" bIns="0" rtlCol="0" anchor="ctr"/>
-          <a:lstStyle/>
-          <a:p>
-            <a:pPr algn="ctr" indent="0" marL="0">
-              <a:buNone/>
-            </a:pPr>
-            <a:r>
-              <a:rPr lang="en-US" sz="950" b="1" dirty="0">
-                <a:solidFill>
-                  <a:srgbClr val="FFFFFF"/>
-                </a:solidFill>
-                <a:latin typeface="Yu Gothic" pitchFamily="34" charset="0"/>
-                <a:ea typeface="Yu Gothic" pitchFamily="34" charset="-122"/>
-                <a:cs typeface="Yu Gothic" pitchFamily="34" charset="-120"/>
-              </a:rPr>
-              <a:t>20%</a:t>
-            </a:r>
-            <a:endParaRPr lang="en-US" sz="950" dirty="0"/>
-          </a:p>
-        </p:txBody>
-      </p:sp>
-      <p:sp>
-        <p:nvSpPr>
-          <p:cNvPr id="45" name="Shape 43"/>
-          <p:cNvSpPr/>
-          <p:nvPr/>
-        </p:nvSpPr>
-        <p:spPr>
-          <a:xfrm>
-            <a:off x="11125505" y="1755648"/>
-            <a:ext cx="469087" cy="402336"/>
+            <a:off x="5015484" y="4882896"/>
+            <a:ext cx="379476" cy="274320"/>
           </a:xfrm>
           <a:prstGeom prst="rect">
             <a:avLst/>
@@ -3981,73 +6002,14 @@
       </p:sp>
       <p:sp>
         <p:nvSpPr>
-          <p:cNvPr id="46" name="Text 44"/>
+          <p:cNvPr id="20" name="Text 17"/>
           <p:cNvSpPr txBox="1"/>
           <p:nvPr/>
         </p:nvSpPr>
         <p:spPr>
           <a:xfrm>
-            <a:off x="11125505" y="1755648"/>
-            <a:ext cx="469087" cy="402336"/>
-          </a:xfrm>
-          <a:prstGeom prst="rect">
-            <a:avLst/>
-          </a:prstGeom>
-          <a:noFill/>
-          <a:ln/>
-        </p:spPr>
-        <p:txBody>
-          <a:bodyPr wrap="square" lIns="0" tIns="0" rIns="0" bIns="0" rtlCol="0" anchor="ctr"/>
-          <a:lstStyle/>
-          <a:p>
-            <a:pPr algn="ctr" indent="0" marL="0">
-              <a:buNone/>
-            </a:pPr>
-            <a:r>
-              <a:rPr lang="en-US" sz="950" b="1" dirty="0">
-                <a:solidFill>
-                  <a:srgbClr val="FFFFFF"/>
-                </a:solidFill>
-                <a:latin typeface="Yu Gothic" pitchFamily="34" charset="0"/>
-                <a:ea typeface="Yu Gothic" pitchFamily="34" charset="-122"/>
-                <a:cs typeface="Yu Gothic" pitchFamily="34" charset="-120"/>
-              </a:rPr>
-              <a:t>10%</a:t>
-            </a:r>
-            <a:endParaRPr lang="en-US" sz="950" dirty="0"/>
-          </a:p>
-        </p:txBody>
-      </p:sp>
-      <p:sp>
-        <p:nvSpPr>
-          <p:cNvPr id="47" name="Shape 45"/>
-          <p:cNvSpPr/>
-          <p:nvPr/>
-        </p:nvSpPr>
-        <p:spPr>
-          <a:xfrm>
-            <a:off x="6903720" y="2359152"/>
-            <a:ext cx="146304" cy="146304"/>
-          </a:xfrm>
-          <a:prstGeom prst="rect">
-            <a:avLst/>
-          </a:prstGeom>
-          <a:solidFill>
-            <a:srgbClr val="2A3563"/>
-          </a:solidFill>
-          <a:ln/>
-        </p:spPr>
-      </p:sp>
-      <p:sp>
-        <p:nvSpPr>
-          <p:cNvPr id="48" name="Text 46"/>
-          <p:cNvSpPr txBox="1"/>
-          <p:nvPr/>
-        </p:nvSpPr>
-        <p:spPr>
-          <a:xfrm>
-            <a:off x="7141464" y="2286000"/>
-            <a:ext cx="3017520" cy="292608"/>
+            <a:off x="5468112" y="4882896"/>
+            <a:ext cx="914400" cy="274320"/>
           </a:xfrm>
           <a:prstGeom prst="rect">
             <a:avLst/>
@@ -4063,46 +6025,7 @@
               <a:buNone/>
             </a:pPr>
             <a:r>
-              <a:rPr lang="en-US" sz="950" dirty="0">
-                <a:solidFill>
-                  <a:srgbClr val="3A3A42"/>
-                </a:solidFill>
-                <a:latin typeface="Yu Gothic" pitchFamily="34" charset="0"/>
-                <a:ea typeface="Yu Gothic" pitchFamily="34" charset="-122"/>
-                <a:cs typeface="Yu Gothic" pitchFamily="34" charset="-120"/>
-              </a:rPr>
-              <a:t>企画・構成・ディレクション</a:t>
-            </a:r>
-            <a:endParaRPr lang="en-US" sz="950" dirty="0"/>
-          </a:p>
-        </p:txBody>
-      </p:sp>
-      <p:sp>
-        <p:nvSpPr>
-          <p:cNvPr id="49" name="Text 47"/>
-          <p:cNvSpPr txBox="1"/>
-          <p:nvPr/>
-        </p:nvSpPr>
-        <p:spPr>
-          <a:xfrm>
-            <a:off x="10195560" y="2286000"/>
-            <a:ext cx="548640" cy="292608"/>
-          </a:xfrm>
-          <a:prstGeom prst="rect">
-            <a:avLst/>
-          </a:prstGeom>
-          <a:noFill/>
-          <a:ln/>
-        </p:spPr>
-        <p:txBody>
-          <a:bodyPr wrap="square" lIns="0" tIns="0" rIns="0" bIns="0" rtlCol="0" anchor="ctr"/>
-          <a:lstStyle/>
-          <a:p>
-            <a:pPr algn="r" indent="0" marL="0">
-              <a:buNone/>
-            </a:pPr>
-            <a:r>
-              <a:rPr lang="en-US" sz="950" b="1" dirty="0">
+              <a:rPr lang="en-US" sz="1000" b="1" dirty="0">
                 <a:solidFill>
                   <a:srgbClr val="16161A"/>
                 </a:solidFill>
@@ -4110,42 +6033,22 @@
                 <a:ea typeface="Yu Gothic" pitchFamily="34" charset="-122"/>
                 <a:cs typeface="Yu Gothic" pitchFamily="34" charset="-120"/>
               </a:rPr>
-              <a:t>15%</a:t>
+              <a:t>100万円</a:t>
             </a:r>
-            <a:endParaRPr lang="en-US" sz="950" dirty="0"/>
+            <a:endParaRPr lang="en-US" sz="1000" dirty="0"/>
           </a:p>
         </p:txBody>
       </p:sp>
       <p:sp>
         <p:nvSpPr>
-          <p:cNvPr id="50" name="Shape 48"/>
-          <p:cNvSpPr/>
-          <p:nvPr/>
-        </p:nvSpPr>
-        <p:spPr>
-          <a:xfrm>
-            <a:off x="6903720" y="2670048"/>
-            <a:ext cx="146304" cy="146304"/>
-          </a:xfrm>
-          <a:prstGeom prst="rect">
-            <a:avLst/>
-          </a:prstGeom>
-          <a:solidFill>
-            <a:srgbClr val="B3121B"/>
-          </a:solidFill>
-          <a:ln/>
-        </p:spPr>
-      </p:sp>
-      <p:sp>
-        <p:nvSpPr>
-          <p:cNvPr id="51" name="Text 49"/>
+          <p:cNvPr id="21" name="Text 18"/>
           <p:cNvSpPr txBox="1"/>
           <p:nvPr/>
         </p:nvSpPr>
         <p:spPr>
           <a:xfrm>
-            <a:off x="7141464" y="2596896"/>
-            <a:ext cx="3017520" cy="292608"/>
+            <a:off x="594360" y="5266944"/>
+            <a:ext cx="932688" cy="274320"/>
           </a:xfrm>
           <a:prstGeom prst="rect">
             <a:avLst/>
@@ -4161,45 +6064,6 @@
               <a:buNone/>
             </a:pPr>
             <a:r>
-              <a:rPr lang="en-US" sz="950" dirty="0">
-                <a:solidFill>
-                  <a:srgbClr val="3A3A42"/>
-                </a:solidFill>
-                <a:latin typeface="Yu Gothic" pitchFamily="34" charset="0"/>
-                <a:ea typeface="Yu Gothic" pitchFamily="34" charset="-122"/>
-                <a:cs typeface="Yu Gothic" pitchFamily="34" charset="-120"/>
-              </a:rPr>
-              <a:t>撮影（スタッフ人件費）</a:t>
-            </a:r>
-            <a:endParaRPr lang="en-US" sz="950" dirty="0"/>
-          </a:p>
-        </p:txBody>
-      </p:sp>
-      <p:sp>
-        <p:nvSpPr>
-          <p:cNvPr id="52" name="Text 50"/>
-          <p:cNvSpPr txBox="1"/>
-          <p:nvPr/>
-        </p:nvSpPr>
-        <p:spPr>
-          <a:xfrm>
-            <a:off x="10195560" y="2596896"/>
-            <a:ext cx="548640" cy="292608"/>
-          </a:xfrm>
-          <a:prstGeom prst="rect">
-            <a:avLst/>
-          </a:prstGeom>
-          <a:noFill/>
-          <a:ln/>
-        </p:spPr>
-        <p:txBody>
-          <a:bodyPr wrap="square" lIns="0" tIns="0" rIns="0" bIns="0" rtlCol="0" anchor="ctr"/>
-          <a:lstStyle/>
-          <a:p>
-            <a:pPr algn="r" indent="0" marL="0">
-              <a:buNone/>
-            </a:pPr>
-            <a:r>
               <a:rPr lang="en-US" sz="950" b="1" dirty="0">
                 <a:solidFill>
                   <a:srgbClr val="16161A"/>
@@ -4208,7 +6072,7 @@
                 <a:ea typeface="Yu Gothic" pitchFamily="34" charset="-122"/>
                 <a:cs typeface="Yu Gothic" pitchFamily="34" charset="-120"/>
               </a:rPr>
-              <a:t>38%</a:t>
+              <a:t>AI後</a:t>
             </a:r>
             <a:endParaRPr lang="en-US" sz="950" dirty="0"/>
           </a:p>
@@ -4216,14 +6080,54 @@
       </p:sp>
       <p:sp>
         <p:nvSpPr>
-          <p:cNvPr id="53" name="Shape 51"/>
+          <p:cNvPr id="22" name="Shape 19"/>
           <p:cNvSpPr/>
           <p:nvPr/>
         </p:nvSpPr>
         <p:spPr>
           <a:xfrm>
-            <a:off x="6903720" y="2980944"/>
-            <a:ext cx="146304" cy="146304"/>
+            <a:off x="1600200" y="5266944"/>
+            <a:ext cx="284607" cy="274320"/>
+          </a:xfrm>
+          <a:prstGeom prst="rect">
+            <a:avLst/>
+          </a:prstGeom>
+          <a:solidFill>
+            <a:srgbClr val="2A3563"/>
+          </a:solidFill>
+          <a:ln/>
+        </p:spPr>
+      </p:sp>
+      <p:sp>
+        <p:nvSpPr>
+          <p:cNvPr id="23" name="Shape 20"/>
+          <p:cNvSpPr/>
+          <p:nvPr/>
+        </p:nvSpPr>
+        <p:spPr>
+          <a:xfrm>
+            <a:off x="1884807" y="5266944"/>
+            <a:ext cx="288402" cy="274320"/>
+          </a:xfrm>
+          <a:prstGeom prst="rect">
+            <a:avLst/>
+          </a:prstGeom>
+          <a:solidFill>
+            <a:srgbClr val="B3121B"/>
+          </a:solidFill>
+          <a:ln/>
+        </p:spPr>
+      </p:sp>
+      <p:sp>
+        <p:nvSpPr>
+          <p:cNvPr id="24" name="Shape 21"/>
+          <p:cNvSpPr/>
+          <p:nvPr/>
+        </p:nvSpPr>
+        <p:spPr>
+          <a:xfrm>
+            <a:off x="2173209" y="5266944"/>
+            <a:ext cx="75895" cy="274320"/>
           </a:xfrm>
           <a:prstGeom prst="rect">
             <a:avLst/>
@@ -4236,14 +6140,74 @@
       </p:sp>
       <p:sp>
         <p:nvSpPr>
-          <p:cNvPr id="54" name="Text 52"/>
+          <p:cNvPr id="25" name="Shape 22"/>
+          <p:cNvSpPr/>
+          <p:nvPr/>
+        </p:nvSpPr>
+        <p:spPr>
+          <a:xfrm>
+            <a:off x="2249104" y="5266944"/>
+            <a:ext cx="26563" cy="274320"/>
+          </a:xfrm>
+          <a:prstGeom prst="rect">
+            <a:avLst/>
+          </a:prstGeom>
+          <a:solidFill>
+            <a:srgbClr val="D9601A"/>
+          </a:solidFill>
+          <a:ln/>
+        </p:spPr>
+      </p:sp>
+      <p:sp>
+        <p:nvSpPr>
+          <p:cNvPr id="26" name="Shape 23"/>
+          <p:cNvSpPr/>
+          <p:nvPr/>
+        </p:nvSpPr>
+        <p:spPr>
+          <a:xfrm>
+            <a:off x="2275667" y="5266944"/>
+            <a:ext cx="379476" cy="274320"/>
+          </a:xfrm>
+          <a:prstGeom prst="rect">
+            <a:avLst/>
+          </a:prstGeom>
+          <a:solidFill>
+            <a:srgbClr val="1F6F63"/>
+          </a:solidFill>
+          <a:ln/>
+        </p:spPr>
+      </p:sp>
+      <p:sp>
+        <p:nvSpPr>
+          <p:cNvPr id="27" name="Shape 24"/>
+          <p:cNvSpPr/>
+          <p:nvPr/>
+        </p:nvSpPr>
+        <p:spPr>
+          <a:xfrm>
+            <a:off x="2655143" y="5266944"/>
+            <a:ext cx="265633" cy="274320"/>
+          </a:xfrm>
+          <a:prstGeom prst="rect">
+            <a:avLst/>
+          </a:prstGeom>
+          <a:solidFill>
+            <a:srgbClr val="6E6E76"/>
+          </a:solidFill>
+          <a:ln/>
+        </p:spPr>
+      </p:sp>
+      <p:sp>
+        <p:nvSpPr>
+          <p:cNvPr id="28" name="Text 25"/>
           <p:cNvSpPr txBox="1"/>
           <p:nvPr/>
         </p:nvSpPr>
         <p:spPr>
           <a:xfrm>
-            <a:off x="7141464" y="2907792"/>
-            <a:ext cx="3017520" cy="292608"/>
+            <a:off x="2993928" y="5266944"/>
+            <a:ext cx="914400" cy="274320"/>
           </a:xfrm>
           <a:prstGeom prst="rect">
             <a:avLst/>
@@ -4259,89 +6223,50 @@
               <a:buNone/>
             </a:pPr>
             <a:r>
-              <a:rPr lang="en-US" sz="950" dirty="0">
+              <a:rPr lang="en-US" sz="1000" b="1" dirty="0">
                 <a:solidFill>
-                  <a:srgbClr val="3A3A42"/>
+                  <a:srgbClr val="1F6F63"/>
                 </a:solidFill>
                 <a:latin typeface="Yu Gothic" pitchFamily="34" charset="0"/>
                 <a:ea typeface="Yu Gothic" pitchFamily="34" charset="-122"/>
                 <a:cs typeface="Yu Gothic" pitchFamily="34" charset="-120"/>
               </a:rPr>
-              <a:t>機材・スタジオ・ロケ</a:t>
+              <a:t>35万円</a:t>
             </a:r>
-            <a:endParaRPr lang="en-US" sz="950" dirty="0"/>
+            <a:endParaRPr lang="en-US" sz="1000" dirty="0"/>
           </a:p>
         </p:txBody>
       </p:sp>
       <p:sp>
         <p:nvSpPr>
-          <p:cNvPr id="55" name="Text 53"/>
-          <p:cNvSpPr txBox="1"/>
-          <p:nvPr/>
-        </p:nvSpPr>
-        <p:spPr>
-          <a:xfrm>
-            <a:off x="10195560" y="2907792"/>
-            <a:ext cx="548640" cy="292608"/>
-          </a:xfrm>
-          <a:prstGeom prst="rect">
-            <a:avLst/>
-          </a:prstGeom>
-          <a:noFill/>
-          <a:ln/>
-        </p:spPr>
-        <p:txBody>
-          <a:bodyPr wrap="square" lIns="0" tIns="0" rIns="0" bIns="0" rtlCol="0" anchor="ctr"/>
-          <a:lstStyle/>
-          <a:p>
-            <a:pPr algn="r" indent="0" marL="0">
-              <a:buNone/>
-            </a:pPr>
-            <a:r>
-              <a:rPr lang="en-US" sz="950" b="1" dirty="0">
-                <a:solidFill>
-                  <a:srgbClr val="16161A"/>
-                </a:solidFill>
-                <a:latin typeface="Yu Gothic" pitchFamily="34" charset="0"/>
-                <a:ea typeface="Yu Gothic" pitchFamily="34" charset="-122"/>
-                <a:cs typeface="Yu Gothic" pitchFamily="34" charset="-120"/>
-              </a:rPr>
-              <a:t>10%</a:t>
-            </a:r>
-            <a:endParaRPr lang="en-US" sz="950" dirty="0"/>
-          </a:p>
-        </p:txBody>
-      </p:sp>
-      <p:sp>
-        <p:nvSpPr>
-          <p:cNvPr id="56" name="Shape 54"/>
+          <p:cNvPr id="29" name="Shape 26"/>
           <p:cNvSpPr/>
           <p:nvPr/>
         </p:nvSpPr>
         <p:spPr>
           <a:xfrm>
-            <a:off x="6903720" y="3291840"/>
-            <a:ext cx="146304" cy="146304"/>
+            <a:off x="594360" y="5669280"/>
+            <a:ext cx="118872" cy="118872"/>
           </a:xfrm>
           <a:prstGeom prst="rect">
             <a:avLst/>
           </a:prstGeom>
           <a:solidFill>
-            <a:srgbClr val="D9601A"/>
+            <a:srgbClr val="2A3563"/>
           </a:solidFill>
           <a:ln/>
         </p:spPr>
       </p:sp>
       <p:sp>
         <p:nvSpPr>
-          <p:cNvPr id="57" name="Text 55"/>
+          <p:cNvPr id="30" name="Text 27"/>
           <p:cNvSpPr txBox="1"/>
           <p:nvPr/>
         </p:nvSpPr>
         <p:spPr>
           <a:xfrm>
-            <a:off x="7141464" y="3218688"/>
-            <a:ext cx="3017520" cy="292608"/>
+            <a:off x="768096" y="5605272"/>
+            <a:ext cx="713232" cy="237744"/>
           </a:xfrm>
           <a:prstGeom prst="rect">
             <a:avLst/>
@@ -4357,89 +6282,50 @@
               <a:buNone/>
             </a:pPr>
             <a:r>
-              <a:rPr lang="en-US" sz="950" dirty="0">
+              <a:rPr lang="en-US" sz="800" dirty="0">
                 <a:solidFill>
-                  <a:srgbClr val="3A3A42"/>
+                  <a:srgbClr val="6E6E76"/>
                 </a:solidFill>
                 <a:latin typeface="Yu Gothic" pitchFamily="34" charset="0"/>
                 <a:ea typeface="Yu Gothic" pitchFamily="34" charset="-122"/>
                 <a:cs typeface="Yu Gothic" pitchFamily="34" charset="-120"/>
               </a:rPr>
-              <a:t>出演・キャスティング</a:t>
+              <a:t>企画</a:t>
             </a:r>
-            <a:endParaRPr lang="en-US" sz="950" dirty="0"/>
+            <a:endParaRPr lang="en-US" sz="800" dirty="0"/>
           </a:p>
         </p:txBody>
       </p:sp>
       <p:sp>
         <p:nvSpPr>
-          <p:cNvPr id="58" name="Text 56"/>
-          <p:cNvSpPr txBox="1"/>
-          <p:nvPr/>
-        </p:nvSpPr>
-        <p:spPr>
-          <a:xfrm>
-            <a:off x="10195560" y="3218688"/>
-            <a:ext cx="548640" cy="292608"/>
-          </a:xfrm>
-          <a:prstGeom prst="rect">
-            <a:avLst/>
-          </a:prstGeom>
-          <a:noFill/>
-          <a:ln/>
-        </p:spPr>
-        <p:txBody>
-          <a:bodyPr wrap="square" lIns="0" tIns="0" rIns="0" bIns="0" rtlCol="0" anchor="ctr"/>
-          <a:lstStyle/>
-          <a:p>
-            <a:pPr algn="r" indent="0" marL="0">
-              <a:buNone/>
-            </a:pPr>
-            <a:r>
-              <a:rPr lang="en-US" sz="950" b="1" dirty="0">
-                <a:solidFill>
-                  <a:srgbClr val="16161A"/>
-                </a:solidFill>
-                <a:latin typeface="Yu Gothic" pitchFamily="34" charset="0"/>
-                <a:ea typeface="Yu Gothic" pitchFamily="34" charset="-122"/>
-                <a:cs typeface="Yu Gothic" pitchFamily="34" charset="-120"/>
-              </a:rPr>
-              <a:t>7%</a:t>
-            </a:r>
-            <a:endParaRPr lang="en-US" sz="950" dirty="0"/>
-          </a:p>
-        </p:txBody>
-      </p:sp>
-      <p:sp>
-        <p:nvSpPr>
-          <p:cNvPr id="59" name="Shape 57"/>
+          <p:cNvPr id="31" name="Shape 28"/>
           <p:cNvSpPr/>
           <p:nvPr/>
         </p:nvSpPr>
         <p:spPr>
           <a:xfrm>
-            <a:off x="6903720" y="3602736"/>
-            <a:ext cx="146304" cy="146304"/>
+            <a:off x="1490472" y="5669280"/>
+            <a:ext cx="118872" cy="118872"/>
           </a:xfrm>
           <a:prstGeom prst="rect">
             <a:avLst/>
           </a:prstGeom>
           <a:solidFill>
-            <a:srgbClr val="1F6F63"/>
+            <a:srgbClr val="B3121B"/>
           </a:solidFill>
           <a:ln/>
         </p:spPr>
       </p:sp>
       <p:sp>
         <p:nvSpPr>
-          <p:cNvPr id="60" name="Text 58"/>
+          <p:cNvPr id="32" name="Text 29"/>
           <p:cNvSpPr txBox="1"/>
           <p:nvPr/>
         </p:nvSpPr>
         <p:spPr>
           <a:xfrm>
-            <a:off x="7141464" y="3529584"/>
-            <a:ext cx="3017520" cy="292608"/>
+            <a:off x="1664208" y="5605272"/>
+            <a:ext cx="713232" cy="237744"/>
           </a:xfrm>
           <a:prstGeom prst="rect">
             <a:avLst/>
@@ -4455,89 +6341,50 @@
               <a:buNone/>
             </a:pPr>
             <a:r>
-              <a:rPr lang="en-US" sz="950" dirty="0">
+              <a:rPr lang="en-US" sz="800" dirty="0">
                 <a:solidFill>
-                  <a:srgbClr val="3A3A42"/>
+                  <a:srgbClr val="6E6E76"/>
                 </a:solidFill>
                 <a:latin typeface="Yu Gothic" pitchFamily="34" charset="0"/>
                 <a:ea typeface="Yu Gothic" pitchFamily="34" charset="-122"/>
                 <a:cs typeface="Yu Gothic" pitchFamily="34" charset="-120"/>
               </a:rPr>
-              <a:t>編集・MA・音楽</a:t>
+              <a:t>撮影</a:t>
             </a:r>
-            <a:endParaRPr lang="en-US" sz="950" dirty="0"/>
+            <a:endParaRPr lang="en-US" sz="800" dirty="0"/>
           </a:p>
         </p:txBody>
       </p:sp>
       <p:sp>
         <p:nvSpPr>
-          <p:cNvPr id="61" name="Text 59"/>
-          <p:cNvSpPr txBox="1"/>
-          <p:nvPr/>
-        </p:nvSpPr>
-        <p:spPr>
-          <a:xfrm>
-            <a:off x="10195560" y="3529584"/>
-            <a:ext cx="548640" cy="292608"/>
-          </a:xfrm>
-          <a:prstGeom prst="rect">
-            <a:avLst/>
-          </a:prstGeom>
-          <a:noFill/>
-          <a:ln/>
-        </p:spPr>
-        <p:txBody>
-          <a:bodyPr wrap="square" lIns="0" tIns="0" rIns="0" bIns="0" rtlCol="0" anchor="ctr"/>
-          <a:lstStyle/>
-          <a:p>
-            <a:pPr algn="r" indent="0" marL="0">
-              <a:buNone/>
-            </a:pPr>
-            <a:r>
-              <a:rPr lang="en-US" sz="950" b="1" dirty="0">
-                <a:solidFill>
-                  <a:srgbClr val="16161A"/>
-                </a:solidFill>
-                <a:latin typeface="Yu Gothic" pitchFamily="34" charset="0"/>
-                <a:ea typeface="Yu Gothic" pitchFamily="34" charset="-122"/>
-                <a:cs typeface="Yu Gothic" pitchFamily="34" charset="-120"/>
-              </a:rPr>
-              <a:t>20%</a:t>
-            </a:r>
-            <a:endParaRPr lang="en-US" sz="950" dirty="0"/>
-          </a:p>
-        </p:txBody>
-      </p:sp>
-      <p:sp>
-        <p:nvSpPr>
-          <p:cNvPr id="62" name="Shape 60"/>
+          <p:cNvPr id="33" name="Shape 30"/>
           <p:cNvSpPr/>
           <p:nvPr/>
         </p:nvSpPr>
         <p:spPr>
           <a:xfrm>
-            <a:off x="6903720" y="3913632"/>
-            <a:ext cx="146304" cy="146304"/>
+            <a:off x="2386584" y="5669280"/>
+            <a:ext cx="118872" cy="118872"/>
           </a:xfrm>
           <a:prstGeom prst="rect">
             <a:avLst/>
           </a:prstGeom>
           <a:solidFill>
-            <a:srgbClr val="6E6E76"/>
+            <a:srgbClr val="8C1F26"/>
           </a:solidFill>
           <a:ln/>
         </p:spPr>
       </p:sp>
       <p:sp>
         <p:nvSpPr>
-          <p:cNvPr id="63" name="Text 61"/>
+          <p:cNvPr id="34" name="Text 31"/>
           <p:cNvSpPr txBox="1"/>
           <p:nvPr/>
         </p:nvSpPr>
         <p:spPr>
           <a:xfrm>
-            <a:off x="7141464" y="3840480"/>
-            <a:ext cx="3017520" cy="292608"/>
+            <a:off x="2560320" y="5605272"/>
+            <a:ext cx="713232" cy="237744"/>
           </a:xfrm>
           <a:prstGeom prst="rect">
             <a:avLst/>
@@ -4553,131 +6400,50 @@
               <a:buNone/>
             </a:pPr>
             <a:r>
-              <a:rPr lang="en-US" sz="950" dirty="0">
+              <a:rPr lang="en-US" sz="800" dirty="0">
                 <a:solidFill>
-                  <a:srgbClr val="3A3A42"/>
+                  <a:srgbClr val="6E6E76"/>
                 </a:solidFill>
                 <a:latin typeface="Yu Gothic" pitchFamily="34" charset="0"/>
                 <a:ea typeface="Yu Gothic" pitchFamily="34" charset="-122"/>
                 <a:cs typeface="Yu Gothic" pitchFamily="34" charset="-120"/>
               </a:rPr>
-              <a:t>諸経費・管理費</a:t>
+              <a:t>機材</a:t>
             </a:r>
-            <a:endParaRPr lang="en-US" sz="950" dirty="0"/>
+            <a:endParaRPr lang="en-US" sz="800" dirty="0"/>
           </a:p>
         </p:txBody>
       </p:sp>
       <p:sp>
         <p:nvSpPr>
-          <p:cNvPr id="64" name="Text 62"/>
+          <p:cNvPr id="35" name="Shape 32"/>
+          <p:cNvSpPr/>
+          <p:nvPr/>
+        </p:nvSpPr>
+        <p:spPr>
+          <a:xfrm>
+            <a:off x="3282696" y="5669280"/>
+            <a:ext cx="118872" cy="118872"/>
+          </a:xfrm>
+          <a:prstGeom prst="rect">
+            <a:avLst/>
+          </a:prstGeom>
+          <a:solidFill>
+            <a:srgbClr val="D9601A"/>
+          </a:solidFill>
+          <a:ln/>
+        </p:spPr>
+      </p:sp>
+      <p:sp>
+        <p:nvSpPr>
+          <p:cNvPr id="36" name="Text 33"/>
           <p:cNvSpPr txBox="1"/>
           <p:nvPr/>
         </p:nvSpPr>
         <p:spPr>
           <a:xfrm>
-            <a:off x="10195560" y="3840480"/>
-            <a:ext cx="548640" cy="292608"/>
-          </a:xfrm>
-          <a:prstGeom prst="rect">
-            <a:avLst/>
-          </a:prstGeom>
-          <a:noFill/>
-          <a:ln/>
-        </p:spPr>
-        <p:txBody>
-          <a:bodyPr wrap="square" lIns="0" tIns="0" rIns="0" bIns="0" rtlCol="0" anchor="ctr"/>
-          <a:lstStyle/>
-          <a:p>
-            <a:pPr algn="r" indent="0" marL="0">
-              <a:buNone/>
-            </a:pPr>
-            <a:r>
-              <a:rPr lang="en-US" sz="950" b="1" dirty="0">
-                <a:solidFill>
-                  <a:srgbClr val="16161A"/>
-                </a:solidFill>
-                <a:latin typeface="Yu Gothic" pitchFamily="34" charset="0"/>
-                <a:ea typeface="Yu Gothic" pitchFamily="34" charset="-122"/>
-                <a:cs typeface="Yu Gothic" pitchFamily="34" charset="-120"/>
-              </a:rPr>
-              <a:t>10%</a:t>
-            </a:r>
-            <a:endParaRPr lang="en-US" sz="950" dirty="0"/>
-          </a:p>
-        </p:txBody>
-      </p:sp>
-      <p:sp>
-        <p:nvSpPr>
-          <p:cNvPr id="65" name="Text 63"/>
-          <p:cNvSpPr txBox="1"/>
-          <p:nvPr/>
-        </p:nvSpPr>
-        <p:spPr>
-          <a:xfrm>
-            <a:off x="7141464" y="4169664"/>
-            <a:ext cx="4453128" cy="457200"/>
-          </a:xfrm>
-          <a:prstGeom prst="rect">
-            <a:avLst/>
-          </a:prstGeom>
-          <a:noFill/>
-          <a:ln/>
-        </p:spPr>
-        <p:txBody>
-          <a:bodyPr wrap="square" lIns="0" tIns="0" rIns="0" bIns="0" rtlCol="0" anchor="t"/>
-          <a:lstStyle/>
-          <a:p>
-            <a:pPr indent="0" marL="0">
-              <a:lnSpc>
-                <a:spcPct val="125000"/>
-              </a:lnSpc>
-              <a:buNone/>
-            </a:pPr>
-            <a:r>
-              <a:rPr lang="en-US" sz="900" b="1" dirty="0">
-                <a:solidFill>
-                  <a:srgbClr val="B3121B"/>
-                </a:solidFill>
-                <a:latin typeface="Yu Gothic" pitchFamily="34" charset="0"/>
-                <a:ea typeface="Yu Gothic" pitchFamily="34" charset="-122"/>
-                <a:cs typeface="Yu Gothic" pitchFamily="34" charset="-120"/>
-              </a:rPr>
-              <a:t>★ 撮影費は制作費の35〜40%が目安（業界相場）。</a:t>
-            </a:r>
-            <a:endParaRPr lang="en-US" sz="900" dirty="0"/>
-          </a:p>
-          <a:p>
-            <a:pPr indent="0" marL="0">
-              <a:lnSpc>
-                <a:spcPct val="125000"/>
-              </a:lnSpc>
-              <a:buNone/>
-            </a:pPr>
-            <a:r>
-              <a:rPr lang="en-US" sz="900" b="1" dirty="0">
-                <a:solidFill>
-                  <a:srgbClr val="B3121B"/>
-                </a:solidFill>
-                <a:latin typeface="Yu Gothic" pitchFamily="34" charset="0"/>
-                <a:ea typeface="Yu Gothic" pitchFamily="34" charset="-122"/>
-                <a:cs typeface="Yu Gothic" pitchFamily="34" charset="-120"/>
-              </a:rPr>
-              <a:t>　 撮影＋機材＋出演で 55%。ここが人の動く工程です。</a:t>
-            </a:r>
-            <a:endParaRPr lang="en-US" sz="900" dirty="0"/>
-          </a:p>
-        </p:txBody>
-      </p:sp>
-      <p:sp>
-        <p:nvSpPr>
-          <p:cNvPr id="66" name="Text 64"/>
-          <p:cNvSpPr txBox="1"/>
-          <p:nvPr/>
-        </p:nvSpPr>
-        <p:spPr>
-          <a:xfrm>
-            <a:off x="594360" y="4626864"/>
-            <a:ext cx="5669280" cy="274320"/>
+            <a:off x="3456432" y="5605272"/>
+            <a:ext cx="713232" cy="237744"/>
           </a:xfrm>
           <a:prstGeom prst="rect">
             <a:avLst/>
@@ -4693,30 +6459,50 @@
               <a:buNone/>
             </a:pPr>
             <a:r>
-              <a:rPr lang="en-US" sz="1150" b="1" dirty="0">
+              <a:rPr lang="en-US" sz="800" dirty="0">
                 <a:solidFill>
-                  <a:srgbClr val="16161A"/>
+                  <a:srgbClr val="6E6E76"/>
                 </a:solidFill>
                 <a:latin typeface="Yu Gothic" pitchFamily="34" charset="0"/>
                 <a:ea typeface="Yu Gothic" pitchFamily="34" charset="-122"/>
                 <a:cs typeface="Yu Gothic" pitchFamily="34" charset="-120"/>
               </a:rPr>
-              <a:t>AI導入による工程別の削減率</a:t>
+              <a:t>出演</a:t>
             </a:r>
-            <a:endParaRPr lang="en-US" sz="1150" dirty="0"/>
+            <a:endParaRPr lang="en-US" sz="800" dirty="0"/>
           </a:p>
         </p:txBody>
       </p:sp>
       <p:sp>
         <p:nvSpPr>
-          <p:cNvPr id="67" name="Text 65"/>
+          <p:cNvPr id="37" name="Shape 34"/>
+          <p:cNvSpPr/>
+          <p:nvPr/>
+        </p:nvSpPr>
+        <p:spPr>
+          <a:xfrm>
+            <a:off x="4178808" y="5669280"/>
+            <a:ext cx="118872" cy="118872"/>
+          </a:xfrm>
+          <a:prstGeom prst="rect">
+            <a:avLst/>
+          </a:prstGeom>
+          <a:solidFill>
+            <a:srgbClr val="1F6F63"/>
+          </a:solidFill>
+          <a:ln/>
+        </p:spPr>
+      </p:sp>
+      <p:sp>
+        <p:nvSpPr>
+          <p:cNvPr id="38" name="Text 35"/>
           <p:cNvSpPr txBox="1"/>
           <p:nvPr/>
         </p:nvSpPr>
         <p:spPr>
           <a:xfrm>
-            <a:off x="594360" y="4974336"/>
-            <a:ext cx="1975104" cy="237744"/>
+            <a:off x="4352544" y="5605272"/>
+            <a:ext cx="713232" cy="237744"/>
           </a:xfrm>
           <a:prstGeom prst="rect">
             <a:avLst/>
@@ -4732,50 +6518,89 @@
               <a:buNone/>
             </a:pPr>
             <a:r>
-              <a:rPr lang="en-US" sz="850" dirty="0">
+              <a:rPr lang="en-US" sz="800" dirty="0">
                 <a:solidFill>
-                  <a:srgbClr val="3A3A42"/>
+                  <a:srgbClr val="6E6E76"/>
                 </a:solidFill>
                 <a:latin typeface="Yu Gothic" pitchFamily="34" charset="0"/>
                 <a:ea typeface="Yu Gothic" pitchFamily="34" charset="-122"/>
                 <a:cs typeface="Yu Gothic" pitchFamily="34" charset="-120"/>
               </a:rPr>
-              <a:t>企画・構成</a:t>
+              <a:t>編集</a:t>
             </a:r>
-            <a:endParaRPr lang="en-US" sz="850" dirty="0"/>
+            <a:endParaRPr lang="en-US" sz="800" dirty="0"/>
           </a:p>
         </p:txBody>
       </p:sp>
       <p:sp>
         <p:nvSpPr>
-          <p:cNvPr id="68" name="Shape 66"/>
+          <p:cNvPr id="39" name="Shape 36"/>
           <p:cNvSpPr/>
           <p:nvPr/>
         </p:nvSpPr>
         <p:spPr>
           <a:xfrm>
-            <a:off x="2642616" y="5020056"/>
-            <a:ext cx="914400" cy="146304"/>
+            <a:off x="5074920" y="5669280"/>
+            <a:ext cx="118872" cy="118872"/>
           </a:xfrm>
           <a:prstGeom prst="rect">
             <a:avLst/>
           </a:prstGeom>
           <a:solidFill>
-            <a:srgbClr val="B3121B"/>
+            <a:srgbClr val="6E6E76"/>
           </a:solidFill>
           <a:ln/>
         </p:spPr>
       </p:sp>
       <p:sp>
         <p:nvSpPr>
-          <p:cNvPr id="69" name="Text 67"/>
+          <p:cNvPr id="40" name="Text 37"/>
           <p:cNvSpPr txBox="1"/>
           <p:nvPr/>
         </p:nvSpPr>
         <p:spPr>
           <a:xfrm>
-            <a:off x="4544568" y="4974336"/>
-            <a:ext cx="804672" cy="237744"/>
+            <a:off x="5248656" y="5605272"/>
+            <a:ext cx="713232" cy="237744"/>
+          </a:xfrm>
+          <a:prstGeom prst="rect">
+            <a:avLst/>
+          </a:prstGeom>
+          <a:noFill/>
+          <a:ln/>
+        </p:spPr>
+        <p:txBody>
+          <a:bodyPr wrap="square" lIns="0" tIns="0" rIns="0" bIns="0" rtlCol="0" anchor="ctr"/>
+          <a:lstStyle/>
+          <a:p>
+            <a:pPr indent="0" marL="0">
+              <a:buNone/>
+            </a:pPr>
+            <a:r>
+              <a:rPr lang="en-US" sz="800" dirty="0">
+                <a:solidFill>
+                  <a:srgbClr val="6E6E76"/>
+                </a:solidFill>
+                <a:latin typeface="Yu Gothic" pitchFamily="34" charset="0"/>
+                <a:ea typeface="Yu Gothic" pitchFamily="34" charset="-122"/>
+                <a:cs typeface="Yu Gothic" pitchFamily="34" charset="-120"/>
+              </a:rPr>
+              <a:t>諸経費</a:t>
+            </a:r>
+            <a:endParaRPr lang="en-US" sz="800" dirty="0"/>
+          </a:p>
+        </p:txBody>
+      </p:sp>
+      <p:sp>
+        <p:nvSpPr>
+          <p:cNvPr id="41" name="Text 38"/>
+          <p:cNvSpPr txBox="1"/>
+          <p:nvPr/>
+        </p:nvSpPr>
+        <p:spPr>
+          <a:xfrm>
+            <a:off x="594360" y="5888736"/>
+            <a:ext cx="5394960" cy="237744"/>
           </a:xfrm>
           <a:prstGeom prst="rect">
             <a:avLst/>
@@ -4799,7 +6624,7 @@
                 <a:ea typeface="Yu Gothic" pitchFamily="34" charset="-122"/>
                 <a:cs typeface="Yu Gothic" pitchFamily="34" charset="-120"/>
               </a:rPr>
-              <a:t>▲40〜60%</a:t>
+              <a:t>消えるのは 撮影38＋機材10＋出演7＝55%。編集と諸経費は残ります。</a:t>
             </a:r>
             <a:endParaRPr lang="en-US" sz="850" dirty="0"/>
           </a:p>
@@ -4807,601 +6632,14 @@
       </p:sp>
       <p:sp>
         <p:nvSpPr>
-          <p:cNvPr id="70" name="Text 68"/>
-          <p:cNvSpPr txBox="1"/>
-          <p:nvPr/>
-        </p:nvSpPr>
-        <p:spPr>
-          <a:xfrm>
-            <a:off x="5385816" y="4974336"/>
-            <a:ext cx="1335024" cy="237744"/>
-          </a:xfrm>
-          <a:prstGeom prst="rect">
-            <a:avLst/>
-          </a:prstGeom>
-          <a:noFill/>
-          <a:ln/>
-        </p:spPr>
-        <p:txBody>
-          <a:bodyPr wrap="square" lIns="0" tIns="0" rIns="0" bIns="0" rtlCol="0" anchor="ctr"/>
-          <a:lstStyle/>
-          <a:p>
-            <a:pPr indent="0" marL="0">
-              <a:buNone/>
-            </a:pPr>
-            <a:r>
-              <a:rPr lang="en-US" sz="750" dirty="0">
-                <a:solidFill>
-                  <a:srgbClr val="6E6E76"/>
-                </a:solidFill>
-                <a:latin typeface="Yu Gothic" pitchFamily="34" charset="0"/>
-                <a:ea typeface="Yu Gothic" pitchFamily="34" charset="-122"/>
-                <a:cs typeface="Yu Gothic" pitchFamily="34" charset="-120"/>
-              </a:rPr>
-              <a:t>AI台本・絵コンテ生成</a:t>
-            </a:r>
-            <a:endParaRPr lang="en-US" sz="750" dirty="0"/>
-          </a:p>
-        </p:txBody>
-      </p:sp>
-      <p:sp>
-        <p:nvSpPr>
-          <p:cNvPr id="71" name="Text 69"/>
-          <p:cNvSpPr txBox="1"/>
-          <p:nvPr/>
-        </p:nvSpPr>
-        <p:spPr>
-          <a:xfrm>
-            <a:off x="594360" y="5248656"/>
-            <a:ext cx="1975104" cy="237744"/>
-          </a:xfrm>
-          <a:prstGeom prst="rect">
-            <a:avLst/>
-          </a:prstGeom>
-          <a:noFill/>
-          <a:ln/>
-        </p:spPr>
-        <p:txBody>
-          <a:bodyPr wrap="square" lIns="0" tIns="0" rIns="0" bIns="0" rtlCol="0" anchor="ctr"/>
-          <a:lstStyle/>
-          <a:p>
-            <a:pPr indent="0" marL="0">
-              <a:buNone/>
-            </a:pPr>
-            <a:r>
-              <a:rPr lang="en-US" sz="850" dirty="0">
-                <a:solidFill>
-                  <a:srgbClr val="3A3A42"/>
-                </a:solidFill>
-                <a:latin typeface="Yu Gothic" pitchFamily="34" charset="0"/>
-                <a:ea typeface="Yu Gothic" pitchFamily="34" charset="-122"/>
-                <a:cs typeface="Yu Gothic" pitchFamily="34" charset="-120"/>
-              </a:rPr>
-              <a:t>撮影（人件費）</a:t>
-            </a:r>
-            <a:endParaRPr lang="en-US" sz="850" dirty="0"/>
-          </a:p>
-        </p:txBody>
-      </p:sp>
-      <p:sp>
-        <p:nvSpPr>
-          <p:cNvPr id="72" name="Shape 70"/>
+          <p:cNvPr id="42" name="Shape 39"/>
           <p:cNvSpPr/>
           <p:nvPr/>
         </p:nvSpPr>
         <p:spPr>
           <a:xfrm>
-            <a:off x="2642616" y="5294376"/>
-            <a:ext cx="1463040" cy="146304"/>
-          </a:xfrm>
-          <a:prstGeom prst="rect">
-            <a:avLst/>
-          </a:prstGeom>
-          <a:solidFill>
-            <a:srgbClr val="B3121B"/>
-          </a:solidFill>
-          <a:ln/>
-        </p:spPr>
-      </p:sp>
-      <p:sp>
-        <p:nvSpPr>
-          <p:cNvPr id="73" name="Text 71"/>
-          <p:cNvSpPr txBox="1"/>
-          <p:nvPr/>
-        </p:nvSpPr>
-        <p:spPr>
-          <a:xfrm>
-            <a:off x="4544568" y="5248656"/>
-            <a:ext cx="804672" cy="237744"/>
-          </a:xfrm>
-          <a:prstGeom prst="rect">
-            <a:avLst/>
-          </a:prstGeom>
-          <a:noFill/>
-          <a:ln/>
-        </p:spPr>
-        <p:txBody>
-          <a:bodyPr wrap="square" lIns="0" tIns="0" rIns="0" bIns="0" rtlCol="0" anchor="ctr"/>
-          <a:lstStyle/>
-          <a:p>
-            <a:pPr indent="0" marL="0">
-              <a:buNone/>
-            </a:pPr>
-            <a:r>
-              <a:rPr lang="en-US" sz="850" b="1" dirty="0">
-                <a:solidFill>
-                  <a:srgbClr val="B3121B"/>
-                </a:solidFill>
-                <a:latin typeface="Yu Gothic" pitchFamily="34" charset="0"/>
-                <a:ea typeface="Yu Gothic" pitchFamily="34" charset="-122"/>
-                <a:cs typeface="Yu Gothic" pitchFamily="34" charset="-120"/>
-              </a:rPr>
-              <a:t>▲70〜90%</a:t>
-            </a:r>
-            <a:endParaRPr lang="en-US" sz="850" dirty="0"/>
-          </a:p>
-        </p:txBody>
-      </p:sp>
-      <p:sp>
-        <p:nvSpPr>
-          <p:cNvPr id="74" name="Text 72"/>
-          <p:cNvSpPr txBox="1"/>
-          <p:nvPr/>
-        </p:nvSpPr>
-        <p:spPr>
-          <a:xfrm>
-            <a:off x="5385816" y="5248656"/>
-            <a:ext cx="1335024" cy="237744"/>
-          </a:xfrm>
-          <a:prstGeom prst="rect">
-            <a:avLst/>
-          </a:prstGeom>
-          <a:noFill/>
-          <a:ln/>
-        </p:spPr>
-        <p:txBody>
-          <a:bodyPr wrap="square" lIns="0" tIns="0" rIns="0" bIns="0" rtlCol="0" anchor="ctr"/>
-          <a:lstStyle/>
-          <a:p>
-            <a:pPr indent="0" marL="0">
-              <a:buNone/>
-            </a:pPr>
-            <a:r>
-              <a:rPr lang="en-US" sz="750" dirty="0">
-                <a:solidFill>
-                  <a:srgbClr val="6E6E76"/>
-                </a:solidFill>
-                <a:latin typeface="Yu Gothic" pitchFamily="34" charset="0"/>
-                <a:ea typeface="Yu Gothic" pitchFamily="34" charset="-122"/>
-                <a:cs typeface="Yu Gothic" pitchFamily="34" charset="-120"/>
-              </a:rPr>
-              <a:t>撮影自体が不要になる</a:t>
-            </a:r>
-            <a:endParaRPr lang="en-US" sz="750" dirty="0"/>
-          </a:p>
-        </p:txBody>
-      </p:sp>
-      <p:sp>
-        <p:nvSpPr>
-          <p:cNvPr id="75" name="Text 73"/>
-          <p:cNvSpPr txBox="1"/>
-          <p:nvPr/>
-        </p:nvSpPr>
-        <p:spPr>
-          <a:xfrm>
-            <a:off x="594360" y="5522976"/>
-            <a:ext cx="1975104" cy="237744"/>
-          </a:xfrm>
-          <a:prstGeom prst="rect">
-            <a:avLst/>
-          </a:prstGeom>
-          <a:noFill/>
-          <a:ln/>
-        </p:spPr>
-        <p:txBody>
-          <a:bodyPr wrap="square" lIns="0" tIns="0" rIns="0" bIns="0" rtlCol="0" anchor="ctr"/>
-          <a:lstStyle/>
-          <a:p>
-            <a:pPr indent="0" marL="0">
-              <a:buNone/>
-            </a:pPr>
-            <a:r>
-              <a:rPr lang="en-US" sz="850" dirty="0">
-                <a:solidFill>
-                  <a:srgbClr val="3A3A42"/>
-                </a:solidFill>
-                <a:latin typeface="Yu Gothic" pitchFamily="34" charset="0"/>
-                <a:ea typeface="Yu Gothic" pitchFamily="34" charset="-122"/>
-                <a:cs typeface="Yu Gothic" pitchFamily="34" charset="-120"/>
-              </a:rPr>
-              <a:t>機材・スタジオ</a:t>
-            </a:r>
-            <a:endParaRPr lang="en-US" sz="850" dirty="0"/>
-          </a:p>
-        </p:txBody>
-      </p:sp>
-      <p:sp>
-        <p:nvSpPr>
-          <p:cNvPr id="76" name="Shape 74"/>
-          <p:cNvSpPr/>
-          <p:nvPr/>
-        </p:nvSpPr>
-        <p:spPr>
-          <a:xfrm>
-            <a:off x="2642616" y="5568696"/>
-            <a:ext cx="1463040" cy="146304"/>
-          </a:xfrm>
-          <a:prstGeom prst="rect">
-            <a:avLst/>
-          </a:prstGeom>
-          <a:solidFill>
-            <a:srgbClr val="B3121B"/>
-          </a:solidFill>
-          <a:ln/>
-        </p:spPr>
-      </p:sp>
-      <p:sp>
-        <p:nvSpPr>
-          <p:cNvPr id="77" name="Text 75"/>
-          <p:cNvSpPr txBox="1"/>
-          <p:nvPr/>
-        </p:nvSpPr>
-        <p:spPr>
-          <a:xfrm>
-            <a:off x="4544568" y="5522976"/>
-            <a:ext cx="804672" cy="237744"/>
-          </a:xfrm>
-          <a:prstGeom prst="rect">
-            <a:avLst/>
-          </a:prstGeom>
-          <a:noFill/>
-          <a:ln/>
-        </p:spPr>
-        <p:txBody>
-          <a:bodyPr wrap="square" lIns="0" tIns="0" rIns="0" bIns="0" rtlCol="0" anchor="ctr"/>
-          <a:lstStyle/>
-          <a:p>
-            <a:pPr indent="0" marL="0">
-              <a:buNone/>
-            </a:pPr>
-            <a:r>
-              <a:rPr lang="en-US" sz="850" b="1" dirty="0">
-                <a:solidFill>
-                  <a:srgbClr val="B3121B"/>
-                </a:solidFill>
-                <a:latin typeface="Yu Gothic" pitchFamily="34" charset="0"/>
-                <a:ea typeface="Yu Gothic" pitchFamily="34" charset="-122"/>
-                <a:cs typeface="Yu Gothic" pitchFamily="34" charset="-120"/>
-              </a:rPr>
-              <a:t>▲70〜90%</a:t>
-            </a:r>
-            <a:endParaRPr lang="en-US" sz="850" dirty="0"/>
-          </a:p>
-        </p:txBody>
-      </p:sp>
-      <p:sp>
-        <p:nvSpPr>
-          <p:cNvPr id="78" name="Text 76"/>
-          <p:cNvSpPr txBox="1"/>
-          <p:nvPr/>
-        </p:nvSpPr>
-        <p:spPr>
-          <a:xfrm>
-            <a:off x="5385816" y="5522976"/>
-            <a:ext cx="1335024" cy="237744"/>
-          </a:xfrm>
-          <a:prstGeom prst="rect">
-            <a:avLst/>
-          </a:prstGeom>
-          <a:noFill/>
-          <a:ln/>
-        </p:spPr>
-        <p:txBody>
-          <a:bodyPr wrap="square" lIns="0" tIns="0" rIns="0" bIns="0" rtlCol="0" anchor="ctr"/>
-          <a:lstStyle/>
-          <a:p>
-            <a:pPr indent="0" marL="0">
-              <a:buNone/>
-            </a:pPr>
-            <a:r>
-              <a:rPr lang="en-US" sz="750" dirty="0">
-                <a:solidFill>
-                  <a:srgbClr val="6E6E76"/>
-                </a:solidFill>
-                <a:latin typeface="Yu Gothic" pitchFamily="34" charset="0"/>
-                <a:ea typeface="Yu Gothic" pitchFamily="34" charset="-122"/>
-                <a:cs typeface="Yu Gothic" pitchFamily="34" charset="-120"/>
-              </a:rPr>
-              <a:t>ロケ・スタジオが消える</a:t>
-            </a:r>
-            <a:endParaRPr lang="en-US" sz="750" dirty="0"/>
-          </a:p>
-        </p:txBody>
-      </p:sp>
-      <p:sp>
-        <p:nvSpPr>
-          <p:cNvPr id="79" name="Text 77"/>
-          <p:cNvSpPr txBox="1"/>
-          <p:nvPr/>
-        </p:nvSpPr>
-        <p:spPr>
-          <a:xfrm>
-            <a:off x="594360" y="5797296"/>
-            <a:ext cx="1975104" cy="237744"/>
-          </a:xfrm>
-          <a:prstGeom prst="rect">
-            <a:avLst/>
-          </a:prstGeom>
-          <a:noFill/>
-          <a:ln/>
-        </p:spPr>
-        <p:txBody>
-          <a:bodyPr wrap="square" lIns="0" tIns="0" rIns="0" bIns="0" rtlCol="0" anchor="ctr"/>
-          <a:lstStyle/>
-          <a:p>
-            <a:pPr indent="0" marL="0">
-              <a:buNone/>
-            </a:pPr>
-            <a:r>
-              <a:rPr lang="en-US" sz="850" dirty="0">
-                <a:solidFill>
-                  <a:srgbClr val="3A3A42"/>
-                </a:solidFill>
-                <a:latin typeface="Yu Gothic" pitchFamily="34" charset="0"/>
-                <a:ea typeface="Yu Gothic" pitchFamily="34" charset="-122"/>
-                <a:cs typeface="Yu Gothic" pitchFamily="34" charset="-120"/>
-              </a:rPr>
-              <a:t>出演・キャスティング</a:t>
-            </a:r>
-            <a:endParaRPr lang="en-US" sz="850" dirty="0"/>
-          </a:p>
-        </p:txBody>
-      </p:sp>
-      <p:sp>
-        <p:nvSpPr>
-          <p:cNvPr id="80" name="Shape 78"/>
-          <p:cNvSpPr/>
-          <p:nvPr/>
-        </p:nvSpPr>
-        <p:spPr>
-          <a:xfrm>
-            <a:off x="2642616" y="5843016"/>
-            <a:ext cx="1645920" cy="146304"/>
-          </a:xfrm>
-          <a:prstGeom prst="rect">
-            <a:avLst/>
-          </a:prstGeom>
-          <a:solidFill>
-            <a:srgbClr val="B3121B"/>
-          </a:solidFill>
-          <a:ln/>
-        </p:spPr>
-      </p:sp>
-      <p:sp>
-        <p:nvSpPr>
-          <p:cNvPr id="81" name="Text 79"/>
-          <p:cNvSpPr txBox="1"/>
-          <p:nvPr/>
-        </p:nvSpPr>
-        <p:spPr>
-          <a:xfrm>
-            <a:off x="4544568" y="5797296"/>
-            <a:ext cx="804672" cy="237744"/>
-          </a:xfrm>
-          <a:prstGeom prst="rect">
-            <a:avLst/>
-          </a:prstGeom>
-          <a:noFill/>
-          <a:ln/>
-        </p:spPr>
-        <p:txBody>
-          <a:bodyPr wrap="square" lIns="0" tIns="0" rIns="0" bIns="0" rtlCol="0" anchor="ctr"/>
-          <a:lstStyle/>
-          <a:p>
-            <a:pPr indent="0" marL="0">
-              <a:buNone/>
-            </a:pPr>
-            <a:r>
-              <a:rPr lang="en-US" sz="850" b="1" dirty="0">
-                <a:solidFill>
-                  <a:srgbClr val="B3121B"/>
-                </a:solidFill>
-                <a:latin typeface="Yu Gothic" pitchFamily="34" charset="0"/>
-                <a:ea typeface="Yu Gothic" pitchFamily="34" charset="-122"/>
-                <a:cs typeface="Yu Gothic" pitchFamily="34" charset="-120"/>
-              </a:rPr>
-              <a:t>▲80〜100%</a:t>
-            </a:r>
-            <a:endParaRPr lang="en-US" sz="850" dirty="0"/>
-          </a:p>
-        </p:txBody>
-      </p:sp>
-      <p:sp>
-        <p:nvSpPr>
-          <p:cNvPr id="82" name="Text 80"/>
-          <p:cNvSpPr txBox="1"/>
-          <p:nvPr/>
-        </p:nvSpPr>
-        <p:spPr>
-          <a:xfrm>
-            <a:off x="5385816" y="5797296"/>
-            <a:ext cx="1335024" cy="237744"/>
-          </a:xfrm>
-          <a:prstGeom prst="rect">
-            <a:avLst/>
-          </a:prstGeom>
-          <a:noFill/>
-          <a:ln/>
-        </p:spPr>
-        <p:txBody>
-          <a:bodyPr wrap="square" lIns="0" tIns="0" rIns="0" bIns="0" rtlCol="0" anchor="ctr"/>
-          <a:lstStyle/>
-          <a:p>
-            <a:pPr indent="0" marL="0">
-              <a:buNone/>
-            </a:pPr>
-            <a:r>
-              <a:rPr lang="en-US" sz="750" dirty="0">
-                <a:solidFill>
-                  <a:srgbClr val="6E6E76"/>
-                </a:solidFill>
-                <a:latin typeface="Yu Gothic" pitchFamily="34" charset="0"/>
-                <a:ea typeface="Yu Gothic" pitchFamily="34" charset="-122"/>
-                <a:cs typeface="Yu Gothic" pitchFamily="34" charset="-120"/>
-              </a:rPr>
-              <a:t>AIアバター（※肖像権）</a:t>
-            </a:r>
-            <a:endParaRPr lang="en-US" sz="750" dirty="0"/>
-          </a:p>
-        </p:txBody>
-      </p:sp>
-      <p:sp>
-        <p:nvSpPr>
-          <p:cNvPr id="83" name="Text 81"/>
-          <p:cNvSpPr txBox="1"/>
-          <p:nvPr/>
-        </p:nvSpPr>
-        <p:spPr>
-          <a:xfrm>
-            <a:off x="594360" y="6071616"/>
-            <a:ext cx="1975104" cy="237744"/>
-          </a:xfrm>
-          <a:prstGeom prst="rect">
-            <a:avLst/>
-          </a:prstGeom>
-          <a:noFill/>
-          <a:ln/>
-        </p:spPr>
-        <p:txBody>
-          <a:bodyPr wrap="square" lIns="0" tIns="0" rIns="0" bIns="0" rtlCol="0" anchor="ctr"/>
-          <a:lstStyle/>
-          <a:p>
-            <a:pPr indent="0" marL="0">
-              <a:buNone/>
-            </a:pPr>
-            <a:r>
-              <a:rPr lang="en-US" sz="850" dirty="0">
-                <a:solidFill>
-                  <a:srgbClr val="3A3A42"/>
-                </a:solidFill>
-                <a:latin typeface="Yu Gothic" pitchFamily="34" charset="0"/>
-                <a:ea typeface="Yu Gothic" pitchFamily="34" charset="-122"/>
-                <a:cs typeface="Yu Gothic" pitchFamily="34" charset="-120"/>
-              </a:rPr>
-              <a:t>編集・MA</a:t>
-            </a:r>
-            <a:endParaRPr lang="en-US" sz="850" dirty="0"/>
-          </a:p>
-        </p:txBody>
-      </p:sp>
-      <p:sp>
-        <p:nvSpPr>
-          <p:cNvPr id="84" name="Shape 82"/>
-          <p:cNvSpPr/>
-          <p:nvPr/>
-        </p:nvSpPr>
-        <p:spPr>
-          <a:xfrm>
-            <a:off x="2642616" y="6117336"/>
-            <a:ext cx="914400" cy="146304"/>
-          </a:xfrm>
-          <a:prstGeom prst="rect">
-            <a:avLst/>
-          </a:prstGeom>
-          <a:solidFill>
-            <a:srgbClr val="B3121B"/>
-          </a:solidFill>
-          <a:ln/>
-        </p:spPr>
-      </p:sp>
-      <p:sp>
-        <p:nvSpPr>
-          <p:cNvPr id="85" name="Text 83"/>
-          <p:cNvSpPr txBox="1"/>
-          <p:nvPr/>
-        </p:nvSpPr>
-        <p:spPr>
-          <a:xfrm>
-            <a:off x="4544568" y="6071616"/>
-            <a:ext cx="804672" cy="237744"/>
-          </a:xfrm>
-          <a:prstGeom prst="rect">
-            <a:avLst/>
-          </a:prstGeom>
-          <a:noFill/>
-          <a:ln/>
-        </p:spPr>
-        <p:txBody>
-          <a:bodyPr wrap="square" lIns="0" tIns="0" rIns="0" bIns="0" rtlCol="0" anchor="ctr"/>
-          <a:lstStyle/>
-          <a:p>
-            <a:pPr indent="0" marL="0">
-              <a:buNone/>
-            </a:pPr>
-            <a:r>
-              <a:rPr lang="en-US" sz="850" b="1" dirty="0">
-                <a:solidFill>
-                  <a:srgbClr val="B3121B"/>
-                </a:solidFill>
-                <a:latin typeface="Yu Gothic" pitchFamily="34" charset="0"/>
-                <a:ea typeface="Yu Gothic" pitchFamily="34" charset="-122"/>
-                <a:cs typeface="Yu Gothic" pitchFamily="34" charset="-120"/>
-              </a:rPr>
-              <a:t>▲40〜60%</a:t>
-            </a:r>
-            <a:endParaRPr lang="en-US" sz="850" dirty="0"/>
-          </a:p>
-        </p:txBody>
-      </p:sp>
-      <p:sp>
-        <p:nvSpPr>
-          <p:cNvPr id="86" name="Text 84"/>
-          <p:cNvSpPr txBox="1"/>
-          <p:nvPr/>
-        </p:nvSpPr>
-        <p:spPr>
-          <a:xfrm>
-            <a:off x="5385816" y="6071616"/>
-            <a:ext cx="1335024" cy="237744"/>
-          </a:xfrm>
-          <a:prstGeom prst="rect">
-            <a:avLst/>
-          </a:prstGeom>
-          <a:noFill/>
-          <a:ln/>
-        </p:spPr>
-        <p:txBody>
-          <a:bodyPr wrap="square" lIns="0" tIns="0" rIns="0" bIns="0" rtlCol="0" anchor="ctr"/>
-          <a:lstStyle/>
-          <a:p>
-            <a:pPr indent="0" marL="0">
-              <a:buNone/>
-            </a:pPr>
-            <a:r>
-              <a:rPr lang="en-US" sz="750" dirty="0">
-                <a:solidFill>
-                  <a:srgbClr val="6E6E76"/>
-                </a:solidFill>
-                <a:latin typeface="Yu Gothic" pitchFamily="34" charset="0"/>
-                <a:ea typeface="Yu Gothic" pitchFamily="34" charset="-122"/>
-                <a:cs typeface="Yu Gothic" pitchFamily="34" charset="-120"/>
-              </a:rPr>
-              <a:t>自動編集・AI音声</a:t>
-            </a:r>
-            <a:endParaRPr lang="en-US" sz="750" dirty="0"/>
-          </a:p>
-        </p:txBody>
-      </p:sp>
-      <p:sp>
-        <p:nvSpPr>
-          <p:cNvPr id="87" name="Shape 85"/>
-          <p:cNvSpPr/>
-          <p:nvPr/>
-        </p:nvSpPr>
-        <p:spPr>
-          <a:xfrm>
-            <a:off x="6903720" y="4626864"/>
-            <a:ext cx="4690872" cy="1517904"/>
+            <a:off x="6263640" y="4553712"/>
+            <a:ext cx="5330952" cy="1572768"/>
           </a:xfrm>
           <a:prstGeom prst="rect">
             <a:avLst/>
@@ -5414,13 +6652,13 @@
       </p:sp>
       <p:sp>
         <p:nvSpPr>
-          <p:cNvPr id="88" name="Shape 86"/>
+          <p:cNvPr id="43" name="Shape 40"/>
           <p:cNvSpPr/>
           <p:nvPr/>
         </p:nvSpPr>
         <p:spPr>
           <a:xfrm>
-            <a:off x="7123176" y="4882896"/>
+            <a:off x="6483096" y="4809744"/>
             <a:ext cx="109728" cy="109728"/>
           </a:xfrm>
           <a:prstGeom prst="rect">
@@ -5434,14 +6672,14 @@
       </p:sp>
       <p:sp>
         <p:nvSpPr>
-          <p:cNvPr id="89" name="Text 87"/>
+          <p:cNvPr id="44" name="Text 41"/>
           <p:cNvSpPr txBox="1"/>
           <p:nvPr/>
         </p:nvSpPr>
         <p:spPr>
           <a:xfrm>
-            <a:off x="7342632" y="4791456"/>
-            <a:ext cx="4032504" cy="292608"/>
+            <a:off x="6702552" y="4718304"/>
+            <a:ext cx="4672584" cy="292608"/>
           </a:xfrm>
           <a:prstGeom prst="rect">
             <a:avLst/>
@@ -5465,7 +6703,7 @@
                 <a:ea typeface="Yu Gothic" pitchFamily="34" charset="-122"/>
                 <a:cs typeface="Yu Gothic" pitchFamily="34" charset="-120"/>
               </a:rPr>
-              <a:t>実際に出ている削減幅</a:t>
+              <a:t>実際に出ている削減幅（実例）</a:t>
             </a:r>
             <a:endParaRPr lang="en-US" sz="1250" dirty="0"/>
           </a:p>
@@ -5473,14 +6711,14 @@
       </p:sp>
       <p:sp>
         <p:nvSpPr>
-          <p:cNvPr id="90" name="Text 88"/>
+          <p:cNvPr id="45" name="Text 42"/>
           <p:cNvSpPr txBox="1"/>
           <p:nvPr/>
         </p:nvSpPr>
         <p:spPr>
           <a:xfrm>
-            <a:off x="7342632" y="5138928"/>
-            <a:ext cx="4032504" cy="822960"/>
+            <a:off x="6702552" y="5065776"/>
+            <a:ext cx="4672584" cy="877824"/>
           </a:xfrm>
           <a:prstGeom prst="rect">
             <a:avLst/>
@@ -5571,11 +6809,31 @@
             </a:r>
             <a:endParaRPr lang="en-US" sz="950" dirty="0"/>
           </a:p>
+          <a:p>
+            <a:pPr indent="0" marL="0">
+              <a:lnSpc>
+                <a:spcPct val="126000"/>
+              </a:lnSpc>
+              <a:buNone/>
+            </a:pPr>
+            <a:r>
+              <a:rPr lang="en-US" sz="950" dirty="0">
+                <a:solidFill>
+                  <a:srgbClr val="3A3A42"/>
+                </a:solidFill>
+                <a:latin typeface="Yu Gothic" pitchFamily="34" charset="0"/>
+                <a:ea typeface="Yu Gothic" pitchFamily="34" charset="-122"/>
+                <a:cs typeface="Yu Gothic" pitchFamily="34" charset="-120"/>
+              </a:rPr>
+              <a:t>米国の企業動画　1分あたり 約63万円 → 約38万円（▲40%・実測）</a:t>
+            </a:r>
+            <a:endParaRPr lang="en-US" sz="950" dirty="0"/>
+          </a:p>
         </p:txBody>
       </p:sp>
       <p:sp>
         <p:nvSpPr>
-          <p:cNvPr id="91" name="Text 89"/>
+          <p:cNvPr id="46" name="Text 43"/>
           <p:cNvSpPr txBox="1"/>
           <p:nvPr/>
         </p:nvSpPr>
@@ -5606,7 +6864,7 @@
                 <a:ea typeface="Yu Gothic" pitchFamily="34" charset="-122"/>
                 <a:cs typeface="Yu Gothic" pitchFamily="34" charset="-120"/>
               </a:rPr>
-              <a:t>出所: 動画幹事・ムビサク・デジタルドロップ（制作費相場／撮影費は制作費の35〜40%）／ ムービーインパクト（AI導入の削減事例）／ 各社プレスリリース。相場はレンジで、案件条件により大きく変動します</a:t>
+              <a:t>出所: 動画幹事・ムビサク・デジタルドロップ（制作費相場／撮影費は制作費の35〜40%）／ ムービーインパクト・各社プレスリリース（AI導入の削減事例）／ Vidico（米国の1分単価）。用途別の削減率は、工程別の削減率（企画▲50%・撮影▲80%・機材▲80%・出演▲90%・編集▲50%・諸経費▲30%）を費用構成に当てた当社試算です</a:t>
             </a:r>
             <a:endParaRPr lang="en-US" sz="800" dirty="0"/>
           </a:p>
@@ -5614,7 +6872,7 @@
       </p:sp>
       <p:sp>
         <p:nvSpPr>
-          <p:cNvPr id="92" name="Text 90"/>
+          <p:cNvPr id="47" name="Text 44"/>
           <p:cNvSpPr txBox="1"/>
           <p:nvPr/>
         </p:nvSpPr>
